--- a/SAP_Analytics_Cloud_Planning.pptx
+++ b/SAP_Analytics_Cloud_Planning.pptx
@@ -3290,7 +3290,7 @@
         <p:spPr>
           <a:xfrm>
             <a:off x="1143000" y="914400"/>
-            <a:ext cx="8229600" cy="457200"/>
+            <a:ext cx="9144000" cy="457200"/>
           </a:xfrm>
           <a:prstGeom prst="rect">
             <a:avLst/>
@@ -3321,7 +3321,7 @@
                 </a:solidFill>
                 <a:latin typeface="Segoe UI Semibold"/>
               </a:rPr>
-              <a:t>SOLUCIÓN DE PLANIFICACIÓN EMPRESARIAL</a:t>
+              <a:t>PLANIFICACIÓN PARA LA TOMA DE DECISIONES</a:t>
             </a:r>
           </a:p>
         </p:txBody>
@@ -3382,13 +3382,13 @@
               </a:spcAft>
             </a:pPr>
             <a:r>
-              <a:rPr sz="4000" b="0">
+              <a:rPr sz="3800" b="0">
                 <a:solidFill>
                   <a:srgbClr val="F5B241"/>
                 </a:solidFill>
                 <a:latin typeface="Segoe UI Light"/>
               </a:rPr>
-              <a:t>Enfoque en Planning</a:t>
+              <a:t>El futuro del negocio, planificado</a:t>
             </a:r>
           </a:p>
         </p:txBody>
@@ -3402,7 +3402,7 @@
         <p:spPr>
           <a:xfrm>
             <a:off x="1133856" y="3703320"/>
-            <a:ext cx="8778240" cy="914400"/>
+            <a:ext cx="8961120" cy="914400"/>
           </a:xfrm>
           <a:prstGeom prst="rect">
             <a:avLst/>
@@ -3433,7 +3433,7 @@
                 </a:solidFill>
                 <a:latin typeface="Segoe UI"/>
               </a:rPr>
-              <a:t>Planificación conectada, colaborativa e inteligente para Finanzas, Ventas y Recursos Humanos en una única plataforma en la nube.</a:t>
+              <a:t>Una plataforma para planificar, anticipar y decidir con datos fiables. Menos hojas de cálculo, más visión de negocio.</a:t>
             </a:r>
           </a:p>
         </p:txBody>
@@ -3522,7 +3522,7 @@
                 </a:solidFill>
                 <a:latin typeface="Segoe UI Semibold"/>
               </a:rPr>
-              <a:t>Planificación</a:t>
+              <a:t>Visión</a:t>
             </a:r>
           </a:p>
         </p:txBody>
@@ -3611,7 +3611,7 @@
                 </a:solidFill>
                 <a:latin typeface="Segoe UI Semibold"/>
               </a:rPr>
-              <a:t>Análisis</a:t>
+              <a:t>Control</a:t>
             </a:r>
           </a:p>
         </p:txBody>
@@ -3700,7 +3700,7 @@
                 </a:solidFill>
                 <a:latin typeface="Segoe UI Semibold"/>
               </a:rPr>
-              <a:t>Predicción</a:t>
+              <a:t>Agilidad</a:t>
             </a:r>
           </a:p>
         </p:txBody>
@@ -3745,7 +3745,7 @@
                 </a:solidFill>
                 <a:latin typeface="Segoe UI"/>
               </a:rPr>
-              <a:t>Presentación profesional  ·  2026</a:t>
+              <a:t>Sesión para el equipo directivo  ·  2026</a:t>
             </a:r>
           </a:p>
         </p:txBody>
@@ -4015,7 +4015,7 @@
                 </a:solidFill>
                 <a:latin typeface="Segoe UI Light"/>
               </a:rPr>
-              <a:t>con los datos del presente.</a:t>
+              <a:t>con datos en los que confiar.</a:t>
             </a:r>
           </a:p>
         </p:txBody>
@@ -4060,7 +4060,7 @@
                 </a:solidFill>
                 <a:latin typeface="Segoe UI"/>
               </a:rPr>
-              <a:t>SAP Analytics Cloud Planning unifica análisis y planificación en una sola plataforma en la nube: colaborativa, inteligente y conectada.</a:t>
+              <a:t>SAP Analytics Cloud reúne análisis y planificación en una sola plataforma: más ágil, más fiable y alineada con toda la empresa.</a:t>
             </a:r>
           </a:p>
         </p:txBody>
@@ -4105,7 +4105,7 @@
                 </a:solidFill>
                 <a:latin typeface="Segoe UI Semibold"/>
               </a:rPr>
-              <a:t>¿Preguntas?  </a:t>
+              <a:t>¿Hablamos?  </a:t>
             </a:r>
             <a:r>
               <a:rPr sz="1400" b="0">
@@ -4235,31 +4235,7 @@
       </p:sp>
       <p:sp>
         <p:nvSpPr>
-          <p:cNvPr id="4" name="TextBox 3"/>
-          <p:cNvSpPr txBox="1"/>
-          <p:nvPr/>
-        </p:nvSpPr>
-        <p:spPr>
-          <a:xfrm>
-            <a:off x="548640" y="822960"/>
-            <a:ext cx="146304" cy="822960"/>
-          </a:xfrm>
-          <a:prstGeom prst="rect">
-            <a:avLst/>
-          </a:prstGeom>
-          <a:noFill/>
-        </p:spPr>
-        <p:txBody>
-          <a:bodyPr wrap="square" anchor="t" lIns="0" rIns="0" tIns="0" bIns="0">
-            <a:spAutoFit/>
-          </a:bodyPr>
-          <a:lstStyle/>
-          <a:p/>
-        </p:txBody>
-      </p:sp>
-      <p:sp>
-        <p:nvSpPr>
-          <p:cNvPr id="5" name="Rectangle 4"/>
+          <p:cNvPr id="4" name="Rectangle 3"/>
           <p:cNvSpPr/>
           <p:nvPr/>
         </p:nvSpPr>
@@ -4303,7 +4279,7 @@
       </p:sp>
       <p:sp>
         <p:nvSpPr>
-          <p:cNvPr id="6" name="TextBox 5"/>
+          <p:cNvPr id="5" name="TextBox 4"/>
           <p:cNvSpPr txBox="1"/>
           <p:nvPr/>
         </p:nvSpPr>
@@ -4348,7 +4324,7 @@
       </p:sp>
       <p:sp>
         <p:nvSpPr>
-          <p:cNvPr id="7" name="TextBox 6"/>
+          <p:cNvPr id="6" name="TextBox 5"/>
           <p:cNvSpPr txBox="1"/>
           <p:nvPr/>
         </p:nvSpPr>
@@ -4386,21 +4362,21 @@
                 </a:solidFill>
                 <a:latin typeface="Segoe UI Semibold"/>
               </a:rPr>
-              <a:t>Agenda de la sesión</a:t>
-            </a:r>
-          </a:p>
-        </p:txBody>
-      </p:sp>
-      <p:sp>
-        <p:nvSpPr>
-          <p:cNvPr id="8" name="TextBox 7"/>
-          <p:cNvSpPr txBox="1"/>
-          <p:nvPr/>
-        </p:nvSpPr>
-        <p:spPr>
-          <a:xfrm>
-            <a:off x="777240" y="5394960"/>
-            <a:ext cx="3108960" cy="914400"/>
+              <a:t>Recorrido de hoy</a:t>
+            </a:r>
+          </a:p>
+        </p:txBody>
+      </p:sp>
+      <p:sp>
+        <p:nvSpPr>
+          <p:cNvPr id="7" name="TextBox 6"/>
+          <p:cNvSpPr txBox="1"/>
+          <p:nvPr/>
+        </p:nvSpPr>
+        <p:spPr>
+          <a:xfrm>
+            <a:off x="777240" y="5349240"/>
+            <a:ext cx="3108960" cy="1097280"/>
           </a:xfrm>
           <a:prstGeom prst="rect">
             <a:avLst/>
@@ -4431,14 +4407,14 @@
                 </a:solidFill>
                 <a:latin typeface="Segoe UI"/>
               </a:rPr>
-              <a:t>Un recorrido desde la visión general de la plataforma hasta las capacidades específicas de Planning.</a:t>
-            </a:r>
-          </a:p>
-        </p:txBody>
-      </p:sp>
-      <p:sp>
-        <p:nvSpPr>
-          <p:cNvPr id="9" name="Rounded Rectangle 8"/>
+              <a:t>Del problema que vivimos hoy al valor que aporta al negocio. Sin tecnicismos.</a:t>
+            </a:r>
+          </a:p>
+        </p:txBody>
+      </p:sp>
+      <p:sp>
+        <p:nvSpPr>
+          <p:cNvPr id="8" name="Rounded Rectangle 7"/>
           <p:cNvSpPr/>
           <p:nvPr/>
         </p:nvSpPr>
@@ -4489,7 +4465,7 @@
       </p:sp>
       <p:sp>
         <p:nvSpPr>
-          <p:cNvPr id="10" name="Rounded Rectangle 9"/>
+          <p:cNvPr id="9" name="Rounded Rectangle 8"/>
           <p:cNvSpPr/>
           <p:nvPr/>
         </p:nvSpPr>
@@ -4533,7 +4509,7 @@
       </p:sp>
       <p:sp>
         <p:nvSpPr>
-          <p:cNvPr id="11" name="TextBox 10"/>
+          <p:cNvPr id="10" name="TextBox 9"/>
           <p:cNvSpPr txBox="1"/>
           <p:nvPr/>
         </p:nvSpPr>
@@ -4578,7 +4554,7 @@
       </p:sp>
       <p:sp>
         <p:nvSpPr>
-          <p:cNvPr id="12" name="TextBox 11"/>
+          <p:cNvPr id="11" name="TextBox 10"/>
           <p:cNvSpPr txBox="1"/>
           <p:nvPr/>
         </p:nvSpPr>
@@ -4616,14 +4592,14 @@
                 </a:solidFill>
                 <a:latin typeface="Segoe UI Semibold"/>
               </a:rPr>
-              <a:t>¿Qué es SAP Analytics Cloud?</a:t>
-            </a:r>
-          </a:p>
-        </p:txBody>
-      </p:sp>
-      <p:sp>
-        <p:nvSpPr>
-          <p:cNvPr id="13" name="TextBox 12"/>
+              <a:t>El reto que tenemos hoy</a:t>
+            </a:r>
+          </a:p>
+        </p:txBody>
+      </p:sp>
+      <p:sp>
+        <p:nvSpPr>
+          <p:cNvPr id="12" name="TextBox 11"/>
           <p:cNvSpPr txBox="1"/>
           <p:nvPr/>
         </p:nvSpPr>
@@ -4661,14 +4637,14 @@
                 </a:solidFill>
                 <a:latin typeface="Segoe UI"/>
               </a:rPr>
-              <a:t>Plataforma y propuesta de valor</a:t>
-            </a:r>
-          </a:p>
-        </p:txBody>
-      </p:sp>
-      <p:sp>
-        <p:nvSpPr>
-          <p:cNvPr id="14" name="Rounded Rectangle 13"/>
+              <a:t>Por qué planificar nos cuesta tanto</a:t>
+            </a:r>
+          </a:p>
+        </p:txBody>
+      </p:sp>
+      <p:sp>
+        <p:nvSpPr>
+          <p:cNvPr id="13" name="Rounded Rectangle 12"/>
           <p:cNvSpPr/>
           <p:nvPr/>
         </p:nvSpPr>
@@ -4719,7 +4695,7 @@
       </p:sp>
       <p:sp>
         <p:nvSpPr>
-          <p:cNvPr id="15" name="Rounded Rectangle 14"/>
+          <p:cNvPr id="14" name="Rounded Rectangle 13"/>
           <p:cNvSpPr/>
           <p:nvPr/>
         </p:nvSpPr>
@@ -4763,7 +4739,7 @@
       </p:sp>
       <p:sp>
         <p:nvSpPr>
-          <p:cNvPr id="16" name="TextBox 15"/>
+          <p:cNvPr id="15" name="TextBox 14"/>
           <p:cNvSpPr txBox="1"/>
           <p:nvPr/>
         </p:nvSpPr>
@@ -4808,7 +4784,7 @@
       </p:sp>
       <p:sp>
         <p:nvSpPr>
-          <p:cNvPr id="17" name="TextBox 16"/>
+          <p:cNvPr id="16" name="TextBox 15"/>
           <p:cNvSpPr txBox="1"/>
           <p:nvPr/>
         </p:nvSpPr>
@@ -4846,14 +4822,14 @@
                 </a:solidFill>
                 <a:latin typeface="Segoe UI Semibold"/>
               </a:rPr>
-              <a:t>Los tres pilares de la plataforma</a:t>
-            </a:r>
-          </a:p>
-        </p:txBody>
-      </p:sp>
-      <p:sp>
-        <p:nvSpPr>
-          <p:cNvPr id="18" name="TextBox 17"/>
+              <a:t>¿Qué es SAP Analytics Cloud?</a:t>
+            </a:r>
+          </a:p>
+        </p:txBody>
+      </p:sp>
+      <p:sp>
+        <p:nvSpPr>
+          <p:cNvPr id="17" name="TextBox 16"/>
           <p:cNvSpPr txBox="1"/>
           <p:nvPr/>
         </p:nvSpPr>
@@ -4891,14 +4867,14 @@
                 </a:solidFill>
                 <a:latin typeface="Segoe UI"/>
               </a:rPr>
-              <a:t>BI, Planning y Predictive</a:t>
-            </a:r>
-          </a:p>
-        </p:txBody>
-      </p:sp>
-      <p:sp>
-        <p:nvSpPr>
-          <p:cNvPr id="19" name="Rounded Rectangle 18"/>
+              <a:t>Una única plataforma, explicada simple</a:t>
+            </a:r>
+          </a:p>
+        </p:txBody>
+      </p:sp>
+      <p:sp>
+        <p:nvSpPr>
+          <p:cNvPr id="18" name="Rounded Rectangle 17"/>
           <p:cNvSpPr/>
           <p:nvPr/>
         </p:nvSpPr>
@@ -4949,7 +4925,7 @@
       </p:sp>
       <p:sp>
         <p:nvSpPr>
-          <p:cNvPr id="20" name="Rounded Rectangle 19"/>
+          <p:cNvPr id="19" name="Rounded Rectangle 18"/>
           <p:cNvSpPr/>
           <p:nvPr/>
         </p:nvSpPr>
@@ -4993,7 +4969,7 @@
       </p:sp>
       <p:sp>
         <p:nvSpPr>
-          <p:cNvPr id="21" name="TextBox 20"/>
+          <p:cNvPr id="20" name="TextBox 19"/>
           <p:cNvSpPr txBox="1"/>
           <p:nvPr/>
         </p:nvSpPr>
@@ -5038,7 +5014,7 @@
       </p:sp>
       <p:sp>
         <p:nvSpPr>
-          <p:cNvPr id="22" name="TextBox 21"/>
+          <p:cNvPr id="21" name="TextBox 20"/>
           <p:cNvSpPr txBox="1"/>
           <p:nvPr/>
         </p:nvSpPr>
@@ -5076,14 +5052,14 @@
                 </a:solidFill>
                 <a:latin typeface="Segoe UI Semibold"/>
               </a:rPr>
-              <a:t>¿Qué es SAC Planning?</a:t>
-            </a:r>
-          </a:p>
-        </p:txBody>
-      </p:sp>
-      <p:sp>
-        <p:nvSpPr>
-          <p:cNvPr id="23" name="TextBox 22"/>
+              <a:t>Qué aporta a la dirección</a:t>
+            </a:r>
+          </a:p>
+        </p:txBody>
+      </p:sp>
+      <p:sp>
+        <p:nvSpPr>
+          <p:cNvPr id="22" name="TextBox 21"/>
           <p:cNvSpPr txBox="1"/>
           <p:nvPr/>
         </p:nvSpPr>
@@ -5121,14 +5097,14 @@
                 </a:solidFill>
                 <a:latin typeface="Segoe UI"/>
               </a:rPr>
-              <a:t>Concepto y alcance</a:t>
-            </a:r>
-          </a:p>
-        </p:txBody>
-      </p:sp>
-      <p:sp>
-        <p:nvSpPr>
-          <p:cNvPr id="24" name="Rounded Rectangle 23"/>
+              <a:t>Planificar mirando al futuro</a:t>
+            </a:r>
+          </a:p>
+        </p:txBody>
+      </p:sp>
+      <p:sp>
+        <p:nvSpPr>
+          <p:cNvPr id="23" name="Rounded Rectangle 22"/>
           <p:cNvSpPr/>
           <p:nvPr/>
         </p:nvSpPr>
@@ -5179,7 +5155,7 @@
       </p:sp>
       <p:sp>
         <p:nvSpPr>
-          <p:cNvPr id="25" name="Rounded Rectangle 24"/>
+          <p:cNvPr id="24" name="Rounded Rectangle 23"/>
           <p:cNvSpPr/>
           <p:nvPr/>
         </p:nvSpPr>
@@ -5223,7 +5199,7 @@
       </p:sp>
       <p:sp>
         <p:nvSpPr>
-          <p:cNvPr id="26" name="TextBox 25"/>
+          <p:cNvPr id="25" name="TextBox 24"/>
           <p:cNvSpPr txBox="1"/>
           <p:nvPr/>
         </p:nvSpPr>
@@ -5268,7 +5244,7 @@
       </p:sp>
       <p:sp>
         <p:nvSpPr>
-          <p:cNvPr id="27" name="TextBox 26"/>
+          <p:cNvPr id="26" name="TextBox 25"/>
           <p:cNvSpPr txBox="1"/>
           <p:nvPr/>
         </p:nvSpPr>
@@ -5306,14 +5282,14 @@
                 </a:solidFill>
                 <a:latin typeface="Segoe UI Semibold"/>
               </a:rPr>
-              <a:t>Capacidades clave de Planning</a:t>
-            </a:r>
-          </a:p>
-        </p:txBody>
-      </p:sp>
-      <p:sp>
-        <p:nvSpPr>
-          <p:cNvPr id="28" name="TextBox 27"/>
+              <a:t>Qué podremos hacer</a:t>
+            </a:r>
+          </a:p>
+        </p:txBody>
+      </p:sp>
+      <p:sp>
+        <p:nvSpPr>
+          <p:cNvPr id="27" name="TextBox 26"/>
           <p:cNvSpPr txBox="1"/>
           <p:nvPr/>
         </p:nvSpPr>
@@ -5351,14 +5327,14 @@
                 </a:solidFill>
                 <a:latin typeface="Segoe UI"/>
               </a:rPr>
-              <a:t>Funcionalidades diferenciadoras</a:t>
-            </a:r>
-          </a:p>
-        </p:txBody>
-      </p:sp>
-      <p:sp>
-        <p:nvSpPr>
-          <p:cNvPr id="29" name="Rounded Rectangle 28"/>
+              <a:t>En lenguaje de negocio</a:t>
+            </a:r>
+          </a:p>
+        </p:txBody>
+      </p:sp>
+      <p:sp>
+        <p:nvSpPr>
+          <p:cNvPr id="28" name="Rounded Rectangle 27"/>
           <p:cNvSpPr/>
           <p:nvPr/>
         </p:nvSpPr>
@@ -5409,7 +5385,7 @@
       </p:sp>
       <p:sp>
         <p:nvSpPr>
-          <p:cNvPr id="30" name="Rounded Rectangle 29"/>
+          <p:cNvPr id="29" name="Rounded Rectangle 28"/>
           <p:cNvSpPr/>
           <p:nvPr/>
         </p:nvSpPr>
@@ -5453,7 +5429,7 @@
       </p:sp>
       <p:sp>
         <p:nvSpPr>
-          <p:cNvPr id="31" name="TextBox 30"/>
+          <p:cNvPr id="30" name="TextBox 29"/>
           <p:cNvSpPr txBox="1"/>
           <p:nvPr/>
         </p:nvSpPr>
@@ -5498,7 +5474,7 @@
       </p:sp>
       <p:sp>
         <p:nvSpPr>
-          <p:cNvPr id="32" name="TextBox 31"/>
+          <p:cNvPr id="31" name="TextBox 30"/>
           <p:cNvSpPr txBox="1"/>
           <p:nvPr/>
         </p:nvSpPr>
@@ -5536,14 +5512,14 @@
                 </a:solidFill>
                 <a:latin typeface="Segoe UI Semibold"/>
               </a:rPr>
-              <a:t>El ciclo de planificación</a:t>
-            </a:r>
-          </a:p>
-        </p:txBody>
-      </p:sp>
-      <p:sp>
-        <p:nvSpPr>
-          <p:cNvPr id="33" name="TextBox 32"/>
+              <a:t>Antes y después</a:t>
+            </a:r>
+          </a:p>
+        </p:txBody>
+      </p:sp>
+      <p:sp>
+        <p:nvSpPr>
+          <p:cNvPr id="32" name="TextBox 31"/>
           <p:cNvSpPr txBox="1"/>
           <p:nvPr/>
         </p:nvSpPr>
@@ -5581,14 +5557,14 @@
                 </a:solidFill>
                 <a:latin typeface="Segoe UI"/>
               </a:rPr>
-              <a:t>Del dato a la decisión</a:t>
-            </a:r>
-          </a:p>
-        </p:txBody>
-      </p:sp>
-      <p:sp>
-        <p:nvSpPr>
-          <p:cNvPr id="34" name="Rounded Rectangle 33"/>
+              <a:t>El cambio, de un vistazo</a:t>
+            </a:r>
+          </a:p>
+        </p:txBody>
+      </p:sp>
+      <p:sp>
+        <p:nvSpPr>
+          <p:cNvPr id="33" name="Rounded Rectangle 32"/>
           <p:cNvSpPr/>
           <p:nvPr/>
         </p:nvSpPr>
@@ -5639,7 +5615,7 @@
       </p:sp>
       <p:sp>
         <p:nvSpPr>
-          <p:cNvPr id="35" name="Rounded Rectangle 34"/>
+          <p:cNvPr id="34" name="Rounded Rectangle 33"/>
           <p:cNvSpPr/>
           <p:nvPr/>
         </p:nvSpPr>
@@ -5683,7 +5659,7 @@
       </p:sp>
       <p:sp>
         <p:nvSpPr>
-          <p:cNvPr id="36" name="TextBox 35"/>
+          <p:cNvPr id="35" name="TextBox 34"/>
           <p:cNvSpPr txBox="1"/>
           <p:nvPr/>
         </p:nvSpPr>
@@ -5728,7 +5704,7 @@
       </p:sp>
       <p:sp>
         <p:nvSpPr>
-          <p:cNvPr id="37" name="TextBox 36"/>
+          <p:cNvPr id="36" name="TextBox 35"/>
           <p:cNvSpPr txBox="1"/>
           <p:nvPr/>
         </p:nvSpPr>
@@ -5766,14 +5742,14 @@
                 </a:solidFill>
                 <a:latin typeface="Segoe UI Semibold"/>
               </a:rPr>
-              <a:t>Casos de uso y beneficios</a:t>
-            </a:r>
-          </a:p>
-        </p:txBody>
-      </p:sp>
-      <p:sp>
-        <p:nvSpPr>
-          <p:cNvPr id="38" name="TextBox 37"/>
+              <a:t>Impacto y beneficios</a:t>
+            </a:r>
+          </a:p>
+        </p:txBody>
+      </p:sp>
+      <p:sp>
+        <p:nvSpPr>
+          <p:cNvPr id="37" name="TextBox 36"/>
           <p:cNvSpPr txBox="1"/>
           <p:nvPr/>
         </p:nvSpPr>
@@ -5811,14 +5787,14 @@
                 </a:solidFill>
                 <a:latin typeface="Segoe UI"/>
               </a:rPr>
-              <a:t>FP&amp;A, ventas y RR. HH.</a:t>
-            </a:r>
-          </a:p>
-        </p:txBody>
-      </p:sp>
-      <p:sp>
-        <p:nvSpPr>
-          <p:cNvPr id="39" name="TextBox 38"/>
+              <a:t>Valor para cada área</a:t>
+            </a:r>
+          </a:p>
+        </p:txBody>
+      </p:sp>
+      <p:sp>
+        <p:nvSpPr>
+          <p:cNvPr id="38" name="TextBox 37"/>
           <p:cNvSpPr txBox="1"/>
           <p:nvPr/>
         </p:nvSpPr>
@@ -5863,7 +5839,7 @@
       </p:sp>
       <p:sp>
         <p:nvSpPr>
-          <p:cNvPr id="40" name="TextBox 39"/>
+          <p:cNvPr id="39" name="TextBox 38"/>
           <p:cNvSpPr txBox="1"/>
           <p:nvPr/>
         </p:nvSpPr>
@@ -6016,7 +5992,7 @@
                 </a:solidFill>
                 <a:latin typeface="Segoe UI Semibold"/>
               </a:rPr>
-              <a:t>VISIÓN GENERAL</a:t>
+              <a:t>EL PUNTO DE PARTIDA</a:t>
             </a:r>
           </a:p>
         </p:txBody>
@@ -6061,7 +6037,7 @@
                 </a:solidFill>
                 <a:latin typeface="Segoe UI Semibold"/>
               </a:rPr>
-              <a:t>¿Qué es SAP Analytics Cloud?</a:t>
+              <a:t>El reto que tenemos hoy</a:t>
             </a:r>
           </a:p>
         </p:txBody>
@@ -6074,8 +6050,8 @@
         </p:nvSpPr>
         <p:spPr>
           <a:xfrm>
-            <a:off x="777240" y="1691640"/>
-            <a:ext cx="5669280" cy="2194560"/>
+            <a:off x="777240" y="1463040"/>
+            <a:ext cx="10607040" cy="457200"/>
           </a:xfrm>
           <a:prstGeom prst="rect">
             <a:avLst/>
@@ -6090,67 +6066,23 @@
           <a:p>
             <a:pPr algn="l">
               <a:lnSpc>
-                <a:spcPct val="128000"/>
-              </a:lnSpc>
-              <a:spcBef>
-                <a:spcPts val="0"/>
-              </a:spcBef>
-              <a:spcAft>
-                <a:spcPts val="800"/>
-              </a:spcAft>
-            </a:pPr>
-            <a:r>
-              <a:rPr sz="1550" b="0">
-                <a:solidFill>
-                  <a:srgbClr val="132A3E"/>
+                <a:spcPct val="100000"/>
+              </a:lnSpc>
+              <a:spcBef>
+                <a:spcPts val="0"/>
+              </a:spcBef>
+              <a:spcAft>
+                <a:spcPts val="0"/>
+              </a:spcAft>
+            </a:pPr>
+            <a:r>
+              <a:rPr sz="1400" b="0">
+                <a:solidFill>
+                  <a:srgbClr val="5B6B7B"/>
                 </a:solidFill>
                 <a:latin typeface="Segoe UI"/>
               </a:rPr>
-              <a:t>SAP Analytics Cloud (SAC) es la solución SaaS de análisis de SAP que reúne, en un único entorno en la nube, las capacidades de inteligencia de negocio, planificación empresarial y análisis predictivo.</a:t>
-            </a:r>
-          </a:p>
-          <a:p>
-            <a:pPr algn="l">
-              <a:lnSpc>
-                <a:spcPct val="128000"/>
-              </a:lnSpc>
-              <a:spcBef>
-                <a:spcPts val="0"/>
-              </a:spcBef>
-              <a:spcAft>
-                <a:spcPts val="800"/>
-              </a:spcAft>
-            </a:pPr>
-            <a:r>
-              <a:rPr sz="600" b="0">
-                <a:solidFill>
-                  <a:srgbClr val="132A3E"/>
-                </a:solidFill>
-                <a:latin typeface="Segoe UI"/>
-              </a:rPr>
-              <a:t/>
-            </a:r>
-          </a:p>
-          <a:p>
-            <a:pPr algn="l">
-              <a:lnSpc>
-                <a:spcPct val="128000"/>
-              </a:lnSpc>
-              <a:spcBef>
-                <a:spcPts val="0"/>
-              </a:spcBef>
-              <a:spcAft>
-                <a:spcPts val="800"/>
-              </a:spcAft>
-            </a:pPr>
-            <a:r>
-              <a:rPr sz="1400" b="0">
-                <a:solidFill>
-                  <a:srgbClr val="5B6B7B"/>
-                </a:solidFill>
-                <a:latin typeface="Segoe UI"/>
-              </a:rPr>
-              <a:t>Su propuesta central es eliminar los silos entre el reporting del pasado y la planificación del futuro: los mismos datos, modelos y usuarios trabajan sobre una sola plataforma de “confianza única”.</a:t>
+              <a:t>Planificar el negocio sigue siendo lento, disperso y poco fiable. Estos son los síntomas habituales:</a:t>
             </a:r>
           </a:p>
         </p:txBody>
@@ -6163,864 +6095,8 @@
         </p:nvSpPr>
         <p:spPr>
           <a:xfrm>
-            <a:off x="6903720" y="1691640"/>
-            <a:ext cx="4572000" cy="4160520"/>
-          </a:xfrm>
-          <a:prstGeom prst="roundRect">
-            <a:avLst/>
-          </a:prstGeom>
-          <a:solidFill>
-            <a:srgbClr val="0A2A43"/>
-          </a:solidFill>
-          <a:ln>
-            <a:noFill/>
-          </a:ln>
-          <a:effectLst/>
-          <a:effectLst>
-            <a:outerShdw blurRad="90000" dist="40000" dir="5400000" rotWithShape="0">
-              <a:srgbClr val="0A2A43">
-                <a:alpha val="22000"/>
-              </a:srgbClr>
-            </a:outerShdw>
-          </a:effectLst>
-        </p:spPr>
-        <p:style>
-          <a:lnRef idx="1">
-            <a:schemeClr val="accent1"/>
-          </a:lnRef>
-          <a:fillRef idx="3">
-            <a:schemeClr val="accent1"/>
-          </a:fillRef>
-          <a:effectRef idx="2">
-            <a:schemeClr val="accent1"/>
-          </a:effectRef>
-          <a:fontRef idx="minor">
-            <a:schemeClr val="lt1"/>
-          </a:fontRef>
-        </p:style>
-        <p:txBody>
-          <a:bodyPr rtlCol="0" anchor="ctr"/>
-          <a:lstStyle/>
-          <a:p>
-            <a:pPr algn="ctr"/>
-          </a:p>
-        </p:txBody>
-      </p:sp>
-      <p:sp>
-        <p:nvSpPr>
-          <p:cNvPr id="7" name="Round Same Side Corner Rectangle 6"/>
-          <p:cNvSpPr/>
-          <p:nvPr/>
-        </p:nvSpPr>
-        <p:spPr>
-          <a:xfrm>
-            <a:off x="6903720" y="1691640"/>
-            <a:ext cx="4572000" cy="109728"/>
-          </a:xfrm>
-          <a:prstGeom prst="round2SameRect">
-            <a:avLst/>
-          </a:prstGeom>
-          <a:solidFill>
-            <a:srgbClr val="F5B241"/>
-          </a:solidFill>
-          <a:ln>
-            <a:noFill/>
-          </a:ln>
-          <a:effectLst/>
-        </p:spPr>
-        <p:style>
-          <a:lnRef idx="1">
-            <a:schemeClr val="accent1"/>
-          </a:lnRef>
-          <a:fillRef idx="3">
-            <a:schemeClr val="accent1"/>
-          </a:fillRef>
-          <a:effectRef idx="2">
-            <a:schemeClr val="accent1"/>
-          </a:effectRef>
-          <a:fontRef idx="minor">
-            <a:schemeClr val="lt1"/>
-          </a:fontRef>
-        </p:style>
-        <p:txBody>
-          <a:bodyPr rtlCol="0" anchor="ctr"/>
-          <a:lstStyle/>
-          <a:p>
-            <a:pPr algn="ctr"/>
-          </a:p>
-        </p:txBody>
-      </p:sp>
-      <p:sp>
-        <p:nvSpPr>
-          <p:cNvPr id="8" name="TextBox 7"/>
-          <p:cNvSpPr txBox="1"/>
-          <p:nvPr/>
-        </p:nvSpPr>
-        <p:spPr>
-          <a:xfrm>
-            <a:off x="7269480" y="1965960"/>
-            <a:ext cx="3931920" cy="457200"/>
-          </a:xfrm>
-          <a:prstGeom prst="rect">
-            <a:avLst/>
-          </a:prstGeom>
-          <a:noFill/>
-        </p:spPr>
-        <p:txBody>
-          <a:bodyPr wrap="square" anchor="t" lIns="0" rIns="0" tIns="0" bIns="0">
-            <a:spAutoFit/>
-          </a:bodyPr>
-          <a:lstStyle/>
-          <a:p>
-            <a:pPr algn="l">
-              <a:lnSpc>
-                <a:spcPct val="100000"/>
-              </a:lnSpc>
-              <a:spcBef>
-                <a:spcPts val="0"/>
-              </a:spcBef>
-              <a:spcAft>
-                <a:spcPts val="0"/>
-              </a:spcAft>
-            </a:pPr>
-            <a:r>
-              <a:rPr sz="1200" b="1">
-                <a:solidFill>
-                  <a:srgbClr val="0FA9B0"/>
-                </a:solidFill>
-                <a:latin typeface="Segoe UI Semibold"/>
-              </a:rPr>
-              <a:t>EN POCAS PALABRAS</a:t>
-            </a:r>
-          </a:p>
-        </p:txBody>
-      </p:sp>
-      <p:sp>
-        <p:nvSpPr>
-          <p:cNvPr id="9" name="Oval 8"/>
-          <p:cNvSpPr/>
-          <p:nvPr/>
-        </p:nvSpPr>
-        <p:spPr>
-          <a:xfrm>
-            <a:off x="7269480" y="2423160"/>
-            <a:ext cx="365760" cy="365760"/>
-          </a:xfrm>
-          <a:prstGeom prst="ellipse">
-            <a:avLst/>
-          </a:prstGeom>
-          <a:solidFill>
-            <a:srgbClr val="0FA9B0"/>
-          </a:solidFill>
-          <a:ln>
-            <a:noFill/>
-          </a:ln>
-          <a:effectLst/>
-        </p:spPr>
-        <p:style>
-          <a:lnRef idx="1">
-            <a:schemeClr val="accent1"/>
-          </a:lnRef>
-          <a:fillRef idx="3">
-            <a:schemeClr val="accent1"/>
-          </a:fillRef>
-          <a:effectRef idx="2">
-            <a:schemeClr val="accent1"/>
-          </a:effectRef>
-          <a:fontRef idx="minor">
-            <a:schemeClr val="lt1"/>
-          </a:fontRef>
-        </p:style>
-        <p:txBody>
-          <a:bodyPr rtlCol="0" anchor="ctr"/>
-          <a:lstStyle/>
-          <a:p>
-            <a:pPr algn="ctr"/>
-          </a:p>
-        </p:txBody>
-      </p:sp>
-      <p:sp>
-        <p:nvSpPr>
-          <p:cNvPr id="10" name="TextBox 9"/>
-          <p:cNvSpPr txBox="1"/>
-          <p:nvPr/>
-        </p:nvSpPr>
-        <p:spPr>
-          <a:xfrm>
-            <a:off x="7269480" y="2423160"/>
-            <a:ext cx="365760" cy="365760"/>
-          </a:xfrm>
-          <a:prstGeom prst="rect">
-            <a:avLst/>
-          </a:prstGeom>
-          <a:noFill/>
-        </p:spPr>
-        <p:txBody>
-          <a:bodyPr wrap="square" anchor="ctr" lIns="0" rIns="0" tIns="0" bIns="0">
-            <a:spAutoFit/>
-          </a:bodyPr>
-          <a:lstStyle/>
-          <a:p>
-            <a:pPr algn="ctr">
-              <a:lnSpc>
-                <a:spcPct val="100000"/>
-              </a:lnSpc>
-              <a:spcBef>
-                <a:spcPts val="0"/>
-              </a:spcBef>
-              <a:spcAft>
-                <a:spcPts val="600"/>
-              </a:spcAft>
-            </a:pPr>
-            <a:r>
-              <a:rPr sz="1400" b="1">
-                <a:solidFill>
-                  <a:srgbClr val="FFFFFF"/>
-                </a:solidFill>
-                <a:latin typeface="Segoe UI Semibold"/>
-              </a:rPr>
-              <a:t>✔</a:t>
-            </a:r>
-          </a:p>
-        </p:txBody>
-      </p:sp>
-      <p:sp>
-        <p:nvSpPr>
-          <p:cNvPr id="11" name="TextBox 10"/>
-          <p:cNvSpPr txBox="1"/>
-          <p:nvPr/>
-        </p:nvSpPr>
-        <p:spPr>
-          <a:xfrm>
-            <a:off x="7772400" y="2404872"/>
-            <a:ext cx="3474720" cy="320040"/>
-          </a:xfrm>
-          <a:prstGeom prst="rect">
-            <a:avLst/>
-          </a:prstGeom>
-          <a:noFill/>
-        </p:spPr>
-        <p:txBody>
-          <a:bodyPr wrap="square" anchor="t" lIns="0" rIns="0" tIns="0" bIns="0">
-            <a:spAutoFit/>
-          </a:bodyPr>
-          <a:lstStyle/>
-          <a:p>
-            <a:pPr algn="l">
-              <a:lnSpc>
-                <a:spcPct val="100000"/>
-              </a:lnSpc>
-              <a:spcBef>
-                <a:spcPts val="0"/>
-              </a:spcBef>
-              <a:spcAft>
-                <a:spcPts val="0"/>
-              </a:spcAft>
-            </a:pPr>
-            <a:r>
-              <a:rPr sz="1450" b="1">
-                <a:solidFill>
-                  <a:srgbClr val="FFFFFF"/>
-                </a:solidFill>
-                <a:latin typeface="Segoe UI Semibold"/>
-              </a:rPr>
-              <a:t>100% nube</a:t>
-            </a:r>
-          </a:p>
-        </p:txBody>
-      </p:sp>
-      <p:sp>
-        <p:nvSpPr>
-          <p:cNvPr id="12" name="TextBox 11"/>
-          <p:cNvSpPr txBox="1"/>
-          <p:nvPr/>
-        </p:nvSpPr>
-        <p:spPr>
-          <a:xfrm>
-            <a:off x="7772400" y="2715768"/>
-            <a:ext cx="3474720" cy="457200"/>
-          </a:xfrm>
-          <a:prstGeom prst="rect">
-            <a:avLst/>
-          </a:prstGeom>
-          <a:noFill/>
-        </p:spPr>
-        <p:txBody>
-          <a:bodyPr wrap="square" anchor="t" lIns="0" rIns="0" tIns="0" bIns="0">
-            <a:spAutoFit/>
-          </a:bodyPr>
-          <a:lstStyle/>
-          <a:p>
-            <a:pPr algn="l">
-              <a:lnSpc>
-                <a:spcPct val="115000"/>
-              </a:lnSpc>
-              <a:spcBef>
-                <a:spcPts val="0"/>
-              </a:spcBef>
-              <a:spcAft>
-                <a:spcPts val="0"/>
-              </a:spcAft>
-            </a:pPr>
-            <a:r>
-              <a:rPr sz="1150" b="0">
-                <a:solidFill>
-                  <a:srgbClr val="B9CBDA"/>
-                </a:solidFill>
-                <a:latin typeface="Segoe UI"/>
-              </a:rPr>
-              <a:t>Solución SaaS, sin infraestructura que mantener.</a:t>
-            </a:r>
-          </a:p>
-        </p:txBody>
-      </p:sp>
-      <p:sp>
-        <p:nvSpPr>
-          <p:cNvPr id="13" name="Oval 12"/>
-          <p:cNvSpPr/>
-          <p:nvPr/>
-        </p:nvSpPr>
-        <p:spPr>
-          <a:xfrm>
-            <a:off x="7269480" y="3291840"/>
-            <a:ext cx="365760" cy="365760"/>
-          </a:xfrm>
-          <a:prstGeom prst="ellipse">
-            <a:avLst/>
-          </a:prstGeom>
-          <a:solidFill>
-            <a:srgbClr val="0FA9B0"/>
-          </a:solidFill>
-          <a:ln>
-            <a:noFill/>
-          </a:ln>
-          <a:effectLst/>
-        </p:spPr>
-        <p:style>
-          <a:lnRef idx="1">
-            <a:schemeClr val="accent1"/>
-          </a:lnRef>
-          <a:fillRef idx="3">
-            <a:schemeClr val="accent1"/>
-          </a:fillRef>
-          <a:effectRef idx="2">
-            <a:schemeClr val="accent1"/>
-          </a:effectRef>
-          <a:fontRef idx="minor">
-            <a:schemeClr val="lt1"/>
-          </a:fontRef>
-        </p:style>
-        <p:txBody>
-          <a:bodyPr rtlCol="0" anchor="ctr"/>
-          <a:lstStyle/>
-          <a:p>
-            <a:pPr algn="ctr"/>
-          </a:p>
-        </p:txBody>
-      </p:sp>
-      <p:sp>
-        <p:nvSpPr>
-          <p:cNvPr id="14" name="TextBox 13"/>
-          <p:cNvSpPr txBox="1"/>
-          <p:nvPr/>
-        </p:nvSpPr>
-        <p:spPr>
-          <a:xfrm>
-            <a:off x="7269480" y="3291840"/>
-            <a:ext cx="365760" cy="365760"/>
-          </a:xfrm>
-          <a:prstGeom prst="rect">
-            <a:avLst/>
-          </a:prstGeom>
-          <a:noFill/>
-        </p:spPr>
-        <p:txBody>
-          <a:bodyPr wrap="square" anchor="ctr" lIns="0" rIns="0" tIns="0" bIns="0">
-            <a:spAutoFit/>
-          </a:bodyPr>
-          <a:lstStyle/>
-          <a:p>
-            <a:pPr algn="ctr">
-              <a:lnSpc>
-                <a:spcPct val="100000"/>
-              </a:lnSpc>
-              <a:spcBef>
-                <a:spcPts val="0"/>
-              </a:spcBef>
-              <a:spcAft>
-                <a:spcPts val="600"/>
-              </a:spcAft>
-            </a:pPr>
-            <a:r>
-              <a:rPr sz="1400" b="1">
-                <a:solidFill>
-                  <a:srgbClr val="FFFFFF"/>
-                </a:solidFill>
-                <a:latin typeface="Segoe UI Semibold"/>
-              </a:rPr>
-              <a:t>✔</a:t>
-            </a:r>
-          </a:p>
-        </p:txBody>
-      </p:sp>
-      <p:sp>
-        <p:nvSpPr>
-          <p:cNvPr id="15" name="TextBox 14"/>
-          <p:cNvSpPr txBox="1"/>
-          <p:nvPr/>
-        </p:nvSpPr>
-        <p:spPr>
-          <a:xfrm>
-            <a:off x="7772400" y="3273552"/>
-            <a:ext cx="3474720" cy="320040"/>
-          </a:xfrm>
-          <a:prstGeom prst="rect">
-            <a:avLst/>
-          </a:prstGeom>
-          <a:noFill/>
-        </p:spPr>
-        <p:txBody>
-          <a:bodyPr wrap="square" anchor="t" lIns="0" rIns="0" tIns="0" bIns="0">
-            <a:spAutoFit/>
-          </a:bodyPr>
-          <a:lstStyle/>
-          <a:p>
-            <a:pPr algn="l">
-              <a:lnSpc>
-                <a:spcPct val="100000"/>
-              </a:lnSpc>
-              <a:spcBef>
-                <a:spcPts val="0"/>
-              </a:spcBef>
-              <a:spcAft>
-                <a:spcPts val="0"/>
-              </a:spcAft>
-            </a:pPr>
-            <a:r>
-              <a:rPr sz="1450" b="1">
-                <a:solidFill>
-                  <a:srgbClr val="FFFFFF"/>
-                </a:solidFill>
-                <a:latin typeface="Segoe UI Semibold"/>
-              </a:rPr>
-              <a:t>Todo en uno</a:t>
-            </a:r>
-          </a:p>
-        </p:txBody>
-      </p:sp>
-      <p:sp>
-        <p:nvSpPr>
-          <p:cNvPr id="16" name="TextBox 15"/>
-          <p:cNvSpPr txBox="1"/>
-          <p:nvPr/>
-        </p:nvSpPr>
-        <p:spPr>
-          <a:xfrm>
-            <a:off x="7772400" y="3584448"/>
-            <a:ext cx="3474720" cy="457200"/>
-          </a:xfrm>
-          <a:prstGeom prst="rect">
-            <a:avLst/>
-          </a:prstGeom>
-          <a:noFill/>
-        </p:spPr>
-        <p:txBody>
-          <a:bodyPr wrap="square" anchor="t" lIns="0" rIns="0" tIns="0" bIns="0">
-            <a:spAutoFit/>
-          </a:bodyPr>
-          <a:lstStyle/>
-          <a:p>
-            <a:pPr algn="l">
-              <a:lnSpc>
-                <a:spcPct val="115000"/>
-              </a:lnSpc>
-              <a:spcBef>
-                <a:spcPts val="0"/>
-              </a:spcBef>
-              <a:spcAft>
-                <a:spcPts val="0"/>
-              </a:spcAft>
-            </a:pPr>
-            <a:r>
-              <a:rPr sz="1150" b="0">
-                <a:solidFill>
-                  <a:srgbClr val="B9CBDA"/>
-                </a:solidFill>
-                <a:latin typeface="Segoe UI"/>
-              </a:rPr>
-              <a:t>Analítica, planificación y predicción integradas.</a:t>
-            </a:r>
-          </a:p>
-        </p:txBody>
-      </p:sp>
-      <p:sp>
-        <p:nvSpPr>
-          <p:cNvPr id="17" name="Oval 16"/>
-          <p:cNvSpPr/>
-          <p:nvPr/>
-        </p:nvSpPr>
-        <p:spPr>
-          <a:xfrm>
-            <a:off x="7269480" y="4160520"/>
-            <a:ext cx="365760" cy="365760"/>
-          </a:xfrm>
-          <a:prstGeom prst="ellipse">
-            <a:avLst/>
-          </a:prstGeom>
-          <a:solidFill>
-            <a:srgbClr val="0FA9B0"/>
-          </a:solidFill>
-          <a:ln>
-            <a:noFill/>
-          </a:ln>
-          <a:effectLst/>
-        </p:spPr>
-        <p:style>
-          <a:lnRef idx="1">
-            <a:schemeClr val="accent1"/>
-          </a:lnRef>
-          <a:fillRef idx="3">
-            <a:schemeClr val="accent1"/>
-          </a:fillRef>
-          <a:effectRef idx="2">
-            <a:schemeClr val="accent1"/>
-          </a:effectRef>
-          <a:fontRef idx="minor">
-            <a:schemeClr val="lt1"/>
-          </a:fontRef>
-        </p:style>
-        <p:txBody>
-          <a:bodyPr rtlCol="0" anchor="ctr"/>
-          <a:lstStyle/>
-          <a:p>
-            <a:pPr algn="ctr"/>
-          </a:p>
-        </p:txBody>
-      </p:sp>
-      <p:sp>
-        <p:nvSpPr>
-          <p:cNvPr id="18" name="TextBox 17"/>
-          <p:cNvSpPr txBox="1"/>
-          <p:nvPr/>
-        </p:nvSpPr>
-        <p:spPr>
-          <a:xfrm>
-            <a:off x="7269480" y="4160520"/>
-            <a:ext cx="365760" cy="365760"/>
-          </a:xfrm>
-          <a:prstGeom prst="rect">
-            <a:avLst/>
-          </a:prstGeom>
-          <a:noFill/>
-        </p:spPr>
-        <p:txBody>
-          <a:bodyPr wrap="square" anchor="ctr" lIns="0" rIns="0" tIns="0" bIns="0">
-            <a:spAutoFit/>
-          </a:bodyPr>
-          <a:lstStyle/>
-          <a:p>
-            <a:pPr algn="ctr">
-              <a:lnSpc>
-                <a:spcPct val="100000"/>
-              </a:lnSpc>
-              <a:spcBef>
-                <a:spcPts val="0"/>
-              </a:spcBef>
-              <a:spcAft>
-                <a:spcPts val="600"/>
-              </a:spcAft>
-            </a:pPr>
-            <a:r>
-              <a:rPr sz="1400" b="1">
-                <a:solidFill>
-                  <a:srgbClr val="FFFFFF"/>
-                </a:solidFill>
-                <a:latin typeface="Segoe UI Semibold"/>
-              </a:rPr>
-              <a:t>✔</a:t>
-            </a:r>
-          </a:p>
-        </p:txBody>
-      </p:sp>
-      <p:sp>
-        <p:nvSpPr>
-          <p:cNvPr id="19" name="TextBox 18"/>
-          <p:cNvSpPr txBox="1"/>
-          <p:nvPr/>
-        </p:nvSpPr>
-        <p:spPr>
-          <a:xfrm>
-            <a:off x="7772400" y="4142232"/>
-            <a:ext cx="3474720" cy="320040"/>
-          </a:xfrm>
-          <a:prstGeom prst="rect">
-            <a:avLst/>
-          </a:prstGeom>
-          <a:noFill/>
-        </p:spPr>
-        <p:txBody>
-          <a:bodyPr wrap="square" anchor="t" lIns="0" rIns="0" tIns="0" bIns="0">
-            <a:spAutoFit/>
-          </a:bodyPr>
-          <a:lstStyle/>
-          <a:p>
-            <a:pPr algn="l">
-              <a:lnSpc>
-                <a:spcPct val="100000"/>
-              </a:lnSpc>
-              <a:spcBef>
-                <a:spcPts val="0"/>
-              </a:spcBef>
-              <a:spcAft>
-                <a:spcPts val="0"/>
-              </a:spcAft>
-            </a:pPr>
-            <a:r>
-              <a:rPr sz="1450" b="1">
-                <a:solidFill>
-                  <a:srgbClr val="FFFFFF"/>
-                </a:solidFill>
-                <a:latin typeface="Segoe UI Semibold"/>
-              </a:rPr>
-              <a:t>Colaborativa</a:t>
-            </a:r>
-          </a:p>
-        </p:txBody>
-      </p:sp>
-      <p:sp>
-        <p:nvSpPr>
-          <p:cNvPr id="20" name="TextBox 19"/>
-          <p:cNvSpPr txBox="1"/>
-          <p:nvPr/>
-        </p:nvSpPr>
-        <p:spPr>
-          <a:xfrm>
-            <a:off x="7772400" y="4453128"/>
-            <a:ext cx="3474720" cy="457200"/>
-          </a:xfrm>
-          <a:prstGeom prst="rect">
-            <a:avLst/>
-          </a:prstGeom>
-          <a:noFill/>
-        </p:spPr>
-        <p:txBody>
-          <a:bodyPr wrap="square" anchor="t" lIns="0" rIns="0" tIns="0" bIns="0">
-            <a:spAutoFit/>
-          </a:bodyPr>
-          <a:lstStyle/>
-          <a:p>
-            <a:pPr algn="l">
-              <a:lnSpc>
-                <a:spcPct val="115000"/>
-              </a:lnSpc>
-              <a:spcBef>
-                <a:spcPts val="0"/>
-              </a:spcBef>
-              <a:spcAft>
-                <a:spcPts val="0"/>
-              </a:spcAft>
-            </a:pPr>
-            <a:r>
-              <a:rPr sz="1150" b="0">
-                <a:solidFill>
-                  <a:srgbClr val="B9CBDA"/>
-                </a:solidFill>
-                <a:latin typeface="Segoe UI"/>
-              </a:rPr>
-              <a:t>Múltiples usuarios y áreas sobre un único modelo.</a:t>
-            </a:r>
-          </a:p>
-        </p:txBody>
-      </p:sp>
-      <p:sp>
-        <p:nvSpPr>
-          <p:cNvPr id="21" name="Oval 20"/>
-          <p:cNvSpPr/>
-          <p:nvPr/>
-        </p:nvSpPr>
-        <p:spPr>
-          <a:xfrm>
-            <a:off x="7269480" y="5029200"/>
-            <a:ext cx="365760" cy="365760"/>
-          </a:xfrm>
-          <a:prstGeom prst="ellipse">
-            <a:avLst/>
-          </a:prstGeom>
-          <a:solidFill>
-            <a:srgbClr val="0FA9B0"/>
-          </a:solidFill>
-          <a:ln>
-            <a:noFill/>
-          </a:ln>
-          <a:effectLst/>
-        </p:spPr>
-        <p:style>
-          <a:lnRef idx="1">
-            <a:schemeClr val="accent1"/>
-          </a:lnRef>
-          <a:fillRef idx="3">
-            <a:schemeClr val="accent1"/>
-          </a:fillRef>
-          <a:effectRef idx="2">
-            <a:schemeClr val="accent1"/>
-          </a:effectRef>
-          <a:fontRef idx="minor">
-            <a:schemeClr val="lt1"/>
-          </a:fontRef>
-        </p:style>
-        <p:txBody>
-          <a:bodyPr rtlCol="0" anchor="ctr"/>
-          <a:lstStyle/>
-          <a:p>
-            <a:pPr algn="ctr"/>
-          </a:p>
-        </p:txBody>
-      </p:sp>
-      <p:sp>
-        <p:nvSpPr>
-          <p:cNvPr id="22" name="TextBox 21"/>
-          <p:cNvSpPr txBox="1"/>
-          <p:nvPr/>
-        </p:nvSpPr>
-        <p:spPr>
-          <a:xfrm>
-            <a:off x="7269480" y="5029200"/>
-            <a:ext cx="365760" cy="365760"/>
-          </a:xfrm>
-          <a:prstGeom prst="rect">
-            <a:avLst/>
-          </a:prstGeom>
-          <a:noFill/>
-        </p:spPr>
-        <p:txBody>
-          <a:bodyPr wrap="square" anchor="ctr" lIns="0" rIns="0" tIns="0" bIns="0">
-            <a:spAutoFit/>
-          </a:bodyPr>
-          <a:lstStyle/>
-          <a:p>
-            <a:pPr algn="ctr">
-              <a:lnSpc>
-                <a:spcPct val="100000"/>
-              </a:lnSpc>
-              <a:spcBef>
-                <a:spcPts val="0"/>
-              </a:spcBef>
-              <a:spcAft>
-                <a:spcPts val="600"/>
-              </a:spcAft>
-            </a:pPr>
-            <a:r>
-              <a:rPr sz="1400" b="1">
-                <a:solidFill>
-                  <a:srgbClr val="FFFFFF"/>
-                </a:solidFill>
-                <a:latin typeface="Segoe UI Semibold"/>
-              </a:rPr>
-              <a:t>✔</a:t>
-            </a:r>
-          </a:p>
-        </p:txBody>
-      </p:sp>
-      <p:sp>
-        <p:nvSpPr>
-          <p:cNvPr id="23" name="TextBox 22"/>
-          <p:cNvSpPr txBox="1"/>
-          <p:nvPr/>
-        </p:nvSpPr>
-        <p:spPr>
-          <a:xfrm>
-            <a:off x="7772400" y="5010912"/>
-            <a:ext cx="3474720" cy="320040"/>
-          </a:xfrm>
-          <a:prstGeom prst="rect">
-            <a:avLst/>
-          </a:prstGeom>
-          <a:noFill/>
-        </p:spPr>
-        <p:txBody>
-          <a:bodyPr wrap="square" anchor="t" lIns="0" rIns="0" tIns="0" bIns="0">
-            <a:spAutoFit/>
-          </a:bodyPr>
-          <a:lstStyle/>
-          <a:p>
-            <a:pPr algn="l">
-              <a:lnSpc>
-                <a:spcPct val="100000"/>
-              </a:lnSpc>
-              <a:spcBef>
-                <a:spcPts val="0"/>
-              </a:spcBef>
-              <a:spcAft>
-                <a:spcPts val="0"/>
-              </a:spcAft>
-            </a:pPr>
-            <a:r>
-              <a:rPr sz="1450" b="1">
-                <a:solidFill>
-                  <a:srgbClr val="FFFFFF"/>
-                </a:solidFill>
-                <a:latin typeface="Segoe UI Semibold"/>
-              </a:rPr>
-              <a:t>Conectada</a:t>
-            </a:r>
-          </a:p>
-        </p:txBody>
-      </p:sp>
-      <p:sp>
-        <p:nvSpPr>
-          <p:cNvPr id="24" name="TextBox 23"/>
-          <p:cNvSpPr txBox="1"/>
-          <p:nvPr/>
-        </p:nvSpPr>
-        <p:spPr>
-          <a:xfrm>
-            <a:off x="7772400" y="5321808"/>
-            <a:ext cx="3474720" cy="457200"/>
-          </a:xfrm>
-          <a:prstGeom prst="rect">
-            <a:avLst/>
-          </a:prstGeom>
-          <a:noFill/>
-        </p:spPr>
-        <p:txBody>
-          <a:bodyPr wrap="square" anchor="t" lIns="0" rIns="0" tIns="0" bIns="0">
-            <a:spAutoFit/>
-          </a:bodyPr>
-          <a:lstStyle/>
-          <a:p>
-            <a:pPr algn="l">
-              <a:lnSpc>
-                <a:spcPct val="115000"/>
-              </a:lnSpc>
-              <a:spcBef>
-                <a:spcPts val="0"/>
-              </a:spcBef>
-              <a:spcAft>
-                <a:spcPts val="0"/>
-              </a:spcAft>
-            </a:pPr>
-            <a:r>
-              <a:rPr sz="1150" b="0">
-                <a:solidFill>
-                  <a:srgbClr val="B9CBDA"/>
-                </a:solidFill>
-                <a:latin typeface="Segoe UI"/>
-              </a:rPr>
-              <a:t>Datos en vivo o importados de SAP y de terceros.</a:t>
-            </a:r>
-          </a:p>
-        </p:txBody>
-      </p:sp>
-      <p:sp>
-        <p:nvSpPr>
-          <p:cNvPr id="25" name="Rounded Rectangle 24"/>
-          <p:cNvSpPr/>
-          <p:nvPr/>
-        </p:nvSpPr>
-        <p:spPr>
-          <a:xfrm>
-            <a:off x="777240" y="4892040"/>
-            <a:ext cx="5669280" cy="960120"/>
+            <a:off x="777240" y="2148840"/>
+            <a:ext cx="2624328" cy="2880360"/>
           </a:xfrm>
           <a:prstGeom prst="roundRect">
             <a:avLst/>
@@ -7064,20 +6140,20 @@
       </p:sp>
       <p:sp>
         <p:nvSpPr>
-          <p:cNvPr id="26" name="Rectangle 25"/>
+          <p:cNvPr id="7" name="Round Same Side Corner Rectangle 6"/>
           <p:cNvSpPr/>
           <p:nvPr/>
         </p:nvSpPr>
         <p:spPr>
           <a:xfrm>
-            <a:off x="777240" y="4892040"/>
-            <a:ext cx="109728" cy="960120"/>
-          </a:xfrm>
-          <a:prstGeom prst="rect">
+            <a:off x="777240" y="2148840"/>
+            <a:ext cx="2624328" cy="109728"/>
+          </a:xfrm>
+          <a:prstGeom prst="round2SameRect">
             <a:avLst/>
           </a:prstGeom>
           <a:solidFill>
-            <a:srgbClr val="006EC7"/>
+            <a:srgbClr val="C26B5A"/>
           </a:solidFill>
           <a:ln>
             <a:noFill/>
@@ -7108,14 +6184,925 @@
       </p:sp>
       <p:sp>
         <p:nvSpPr>
+          <p:cNvPr id="8" name="Oval 7"/>
+          <p:cNvSpPr/>
+          <p:nvPr/>
+        </p:nvSpPr>
+        <p:spPr>
+          <a:xfrm>
+            <a:off x="1097280" y="2468880"/>
+            <a:ext cx="640080" cy="640080"/>
+          </a:xfrm>
+          <a:prstGeom prst="ellipse">
+            <a:avLst/>
+          </a:prstGeom>
+          <a:solidFill>
+            <a:srgbClr val="C26B5A"/>
+          </a:solidFill>
+          <a:ln>
+            <a:noFill/>
+          </a:ln>
+          <a:effectLst/>
+        </p:spPr>
+        <p:style>
+          <a:lnRef idx="1">
+            <a:schemeClr val="accent1"/>
+          </a:lnRef>
+          <a:fillRef idx="3">
+            <a:schemeClr val="accent1"/>
+          </a:fillRef>
+          <a:effectRef idx="2">
+            <a:schemeClr val="accent1"/>
+          </a:effectRef>
+          <a:fontRef idx="minor">
+            <a:schemeClr val="lt1"/>
+          </a:fontRef>
+        </p:style>
+        <p:txBody>
+          <a:bodyPr rtlCol="0" anchor="ctr"/>
+          <a:lstStyle/>
+          <a:p>
+            <a:pPr algn="ctr"/>
+          </a:p>
+        </p:txBody>
+      </p:sp>
+      <p:sp>
+        <p:nvSpPr>
+          <p:cNvPr id="9" name="TextBox 8"/>
+          <p:cNvSpPr txBox="1"/>
+          <p:nvPr/>
+        </p:nvSpPr>
+        <p:spPr>
+          <a:xfrm>
+            <a:off x="1097280" y="2468880"/>
+            <a:ext cx="640080" cy="640080"/>
+          </a:xfrm>
+          <a:prstGeom prst="rect">
+            <a:avLst/>
+          </a:prstGeom>
+          <a:noFill/>
+        </p:spPr>
+        <p:txBody>
+          <a:bodyPr wrap="square" anchor="ctr" lIns="0" rIns="0" tIns="0" bIns="0">
+            <a:spAutoFit/>
+          </a:bodyPr>
+          <a:lstStyle/>
+          <a:p>
+            <a:pPr algn="ctr">
+              <a:lnSpc>
+                <a:spcPct val="100000"/>
+              </a:lnSpc>
+              <a:spcBef>
+                <a:spcPts val="0"/>
+              </a:spcBef>
+              <a:spcAft>
+                <a:spcPts val="600"/>
+              </a:spcAft>
+            </a:pPr>
+            <a:r>
+              <a:rPr sz="2200" b="1">
+                <a:solidFill>
+                  <a:srgbClr val="FFFFFF"/>
+                </a:solidFill>
+                <a:latin typeface="Segoe UI Semibold"/>
+              </a:rPr>
+              <a:t>✕</a:t>
+            </a:r>
+          </a:p>
+        </p:txBody>
+      </p:sp>
+      <p:sp>
+        <p:nvSpPr>
+          <p:cNvPr id="10" name="TextBox 9"/>
+          <p:cNvSpPr txBox="1"/>
+          <p:nvPr/>
+        </p:nvSpPr>
+        <p:spPr>
+          <a:xfrm>
+            <a:off x="1097280" y="3291840"/>
+            <a:ext cx="1984248" cy="457200"/>
+          </a:xfrm>
+          <a:prstGeom prst="rect">
+            <a:avLst/>
+          </a:prstGeom>
+          <a:noFill/>
+        </p:spPr>
+        <p:txBody>
+          <a:bodyPr wrap="square" anchor="t" lIns="0" rIns="0" tIns="0" bIns="0">
+            <a:spAutoFit/>
+          </a:bodyPr>
+          <a:lstStyle/>
+          <a:p>
+            <a:pPr algn="l">
+              <a:lnSpc>
+                <a:spcPct val="100000"/>
+              </a:lnSpc>
+              <a:spcBef>
+                <a:spcPts val="0"/>
+              </a:spcBef>
+              <a:spcAft>
+                <a:spcPts val="0"/>
+              </a:spcAft>
+            </a:pPr>
+            <a:r>
+              <a:rPr sz="1600" b="1">
+                <a:solidFill>
+                  <a:srgbClr val="132A3E"/>
+                </a:solidFill>
+                <a:latin typeface="Segoe UI Semibold"/>
+              </a:rPr>
+              <a:t>Demasiado Excel</a:t>
+            </a:r>
+          </a:p>
+        </p:txBody>
+      </p:sp>
+      <p:sp>
+        <p:nvSpPr>
+          <p:cNvPr id="11" name="TextBox 10"/>
+          <p:cNvSpPr txBox="1"/>
+          <p:nvPr/>
+        </p:nvSpPr>
+        <p:spPr>
+          <a:xfrm>
+            <a:off x="1097280" y="3794760"/>
+            <a:ext cx="1984248" cy="1097280"/>
+          </a:xfrm>
+          <a:prstGeom prst="rect">
+            <a:avLst/>
+          </a:prstGeom>
+          <a:noFill/>
+        </p:spPr>
+        <p:txBody>
+          <a:bodyPr wrap="square" anchor="t" lIns="0" rIns="0" tIns="0" bIns="0">
+            <a:spAutoFit/>
+          </a:bodyPr>
+          <a:lstStyle/>
+          <a:p>
+            <a:pPr algn="l">
+              <a:lnSpc>
+                <a:spcPct val="120000"/>
+              </a:lnSpc>
+              <a:spcBef>
+                <a:spcPts val="0"/>
+              </a:spcBef>
+              <a:spcAft>
+                <a:spcPts val="0"/>
+              </a:spcAft>
+            </a:pPr>
+            <a:r>
+              <a:rPr sz="1200" b="0">
+                <a:solidFill>
+                  <a:srgbClr val="5B6B7B"/>
+                </a:solidFill>
+                <a:latin typeface="Segoe UI"/>
+              </a:rPr>
+              <a:t>Decenas de hojas sueltas, versiones que no cuadran y errores manuales.</a:t>
+            </a:r>
+          </a:p>
+        </p:txBody>
+      </p:sp>
+      <p:sp>
+        <p:nvSpPr>
+          <p:cNvPr id="12" name="Rounded Rectangle 11"/>
+          <p:cNvSpPr/>
+          <p:nvPr/>
+        </p:nvSpPr>
+        <p:spPr>
+          <a:xfrm>
+            <a:off x="3621024" y="2148840"/>
+            <a:ext cx="2624328" cy="2880360"/>
+          </a:xfrm>
+          <a:prstGeom prst="roundRect">
+            <a:avLst/>
+          </a:prstGeom>
+          <a:solidFill>
+            <a:srgbClr val="FFFFFF"/>
+          </a:solidFill>
+          <a:ln>
+            <a:noFill/>
+          </a:ln>
+          <a:effectLst/>
+          <a:effectLst>
+            <a:outerShdw blurRad="90000" dist="40000" dir="5400000" rotWithShape="0">
+              <a:srgbClr val="0A2A43">
+                <a:alpha val="22000"/>
+              </a:srgbClr>
+            </a:outerShdw>
+          </a:effectLst>
+        </p:spPr>
+        <p:style>
+          <a:lnRef idx="1">
+            <a:schemeClr val="accent1"/>
+          </a:lnRef>
+          <a:fillRef idx="3">
+            <a:schemeClr val="accent1"/>
+          </a:fillRef>
+          <a:effectRef idx="2">
+            <a:schemeClr val="accent1"/>
+          </a:effectRef>
+          <a:fontRef idx="minor">
+            <a:schemeClr val="lt1"/>
+          </a:fontRef>
+        </p:style>
+        <p:txBody>
+          <a:bodyPr rtlCol="0" anchor="ctr"/>
+          <a:lstStyle/>
+          <a:p>
+            <a:pPr algn="ctr"/>
+          </a:p>
+        </p:txBody>
+      </p:sp>
+      <p:sp>
+        <p:nvSpPr>
+          <p:cNvPr id="13" name="Round Same Side Corner Rectangle 12"/>
+          <p:cNvSpPr/>
+          <p:nvPr/>
+        </p:nvSpPr>
+        <p:spPr>
+          <a:xfrm>
+            <a:off x="3621024" y="2148840"/>
+            <a:ext cx="2624328" cy="109728"/>
+          </a:xfrm>
+          <a:prstGeom prst="round2SameRect">
+            <a:avLst/>
+          </a:prstGeom>
+          <a:solidFill>
+            <a:srgbClr val="C26B5A"/>
+          </a:solidFill>
+          <a:ln>
+            <a:noFill/>
+          </a:ln>
+          <a:effectLst/>
+        </p:spPr>
+        <p:style>
+          <a:lnRef idx="1">
+            <a:schemeClr val="accent1"/>
+          </a:lnRef>
+          <a:fillRef idx="3">
+            <a:schemeClr val="accent1"/>
+          </a:fillRef>
+          <a:effectRef idx="2">
+            <a:schemeClr val="accent1"/>
+          </a:effectRef>
+          <a:fontRef idx="minor">
+            <a:schemeClr val="lt1"/>
+          </a:fontRef>
+        </p:style>
+        <p:txBody>
+          <a:bodyPr rtlCol="0" anchor="ctr"/>
+          <a:lstStyle/>
+          <a:p>
+            <a:pPr algn="ctr"/>
+          </a:p>
+        </p:txBody>
+      </p:sp>
+      <p:sp>
+        <p:nvSpPr>
+          <p:cNvPr id="14" name="Oval 13"/>
+          <p:cNvSpPr/>
+          <p:nvPr/>
+        </p:nvSpPr>
+        <p:spPr>
+          <a:xfrm>
+            <a:off x="3941064" y="2468880"/>
+            <a:ext cx="640080" cy="640080"/>
+          </a:xfrm>
+          <a:prstGeom prst="ellipse">
+            <a:avLst/>
+          </a:prstGeom>
+          <a:solidFill>
+            <a:srgbClr val="C26B5A"/>
+          </a:solidFill>
+          <a:ln>
+            <a:noFill/>
+          </a:ln>
+          <a:effectLst/>
+        </p:spPr>
+        <p:style>
+          <a:lnRef idx="1">
+            <a:schemeClr val="accent1"/>
+          </a:lnRef>
+          <a:fillRef idx="3">
+            <a:schemeClr val="accent1"/>
+          </a:fillRef>
+          <a:effectRef idx="2">
+            <a:schemeClr val="accent1"/>
+          </a:effectRef>
+          <a:fontRef idx="minor">
+            <a:schemeClr val="lt1"/>
+          </a:fontRef>
+        </p:style>
+        <p:txBody>
+          <a:bodyPr rtlCol="0" anchor="ctr"/>
+          <a:lstStyle/>
+          <a:p>
+            <a:pPr algn="ctr"/>
+          </a:p>
+        </p:txBody>
+      </p:sp>
+      <p:sp>
+        <p:nvSpPr>
+          <p:cNvPr id="15" name="TextBox 14"/>
+          <p:cNvSpPr txBox="1"/>
+          <p:nvPr/>
+        </p:nvSpPr>
+        <p:spPr>
+          <a:xfrm>
+            <a:off x="3941064" y="2468880"/>
+            <a:ext cx="640080" cy="640080"/>
+          </a:xfrm>
+          <a:prstGeom prst="rect">
+            <a:avLst/>
+          </a:prstGeom>
+          <a:noFill/>
+        </p:spPr>
+        <p:txBody>
+          <a:bodyPr wrap="square" anchor="ctr" lIns="0" rIns="0" tIns="0" bIns="0">
+            <a:spAutoFit/>
+          </a:bodyPr>
+          <a:lstStyle/>
+          <a:p>
+            <a:pPr algn="ctr">
+              <a:lnSpc>
+                <a:spcPct val="100000"/>
+              </a:lnSpc>
+              <a:spcBef>
+                <a:spcPts val="0"/>
+              </a:spcBef>
+              <a:spcAft>
+                <a:spcPts val="600"/>
+              </a:spcAft>
+            </a:pPr>
+            <a:r>
+              <a:rPr sz="2200" b="1">
+                <a:solidFill>
+                  <a:srgbClr val="FFFFFF"/>
+                </a:solidFill>
+                <a:latin typeface="Segoe UI Semibold"/>
+              </a:rPr>
+              <a:t>↺</a:t>
+            </a:r>
+          </a:p>
+        </p:txBody>
+      </p:sp>
+      <p:sp>
+        <p:nvSpPr>
+          <p:cNvPr id="16" name="TextBox 15"/>
+          <p:cNvSpPr txBox="1"/>
+          <p:nvPr/>
+        </p:nvSpPr>
+        <p:spPr>
+          <a:xfrm>
+            <a:off x="3941064" y="3291840"/>
+            <a:ext cx="1984248" cy="457200"/>
+          </a:xfrm>
+          <a:prstGeom prst="rect">
+            <a:avLst/>
+          </a:prstGeom>
+          <a:noFill/>
+        </p:spPr>
+        <p:txBody>
+          <a:bodyPr wrap="square" anchor="t" lIns="0" rIns="0" tIns="0" bIns="0">
+            <a:spAutoFit/>
+          </a:bodyPr>
+          <a:lstStyle/>
+          <a:p>
+            <a:pPr algn="l">
+              <a:lnSpc>
+                <a:spcPct val="100000"/>
+              </a:lnSpc>
+              <a:spcBef>
+                <a:spcPts val="0"/>
+              </a:spcBef>
+              <a:spcAft>
+                <a:spcPts val="0"/>
+              </a:spcAft>
+            </a:pPr>
+            <a:r>
+              <a:rPr sz="1600" b="1">
+                <a:solidFill>
+                  <a:srgbClr val="132A3E"/>
+                </a:solidFill>
+                <a:latin typeface="Segoe UI Semibold"/>
+              </a:rPr>
+              <a:t>Miramos al retrovisor</a:t>
+            </a:r>
+          </a:p>
+        </p:txBody>
+      </p:sp>
+      <p:sp>
+        <p:nvSpPr>
+          <p:cNvPr id="17" name="TextBox 16"/>
+          <p:cNvSpPr txBox="1"/>
+          <p:nvPr/>
+        </p:nvSpPr>
+        <p:spPr>
+          <a:xfrm>
+            <a:off x="3941064" y="3794760"/>
+            <a:ext cx="1984248" cy="1097280"/>
+          </a:xfrm>
+          <a:prstGeom prst="rect">
+            <a:avLst/>
+          </a:prstGeom>
+          <a:noFill/>
+        </p:spPr>
+        <p:txBody>
+          <a:bodyPr wrap="square" anchor="t" lIns="0" rIns="0" tIns="0" bIns="0">
+            <a:spAutoFit/>
+          </a:bodyPr>
+          <a:lstStyle/>
+          <a:p>
+            <a:pPr algn="l">
+              <a:lnSpc>
+                <a:spcPct val="120000"/>
+              </a:lnSpc>
+              <a:spcBef>
+                <a:spcPts val="0"/>
+              </a:spcBef>
+              <a:spcAft>
+                <a:spcPts val="0"/>
+              </a:spcAft>
+            </a:pPr>
+            <a:r>
+              <a:rPr sz="1200" b="0">
+                <a:solidFill>
+                  <a:srgbClr val="5B6B7B"/>
+                </a:solidFill>
+                <a:latin typeface="Segoe UI"/>
+              </a:rPr>
+              <a:t>Analizamos el pasado, pero cuesta anticipar lo que viene.</a:t>
+            </a:r>
+          </a:p>
+        </p:txBody>
+      </p:sp>
+      <p:sp>
+        <p:nvSpPr>
+          <p:cNvPr id="18" name="Rounded Rectangle 17"/>
+          <p:cNvSpPr/>
+          <p:nvPr/>
+        </p:nvSpPr>
+        <p:spPr>
+          <a:xfrm>
+            <a:off x="6464808" y="2148840"/>
+            <a:ext cx="2624328" cy="2880360"/>
+          </a:xfrm>
+          <a:prstGeom prst="roundRect">
+            <a:avLst/>
+          </a:prstGeom>
+          <a:solidFill>
+            <a:srgbClr val="FFFFFF"/>
+          </a:solidFill>
+          <a:ln>
+            <a:noFill/>
+          </a:ln>
+          <a:effectLst/>
+          <a:effectLst>
+            <a:outerShdw blurRad="90000" dist="40000" dir="5400000" rotWithShape="0">
+              <a:srgbClr val="0A2A43">
+                <a:alpha val="22000"/>
+              </a:srgbClr>
+            </a:outerShdw>
+          </a:effectLst>
+        </p:spPr>
+        <p:style>
+          <a:lnRef idx="1">
+            <a:schemeClr val="accent1"/>
+          </a:lnRef>
+          <a:fillRef idx="3">
+            <a:schemeClr val="accent1"/>
+          </a:fillRef>
+          <a:effectRef idx="2">
+            <a:schemeClr val="accent1"/>
+          </a:effectRef>
+          <a:fontRef idx="minor">
+            <a:schemeClr val="lt1"/>
+          </a:fontRef>
+        </p:style>
+        <p:txBody>
+          <a:bodyPr rtlCol="0" anchor="ctr"/>
+          <a:lstStyle/>
+          <a:p>
+            <a:pPr algn="ctr"/>
+          </a:p>
+        </p:txBody>
+      </p:sp>
+      <p:sp>
+        <p:nvSpPr>
+          <p:cNvPr id="19" name="Round Same Side Corner Rectangle 18"/>
+          <p:cNvSpPr/>
+          <p:nvPr/>
+        </p:nvSpPr>
+        <p:spPr>
+          <a:xfrm>
+            <a:off x="6464808" y="2148840"/>
+            <a:ext cx="2624328" cy="109728"/>
+          </a:xfrm>
+          <a:prstGeom prst="round2SameRect">
+            <a:avLst/>
+          </a:prstGeom>
+          <a:solidFill>
+            <a:srgbClr val="C26B5A"/>
+          </a:solidFill>
+          <a:ln>
+            <a:noFill/>
+          </a:ln>
+          <a:effectLst/>
+        </p:spPr>
+        <p:style>
+          <a:lnRef idx="1">
+            <a:schemeClr val="accent1"/>
+          </a:lnRef>
+          <a:fillRef idx="3">
+            <a:schemeClr val="accent1"/>
+          </a:fillRef>
+          <a:effectRef idx="2">
+            <a:schemeClr val="accent1"/>
+          </a:effectRef>
+          <a:fontRef idx="minor">
+            <a:schemeClr val="lt1"/>
+          </a:fontRef>
+        </p:style>
+        <p:txBody>
+          <a:bodyPr rtlCol="0" anchor="ctr"/>
+          <a:lstStyle/>
+          <a:p>
+            <a:pPr algn="ctr"/>
+          </a:p>
+        </p:txBody>
+      </p:sp>
+      <p:sp>
+        <p:nvSpPr>
+          <p:cNvPr id="20" name="Oval 19"/>
+          <p:cNvSpPr/>
+          <p:nvPr/>
+        </p:nvSpPr>
+        <p:spPr>
+          <a:xfrm>
+            <a:off x="6784848" y="2468880"/>
+            <a:ext cx="640080" cy="640080"/>
+          </a:xfrm>
+          <a:prstGeom prst="ellipse">
+            <a:avLst/>
+          </a:prstGeom>
+          <a:solidFill>
+            <a:srgbClr val="C26B5A"/>
+          </a:solidFill>
+          <a:ln>
+            <a:noFill/>
+          </a:ln>
+          <a:effectLst/>
+        </p:spPr>
+        <p:style>
+          <a:lnRef idx="1">
+            <a:schemeClr val="accent1"/>
+          </a:lnRef>
+          <a:fillRef idx="3">
+            <a:schemeClr val="accent1"/>
+          </a:fillRef>
+          <a:effectRef idx="2">
+            <a:schemeClr val="accent1"/>
+          </a:effectRef>
+          <a:fontRef idx="minor">
+            <a:schemeClr val="lt1"/>
+          </a:fontRef>
+        </p:style>
+        <p:txBody>
+          <a:bodyPr rtlCol="0" anchor="ctr"/>
+          <a:lstStyle/>
+          <a:p>
+            <a:pPr algn="ctr"/>
+          </a:p>
+        </p:txBody>
+      </p:sp>
+      <p:sp>
+        <p:nvSpPr>
+          <p:cNvPr id="21" name="TextBox 20"/>
+          <p:cNvSpPr txBox="1"/>
+          <p:nvPr/>
+        </p:nvSpPr>
+        <p:spPr>
+          <a:xfrm>
+            <a:off x="6784848" y="2468880"/>
+            <a:ext cx="640080" cy="640080"/>
+          </a:xfrm>
+          <a:prstGeom prst="rect">
+            <a:avLst/>
+          </a:prstGeom>
+          <a:noFill/>
+        </p:spPr>
+        <p:txBody>
+          <a:bodyPr wrap="square" anchor="ctr" lIns="0" rIns="0" tIns="0" bIns="0">
+            <a:spAutoFit/>
+          </a:bodyPr>
+          <a:lstStyle/>
+          <a:p>
+            <a:pPr algn="ctr">
+              <a:lnSpc>
+                <a:spcPct val="100000"/>
+              </a:lnSpc>
+              <a:spcBef>
+                <a:spcPts val="0"/>
+              </a:spcBef>
+              <a:spcAft>
+                <a:spcPts val="600"/>
+              </a:spcAft>
+            </a:pPr>
+            <a:r>
+              <a:rPr sz="2200" b="1">
+                <a:solidFill>
+                  <a:srgbClr val="FFFFFF"/>
+                </a:solidFill>
+                <a:latin typeface="Segoe UI Semibold"/>
+              </a:rPr>
+              <a:t>⧉</a:t>
+            </a:r>
+          </a:p>
+        </p:txBody>
+      </p:sp>
+      <p:sp>
+        <p:nvSpPr>
+          <p:cNvPr id="22" name="TextBox 21"/>
+          <p:cNvSpPr txBox="1"/>
+          <p:nvPr/>
+        </p:nvSpPr>
+        <p:spPr>
+          <a:xfrm>
+            <a:off x="6784848" y="3291840"/>
+            <a:ext cx="1984248" cy="457200"/>
+          </a:xfrm>
+          <a:prstGeom prst="rect">
+            <a:avLst/>
+          </a:prstGeom>
+          <a:noFill/>
+        </p:spPr>
+        <p:txBody>
+          <a:bodyPr wrap="square" anchor="t" lIns="0" rIns="0" tIns="0" bIns="0">
+            <a:spAutoFit/>
+          </a:bodyPr>
+          <a:lstStyle/>
+          <a:p>
+            <a:pPr algn="l">
+              <a:lnSpc>
+                <a:spcPct val="100000"/>
+              </a:lnSpc>
+              <a:spcBef>
+                <a:spcPts val="0"/>
+              </a:spcBef>
+              <a:spcAft>
+                <a:spcPts val="0"/>
+              </a:spcAft>
+            </a:pPr>
+            <a:r>
+              <a:rPr sz="1600" b="1">
+                <a:solidFill>
+                  <a:srgbClr val="132A3E"/>
+                </a:solidFill>
+                <a:latin typeface="Segoe UI Semibold"/>
+              </a:rPr>
+              <a:t>Cada área, su versión</a:t>
+            </a:r>
+          </a:p>
+        </p:txBody>
+      </p:sp>
+      <p:sp>
+        <p:nvSpPr>
+          <p:cNvPr id="23" name="TextBox 22"/>
+          <p:cNvSpPr txBox="1"/>
+          <p:nvPr/>
+        </p:nvSpPr>
+        <p:spPr>
+          <a:xfrm>
+            <a:off x="6784848" y="3794760"/>
+            <a:ext cx="1984248" cy="1097280"/>
+          </a:xfrm>
+          <a:prstGeom prst="rect">
+            <a:avLst/>
+          </a:prstGeom>
+          <a:noFill/>
+        </p:spPr>
+        <p:txBody>
+          <a:bodyPr wrap="square" anchor="t" lIns="0" rIns="0" tIns="0" bIns="0">
+            <a:spAutoFit/>
+          </a:bodyPr>
+          <a:lstStyle/>
+          <a:p>
+            <a:pPr algn="l">
+              <a:lnSpc>
+                <a:spcPct val="120000"/>
+              </a:lnSpc>
+              <a:spcBef>
+                <a:spcPts val="0"/>
+              </a:spcBef>
+              <a:spcAft>
+                <a:spcPts val="0"/>
+              </a:spcAft>
+            </a:pPr>
+            <a:r>
+              <a:rPr sz="1200" b="0">
+                <a:solidFill>
+                  <a:srgbClr val="5B6B7B"/>
+                </a:solidFill>
+                <a:latin typeface="Segoe UI"/>
+              </a:rPr>
+              <a:t>Finanzas, ventas y RR. HH. trabajan con números distintos.</a:t>
+            </a:r>
+          </a:p>
+        </p:txBody>
+      </p:sp>
+      <p:sp>
+        <p:nvSpPr>
+          <p:cNvPr id="24" name="Rounded Rectangle 23"/>
+          <p:cNvSpPr/>
+          <p:nvPr/>
+        </p:nvSpPr>
+        <p:spPr>
+          <a:xfrm>
+            <a:off x="9308592" y="2148840"/>
+            <a:ext cx="2624328" cy="2880360"/>
+          </a:xfrm>
+          <a:prstGeom prst="roundRect">
+            <a:avLst/>
+          </a:prstGeom>
+          <a:solidFill>
+            <a:srgbClr val="FFFFFF"/>
+          </a:solidFill>
+          <a:ln>
+            <a:noFill/>
+          </a:ln>
+          <a:effectLst/>
+          <a:effectLst>
+            <a:outerShdw blurRad="90000" dist="40000" dir="5400000" rotWithShape="0">
+              <a:srgbClr val="0A2A43">
+                <a:alpha val="22000"/>
+              </a:srgbClr>
+            </a:outerShdw>
+          </a:effectLst>
+        </p:spPr>
+        <p:style>
+          <a:lnRef idx="1">
+            <a:schemeClr val="accent1"/>
+          </a:lnRef>
+          <a:fillRef idx="3">
+            <a:schemeClr val="accent1"/>
+          </a:fillRef>
+          <a:effectRef idx="2">
+            <a:schemeClr val="accent1"/>
+          </a:effectRef>
+          <a:fontRef idx="minor">
+            <a:schemeClr val="lt1"/>
+          </a:fontRef>
+        </p:style>
+        <p:txBody>
+          <a:bodyPr rtlCol="0" anchor="ctr"/>
+          <a:lstStyle/>
+          <a:p>
+            <a:pPr algn="ctr"/>
+          </a:p>
+        </p:txBody>
+      </p:sp>
+      <p:sp>
+        <p:nvSpPr>
+          <p:cNvPr id="25" name="Round Same Side Corner Rectangle 24"/>
+          <p:cNvSpPr/>
+          <p:nvPr/>
+        </p:nvSpPr>
+        <p:spPr>
+          <a:xfrm>
+            <a:off x="9308592" y="2148840"/>
+            <a:ext cx="2624328" cy="109728"/>
+          </a:xfrm>
+          <a:prstGeom prst="round2SameRect">
+            <a:avLst/>
+          </a:prstGeom>
+          <a:solidFill>
+            <a:srgbClr val="C26B5A"/>
+          </a:solidFill>
+          <a:ln>
+            <a:noFill/>
+          </a:ln>
+          <a:effectLst/>
+        </p:spPr>
+        <p:style>
+          <a:lnRef idx="1">
+            <a:schemeClr val="accent1"/>
+          </a:lnRef>
+          <a:fillRef idx="3">
+            <a:schemeClr val="accent1"/>
+          </a:fillRef>
+          <a:effectRef idx="2">
+            <a:schemeClr val="accent1"/>
+          </a:effectRef>
+          <a:fontRef idx="minor">
+            <a:schemeClr val="lt1"/>
+          </a:fontRef>
+        </p:style>
+        <p:txBody>
+          <a:bodyPr rtlCol="0" anchor="ctr"/>
+          <a:lstStyle/>
+          <a:p>
+            <a:pPr algn="ctr"/>
+          </a:p>
+        </p:txBody>
+      </p:sp>
+      <p:sp>
+        <p:nvSpPr>
+          <p:cNvPr id="26" name="Oval 25"/>
+          <p:cNvSpPr/>
+          <p:nvPr/>
+        </p:nvSpPr>
+        <p:spPr>
+          <a:xfrm>
+            <a:off x="9628632" y="2468880"/>
+            <a:ext cx="640080" cy="640080"/>
+          </a:xfrm>
+          <a:prstGeom prst="ellipse">
+            <a:avLst/>
+          </a:prstGeom>
+          <a:solidFill>
+            <a:srgbClr val="C26B5A"/>
+          </a:solidFill>
+          <a:ln>
+            <a:noFill/>
+          </a:ln>
+          <a:effectLst/>
+        </p:spPr>
+        <p:style>
+          <a:lnRef idx="1">
+            <a:schemeClr val="accent1"/>
+          </a:lnRef>
+          <a:fillRef idx="3">
+            <a:schemeClr val="accent1"/>
+          </a:fillRef>
+          <a:effectRef idx="2">
+            <a:schemeClr val="accent1"/>
+          </a:effectRef>
+          <a:fontRef idx="minor">
+            <a:schemeClr val="lt1"/>
+          </a:fontRef>
+        </p:style>
+        <p:txBody>
+          <a:bodyPr rtlCol="0" anchor="ctr"/>
+          <a:lstStyle/>
+          <a:p>
+            <a:pPr algn="ctr"/>
+          </a:p>
+        </p:txBody>
+      </p:sp>
+      <p:sp>
+        <p:nvSpPr>
           <p:cNvPr id="27" name="TextBox 26"/>
           <p:cNvSpPr txBox="1"/>
           <p:nvPr/>
         </p:nvSpPr>
         <p:spPr>
           <a:xfrm>
-            <a:off x="1051560" y="5029200"/>
-            <a:ext cx="5212080" cy="731520"/>
+            <a:off x="9628632" y="2468880"/>
+            <a:ext cx="640080" cy="640080"/>
+          </a:xfrm>
+          <a:prstGeom prst="rect">
+            <a:avLst/>
+          </a:prstGeom>
+          <a:noFill/>
+        </p:spPr>
+        <p:txBody>
+          <a:bodyPr wrap="square" anchor="ctr" lIns="0" rIns="0" tIns="0" bIns="0">
+            <a:spAutoFit/>
+          </a:bodyPr>
+          <a:lstStyle/>
+          <a:p>
+            <a:pPr algn="ctr">
+              <a:lnSpc>
+                <a:spcPct val="100000"/>
+              </a:lnSpc>
+              <a:spcBef>
+                <a:spcPts val="0"/>
+              </a:spcBef>
+              <a:spcAft>
+                <a:spcPts val="600"/>
+              </a:spcAft>
+            </a:pPr>
+            <a:r>
+              <a:rPr sz="2200" b="1">
+                <a:solidFill>
+                  <a:srgbClr val="FFFFFF"/>
+                </a:solidFill>
+                <a:latin typeface="Segoe UI Semibold"/>
+              </a:rPr>
+              <a:t>⏱</a:t>
+            </a:r>
+          </a:p>
+        </p:txBody>
+      </p:sp>
+      <p:sp>
+        <p:nvSpPr>
+          <p:cNvPr id="28" name="TextBox 27"/>
+          <p:cNvSpPr txBox="1"/>
+          <p:nvPr/>
+        </p:nvSpPr>
+        <p:spPr>
+          <a:xfrm>
+            <a:off x="9628632" y="3291840"/>
+            <a:ext cx="1984248" cy="457200"/>
           </a:xfrm>
           <a:prstGeom prst="rect">
             <a:avLst/>
@@ -7130,35 +7117,58 @@
           <a:p>
             <a:pPr algn="l">
               <a:lnSpc>
-                <a:spcPct val="115000"/>
-              </a:lnSpc>
-              <a:spcBef>
-                <a:spcPts val="0"/>
-              </a:spcBef>
-              <a:spcAft>
-                <a:spcPts val="300"/>
-              </a:spcAft>
-            </a:pPr>
-            <a:r>
-              <a:rPr sz="1450" b="1">
-                <a:solidFill>
-                  <a:srgbClr val="006EC7"/>
+                <a:spcPct val="100000"/>
+              </a:lnSpc>
+              <a:spcBef>
+                <a:spcPts val="0"/>
+              </a:spcBef>
+              <a:spcAft>
+                <a:spcPts val="0"/>
+              </a:spcAft>
+            </a:pPr>
+            <a:r>
+              <a:rPr sz="1600" b="1">
+                <a:solidFill>
+                  <a:srgbClr val="132A3E"/>
                 </a:solidFill>
                 <a:latin typeface="Segoe UI Semibold"/>
               </a:rPr>
-              <a:t>Una única fuente de la verdad</a:t>
-            </a:r>
-          </a:p>
+              <a:t>Ciclos lentos</a:t>
+            </a:r>
+          </a:p>
+        </p:txBody>
+      </p:sp>
+      <p:sp>
+        <p:nvSpPr>
+          <p:cNvPr id="29" name="TextBox 28"/>
+          <p:cNvSpPr txBox="1"/>
+          <p:nvPr/>
+        </p:nvSpPr>
+        <p:spPr>
+          <a:xfrm>
+            <a:off x="9628632" y="3794760"/>
+            <a:ext cx="1984248" cy="1097280"/>
+          </a:xfrm>
+          <a:prstGeom prst="rect">
+            <a:avLst/>
+          </a:prstGeom>
+          <a:noFill/>
+        </p:spPr>
+        <p:txBody>
+          <a:bodyPr wrap="square" anchor="t" lIns="0" rIns="0" tIns="0" bIns="0">
+            <a:spAutoFit/>
+          </a:bodyPr>
+          <a:lstStyle/>
           <a:p>
             <a:pPr algn="l">
               <a:lnSpc>
-                <a:spcPct val="115000"/>
-              </a:lnSpc>
-              <a:spcBef>
-                <a:spcPts val="0"/>
-              </a:spcBef>
-              <a:spcAft>
-                <a:spcPts val="300"/>
+                <a:spcPct val="120000"/>
+              </a:lnSpc>
+              <a:spcBef>
+                <a:spcPts val="0"/>
+              </a:spcBef>
+              <a:spcAft>
+                <a:spcPts val="0"/>
               </a:spcAft>
             </a:pPr>
             <a:r>
@@ -7168,14 +7178,112 @@
                 </a:solidFill>
                 <a:latin typeface="Segoe UI"/>
               </a:rPr>
-              <a:t>Reporting, planes y previsiones comparten datos y definiciones.</a:t>
-            </a:r>
-          </a:p>
-        </p:txBody>
-      </p:sp>
-      <p:sp>
-        <p:nvSpPr>
-          <p:cNvPr id="28" name="TextBox 27"/>
+              <a:t>Cerrar un presupuesto lleva semanas de idas y venidas.</a:t>
+            </a:r>
+          </a:p>
+        </p:txBody>
+      </p:sp>
+      <p:sp>
+        <p:nvSpPr>
+          <p:cNvPr id="30" name="Rounded Rectangle 29"/>
+          <p:cNvSpPr/>
+          <p:nvPr/>
+        </p:nvSpPr>
+        <p:spPr>
+          <a:xfrm>
+            <a:off x="777240" y="5349240"/>
+            <a:ext cx="10634472" cy="685800"/>
+          </a:xfrm>
+          <a:prstGeom prst="roundRect">
+            <a:avLst/>
+          </a:prstGeom>
+          <a:solidFill>
+            <a:srgbClr val="0A2A43"/>
+          </a:solidFill>
+          <a:ln>
+            <a:noFill/>
+          </a:ln>
+          <a:effectLst/>
+        </p:spPr>
+        <p:style>
+          <a:lnRef idx="1">
+            <a:schemeClr val="accent1"/>
+          </a:lnRef>
+          <a:fillRef idx="3">
+            <a:schemeClr val="accent1"/>
+          </a:fillRef>
+          <a:effectRef idx="2">
+            <a:schemeClr val="accent1"/>
+          </a:effectRef>
+          <a:fontRef idx="minor">
+            <a:schemeClr val="lt1"/>
+          </a:fontRef>
+        </p:style>
+        <p:txBody>
+          <a:bodyPr rtlCol="0" anchor="ctr"/>
+          <a:lstStyle/>
+          <a:p>
+            <a:pPr algn="ctr"/>
+          </a:p>
+        </p:txBody>
+      </p:sp>
+      <p:sp>
+        <p:nvSpPr>
+          <p:cNvPr id="31" name="TextBox 30"/>
+          <p:cNvSpPr txBox="1"/>
+          <p:nvPr/>
+        </p:nvSpPr>
+        <p:spPr>
+          <a:xfrm>
+            <a:off x="1005840" y="5449824"/>
+            <a:ext cx="10241280" cy="502920"/>
+          </a:xfrm>
+          <a:prstGeom prst="rect">
+            <a:avLst/>
+          </a:prstGeom>
+          <a:noFill/>
+        </p:spPr>
+        <p:txBody>
+          <a:bodyPr wrap="square" anchor="ctr" lIns="0" rIns="0" tIns="0" bIns="0">
+            <a:spAutoFit/>
+          </a:bodyPr>
+          <a:lstStyle/>
+          <a:p>
+            <a:pPr algn="l">
+              <a:lnSpc>
+                <a:spcPct val="100000"/>
+              </a:lnSpc>
+              <a:spcBef>
+                <a:spcPts val="0"/>
+              </a:spcBef>
+              <a:spcAft>
+                <a:spcPts val="0"/>
+              </a:spcAft>
+            </a:pPr>
+            <a:r>
+              <a:rPr sz="1400" b="1">
+                <a:solidFill>
+                  <a:srgbClr val="F5B241"/>
+                </a:solidFill>
+                <a:latin typeface="Segoe UI Semibold"/>
+              </a:rPr>
+              <a:t>La consecuencia:  </a:t>
+            </a:r>
+            <a:r>
+              <a:rPr sz="1400" b="0">
+                <a:solidFill>
+                  <a:srgbClr val="DDE7F0"/>
+                </a:solidFill>
+                <a:latin typeface="Segoe UI"/>
+              </a:rPr>
+              <a:t>decidimos tarde y con información en la que no siempre confiamos.</a:t>
+            </a:r>
+          </a:p>
+        </p:txBody>
+      </p:sp>
+      <p:sp>
+        <p:nvSpPr>
+          <p:cNvPr id="32" name="TextBox 31"/>
           <p:cNvSpPr txBox="1"/>
           <p:nvPr/>
         </p:nvSpPr>
@@ -7220,7 +7328,7 @@
       </p:sp>
       <p:sp>
         <p:nvSpPr>
-          <p:cNvPr id="29" name="TextBox 28"/>
+          <p:cNvPr id="33" name="TextBox 32"/>
           <p:cNvSpPr txBox="1"/>
           <p:nvPr/>
         </p:nvSpPr>
@@ -7373,7 +7481,7 @@
                 </a:solidFill>
                 <a:latin typeface="Segoe UI Semibold"/>
               </a:rPr>
-              <a:t>ARQUITECTURA FUNCIONAL</a:t>
+              <a:t>LA SOLUCIÓN</a:t>
             </a:r>
           </a:p>
         </p:txBody>
@@ -7418,7 +7526,7 @@
                 </a:solidFill>
                 <a:latin typeface="Segoe UI Semibold"/>
               </a:rPr>
-              <a:t>Los tres pilares de la plataforma</a:t>
+              <a:t>¿Qué es SAP Analytics Cloud?</a:t>
             </a:r>
           </a:p>
         </p:txBody>
@@ -7431,8 +7539,8 @@
         </p:nvSpPr>
         <p:spPr>
           <a:xfrm>
-            <a:off x="777240" y="1463040"/>
-            <a:ext cx="10607040" cy="457200"/>
+            <a:off x="777240" y="1691640"/>
+            <a:ext cx="5669280" cy="2377440"/>
           </a:xfrm>
           <a:prstGeom prst="rect">
             <a:avLst/>
@@ -7447,13 +7555,57 @@
           <a:p>
             <a:pPr algn="l">
               <a:lnSpc>
-                <a:spcPct val="100000"/>
-              </a:lnSpc>
-              <a:spcBef>
-                <a:spcPts val="0"/>
-              </a:spcBef>
-              <a:spcAft>
-                <a:spcPts val="0"/>
+                <a:spcPct val="128000"/>
+              </a:lnSpc>
+              <a:spcBef>
+                <a:spcPts val="0"/>
+              </a:spcBef>
+              <a:spcAft>
+                <a:spcPts val="800"/>
+              </a:spcAft>
+            </a:pPr>
+            <a:r>
+              <a:rPr sz="1550" b="0">
+                <a:solidFill>
+                  <a:srgbClr val="132A3E"/>
+                </a:solidFill>
+                <a:latin typeface="Segoe UI"/>
+              </a:rPr>
+              <a:t>Es una plataforma en la nube de SAP que reúne, en un mismo sitio, todo lo que la dirección necesita para entender y planificar el negocio.</a:t>
+            </a:r>
+          </a:p>
+          <a:p>
+            <a:pPr algn="l">
+              <a:lnSpc>
+                <a:spcPct val="128000"/>
+              </a:lnSpc>
+              <a:spcBef>
+                <a:spcPts val="0"/>
+              </a:spcBef>
+              <a:spcAft>
+                <a:spcPts val="800"/>
+              </a:spcAft>
+            </a:pPr>
+            <a:r>
+              <a:rPr sz="600" b="0">
+                <a:solidFill>
+                  <a:srgbClr val="132A3E"/>
+                </a:solidFill>
+                <a:latin typeface="Segoe UI"/>
+              </a:rPr>
+              <a:t/>
+            </a:r>
+          </a:p>
+          <a:p>
+            <a:pPr algn="l">
+              <a:lnSpc>
+                <a:spcPct val="128000"/>
+              </a:lnSpc>
+              <a:spcBef>
+                <a:spcPts val="0"/>
+              </a:spcBef>
+              <a:spcAft>
+                <a:spcPts val="800"/>
               </a:spcAft>
             </a:pPr>
             <a:r>
@@ -7463,7 +7615,7 @@
                 </a:solidFill>
                 <a:latin typeface="Segoe UI"/>
               </a:rPr>
-              <a:t>SAC integra tres disciplinas analíticas que tradicionalmente vivían en herramientas separadas.</a:t>
+              <a:t>Piénselo como un “cuadro de mando único”: en lugar de pedir informes a distintas áreas y juntarlos en Excel, todos trabajan sobre los mismos números, siempre actualizados.</a:t>
             </a:r>
           </a:p>
         </p:txBody>
@@ -7476,8 +7628,864 @@
         </p:nvSpPr>
         <p:spPr>
           <a:xfrm>
-            <a:off x="777240" y="2148840"/>
-            <a:ext cx="3502152" cy="3703320"/>
+            <a:off x="6903720" y="1691640"/>
+            <a:ext cx="4572000" cy="4160520"/>
+          </a:xfrm>
+          <a:prstGeom prst="roundRect">
+            <a:avLst/>
+          </a:prstGeom>
+          <a:solidFill>
+            <a:srgbClr val="0A2A43"/>
+          </a:solidFill>
+          <a:ln>
+            <a:noFill/>
+          </a:ln>
+          <a:effectLst/>
+          <a:effectLst>
+            <a:outerShdw blurRad="90000" dist="40000" dir="5400000" rotWithShape="0">
+              <a:srgbClr val="0A2A43">
+                <a:alpha val="22000"/>
+              </a:srgbClr>
+            </a:outerShdw>
+          </a:effectLst>
+        </p:spPr>
+        <p:style>
+          <a:lnRef idx="1">
+            <a:schemeClr val="accent1"/>
+          </a:lnRef>
+          <a:fillRef idx="3">
+            <a:schemeClr val="accent1"/>
+          </a:fillRef>
+          <a:effectRef idx="2">
+            <a:schemeClr val="accent1"/>
+          </a:effectRef>
+          <a:fontRef idx="minor">
+            <a:schemeClr val="lt1"/>
+          </a:fontRef>
+        </p:style>
+        <p:txBody>
+          <a:bodyPr rtlCol="0" anchor="ctr"/>
+          <a:lstStyle/>
+          <a:p>
+            <a:pPr algn="ctr"/>
+          </a:p>
+        </p:txBody>
+      </p:sp>
+      <p:sp>
+        <p:nvSpPr>
+          <p:cNvPr id="7" name="Round Same Side Corner Rectangle 6"/>
+          <p:cNvSpPr/>
+          <p:nvPr/>
+        </p:nvSpPr>
+        <p:spPr>
+          <a:xfrm>
+            <a:off x="6903720" y="1691640"/>
+            <a:ext cx="4572000" cy="109728"/>
+          </a:xfrm>
+          <a:prstGeom prst="round2SameRect">
+            <a:avLst/>
+          </a:prstGeom>
+          <a:solidFill>
+            <a:srgbClr val="F5B241"/>
+          </a:solidFill>
+          <a:ln>
+            <a:noFill/>
+          </a:ln>
+          <a:effectLst/>
+        </p:spPr>
+        <p:style>
+          <a:lnRef idx="1">
+            <a:schemeClr val="accent1"/>
+          </a:lnRef>
+          <a:fillRef idx="3">
+            <a:schemeClr val="accent1"/>
+          </a:fillRef>
+          <a:effectRef idx="2">
+            <a:schemeClr val="accent1"/>
+          </a:effectRef>
+          <a:fontRef idx="minor">
+            <a:schemeClr val="lt1"/>
+          </a:fontRef>
+        </p:style>
+        <p:txBody>
+          <a:bodyPr rtlCol="0" anchor="ctr"/>
+          <a:lstStyle/>
+          <a:p>
+            <a:pPr algn="ctr"/>
+          </a:p>
+        </p:txBody>
+      </p:sp>
+      <p:sp>
+        <p:nvSpPr>
+          <p:cNvPr id="8" name="TextBox 7"/>
+          <p:cNvSpPr txBox="1"/>
+          <p:nvPr/>
+        </p:nvSpPr>
+        <p:spPr>
+          <a:xfrm>
+            <a:off x="7269480" y="1965960"/>
+            <a:ext cx="3931920" cy="457200"/>
+          </a:xfrm>
+          <a:prstGeom prst="rect">
+            <a:avLst/>
+          </a:prstGeom>
+          <a:noFill/>
+        </p:spPr>
+        <p:txBody>
+          <a:bodyPr wrap="square" anchor="t" lIns="0" rIns="0" tIns="0" bIns="0">
+            <a:spAutoFit/>
+          </a:bodyPr>
+          <a:lstStyle/>
+          <a:p>
+            <a:pPr algn="l">
+              <a:lnSpc>
+                <a:spcPct val="100000"/>
+              </a:lnSpc>
+              <a:spcBef>
+                <a:spcPts val="0"/>
+              </a:spcBef>
+              <a:spcAft>
+                <a:spcPts val="0"/>
+              </a:spcAft>
+            </a:pPr>
+            <a:r>
+              <a:rPr sz="1200" b="1">
+                <a:solidFill>
+                  <a:srgbClr val="0FA9B0"/>
+                </a:solidFill>
+                <a:latin typeface="Segoe UI Semibold"/>
+              </a:rPr>
+              <a:t>EN POCAS PALABRAS</a:t>
+            </a:r>
+          </a:p>
+        </p:txBody>
+      </p:sp>
+      <p:sp>
+        <p:nvSpPr>
+          <p:cNvPr id="9" name="Oval 8"/>
+          <p:cNvSpPr/>
+          <p:nvPr/>
+        </p:nvSpPr>
+        <p:spPr>
+          <a:xfrm>
+            <a:off x="7269480" y="2423160"/>
+            <a:ext cx="365760" cy="365760"/>
+          </a:xfrm>
+          <a:prstGeom prst="ellipse">
+            <a:avLst/>
+          </a:prstGeom>
+          <a:solidFill>
+            <a:srgbClr val="0FA9B0"/>
+          </a:solidFill>
+          <a:ln>
+            <a:noFill/>
+          </a:ln>
+          <a:effectLst/>
+        </p:spPr>
+        <p:style>
+          <a:lnRef idx="1">
+            <a:schemeClr val="accent1"/>
+          </a:lnRef>
+          <a:fillRef idx="3">
+            <a:schemeClr val="accent1"/>
+          </a:fillRef>
+          <a:effectRef idx="2">
+            <a:schemeClr val="accent1"/>
+          </a:effectRef>
+          <a:fontRef idx="minor">
+            <a:schemeClr val="lt1"/>
+          </a:fontRef>
+        </p:style>
+        <p:txBody>
+          <a:bodyPr rtlCol="0" anchor="ctr"/>
+          <a:lstStyle/>
+          <a:p>
+            <a:pPr algn="ctr"/>
+          </a:p>
+        </p:txBody>
+      </p:sp>
+      <p:sp>
+        <p:nvSpPr>
+          <p:cNvPr id="10" name="TextBox 9"/>
+          <p:cNvSpPr txBox="1"/>
+          <p:nvPr/>
+        </p:nvSpPr>
+        <p:spPr>
+          <a:xfrm>
+            <a:off x="7269480" y="2423160"/>
+            <a:ext cx="365760" cy="365760"/>
+          </a:xfrm>
+          <a:prstGeom prst="rect">
+            <a:avLst/>
+          </a:prstGeom>
+          <a:noFill/>
+        </p:spPr>
+        <p:txBody>
+          <a:bodyPr wrap="square" anchor="ctr" lIns="0" rIns="0" tIns="0" bIns="0">
+            <a:spAutoFit/>
+          </a:bodyPr>
+          <a:lstStyle/>
+          <a:p>
+            <a:pPr algn="ctr">
+              <a:lnSpc>
+                <a:spcPct val="100000"/>
+              </a:lnSpc>
+              <a:spcBef>
+                <a:spcPts val="0"/>
+              </a:spcBef>
+              <a:spcAft>
+                <a:spcPts val="600"/>
+              </a:spcAft>
+            </a:pPr>
+            <a:r>
+              <a:rPr sz="1400" b="1">
+                <a:solidFill>
+                  <a:srgbClr val="FFFFFF"/>
+                </a:solidFill>
+                <a:latin typeface="Segoe UI Semibold"/>
+              </a:rPr>
+              <a:t>✔</a:t>
+            </a:r>
+          </a:p>
+        </p:txBody>
+      </p:sp>
+      <p:sp>
+        <p:nvSpPr>
+          <p:cNvPr id="11" name="TextBox 10"/>
+          <p:cNvSpPr txBox="1"/>
+          <p:nvPr/>
+        </p:nvSpPr>
+        <p:spPr>
+          <a:xfrm>
+            <a:off x="7772400" y="2404872"/>
+            <a:ext cx="3474720" cy="320040"/>
+          </a:xfrm>
+          <a:prstGeom prst="rect">
+            <a:avLst/>
+          </a:prstGeom>
+          <a:noFill/>
+        </p:spPr>
+        <p:txBody>
+          <a:bodyPr wrap="square" anchor="t" lIns="0" rIns="0" tIns="0" bIns="0">
+            <a:spAutoFit/>
+          </a:bodyPr>
+          <a:lstStyle/>
+          <a:p>
+            <a:pPr algn="l">
+              <a:lnSpc>
+                <a:spcPct val="100000"/>
+              </a:lnSpc>
+              <a:spcBef>
+                <a:spcPts val="0"/>
+              </a:spcBef>
+              <a:spcAft>
+                <a:spcPts val="0"/>
+              </a:spcAft>
+            </a:pPr>
+            <a:r>
+              <a:rPr sz="1450" b="1">
+                <a:solidFill>
+                  <a:srgbClr val="FFFFFF"/>
+                </a:solidFill>
+                <a:latin typeface="Segoe UI Semibold"/>
+              </a:rPr>
+              <a:t>Todo en un solo lugar</a:t>
+            </a:r>
+          </a:p>
+        </p:txBody>
+      </p:sp>
+      <p:sp>
+        <p:nvSpPr>
+          <p:cNvPr id="12" name="TextBox 11"/>
+          <p:cNvSpPr txBox="1"/>
+          <p:nvPr/>
+        </p:nvSpPr>
+        <p:spPr>
+          <a:xfrm>
+            <a:off x="7772400" y="2715768"/>
+            <a:ext cx="3474720" cy="457200"/>
+          </a:xfrm>
+          <a:prstGeom prst="rect">
+            <a:avLst/>
+          </a:prstGeom>
+          <a:noFill/>
+        </p:spPr>
+        <p:txBody>
+          <a:bodyPr wrap="square" anchor="t" lIns="0" rIns="0" tIns="0" bIns="0">
+            <a:spAutoFit/>
+          </a:bodyPr>
+          <a:lstStyle/>
+          <a:p>
+            <a:pPr algn="l">
+              <a:lnSpc>
+                <a:spcPct val="115000"/>
+              </a:lnSpc>
+              <a:spcBef>
+                <a:spcPts val="0"/>
+              </a:spcBef>
+              <a:spcAft>
+                <a:spcPts val="0"/>
+              </a:spcAft>
+            </a:pPr>
+            <a:r>
+              <a:rPr sz="1150" b="0">
+                <a:solidFill>
+                  <a:srgbClr val="B9CBDA"/>
+                </a:solidFill>
+                <a:latin typeface="Segoe UI"/>
+              </a:rPr>
+              <a:t>Informes, presupuestos y previsiones juntos.</a:t>
+            </a:r>
+          </a:p>
+        </p:txBody>
+      </p:sp>
+      <p:sp>
+        <p:nvSpPr>
+          <p:cNvPr id="13" name="Oval 12"/>
+          <p:cNvSpPr/>
+          <p:nvPr/>
+        </p:nvSpPr>
+        <p:spPr>
+          <a:xfrm>
+            <a:off x="7269480" y="3291840"/>
+            <a:ext cx="365760" cy="365760"/>
+          </a:xfrm>
+          <a:prstGeom prst="ellipse">
+            <a:avLst/>
+          </a:prstGeom>
+          <a:solidFill>
+            <a:srgbClr val="0FA9B0"/>
+          </a:solidFill>
+          <a:ln>
+            <a:noFill/>
+          </a:ln>
+          <a:effectLst/>
+        </p:spPr>
+        <p:style>
+          <a:lnRef idx="1">
+            <a:schemeClr val="accent1"/>
+          </a:lnRef>
+          <a:fillRef idx="3">
+            <a:schemeClr val="accent1"/>
+          </a:fillRef>
+          <a:effectRef idx="2">
+            <a:schemeClr val="accent1"/>
+          </a:effectRef>
+          <a:fontRef idx="minor">
+            <a:schemeClr val="lt1"/>
+          </a:fontRef>
+        </p:style>
+        <p:txBody>
+          <a:bodyPr rtlCol="0" anchor="ctr"/>
+          <a:lstStyle/>
+          <a:p>
+            <a:pPr algn="ctr"/>
+          </a:p>
+        </p:txBody>
+      </p:sp>
+      <p:sp>
+        <p:nvSpPr>
+          <p:cNvPr id="14" name="TextBox 13"/>
+          <p:cNvSpPr txBox="1"/>
+          <p:nvPr/>
+        </p:nvSpPr>
+        <p:spPr>
+          <a:xfrm>
+            <a:off x="7269480" y="3291840"/>
+            <a:ext cx="365760" cy="365760"/>
+          </a:xfrm>
+          <a:prstGeom prst="rect">
+            <a:avLst/>
+          </a:prstGeom>
+          <a:noFill/>
+        </p:spPr>
+        <p:txBody>
+          <a:bodyPr wrap="square" anchor="ctr" lIns="0" rIns="0" tIns="0" bIns="0">
+            <a:spAutoFit/>
+          </a:bodyPr>
+          <a:lstStyle/>
+          <a:p>
+            <a:pPr algn="ctr">
+              <a:lnSpc>
+                <a:spcPct val="100000"/>
+              </a:lnSpc>
+              <a:spcBef>
+                <a:spcPts val="0"/>
+              </a:spcBef>
+              <a:spcAft>
+                <a:spcPts val="600"/>
+              </a:spcAft>
+            </a:pPr>
+            <a:r>
+              <a:rPr sz="1400" b="1">
+                <a:solidFill>
+                  <a:srgbClr val="FFFFFF"/>
+                </a:solidFill>
+                <a:latin typeface="Segoe UI Semibold"/>
+              </a:rPr>
+              <a:t>✔</a:t>
+            </a:r>
+          </a:p>
+        </p:txBody>
+      </p:sp>
+      <p:sp>
+        <p:nvSpPr>
+          <p:cNvPr id="15" name="TextBox 14"/>
+          <p:cNvSpPr txBox="1"/>
+          <p:nvPr/>
+        </p:nvSpPr>
+        <p:spPr>
+          <a:xfrm>
+            <a:off x="7772400" y="3273552"/>
+            <a:ext cx="3474720" cy="320040"/>
+          </a:xfrm>
+          <a:prstGeom prst="rect">
+            <a:avLst/>
+          </a:prstGeom>
+          <a:noFill/>
+        </p:spPr>
+        <p:txBody>
+          <a:bodyPr wrap="square" anchor="t" lIns="0" rIns="0" tIns="0" bIns="0">
+            <a:spAutoFit/>
+          </a:bodyPr>
+          <a:lstStyle/>
+          <a:p>
+            <a:pPr algn="l">
+              <a:lnSpc>
+                <a:spcPct val="100000"/>
+              </a:lnSpc>
+              <a:spcBef>
+                <a:spcPts val="0"/>
+              </a:spcBef>
+              <a:spcAft>
+                <a:spcPts val="0"/>
+              </a:spcAft>
+            </a:pPr>
+            <a:r>
+              <a:rPr sz="1450" b="1">
+                <a:solidFill>
+                  <a:srgbClr val="FFFFFF"/>
+                </a:solidFill>
+                <a:latin typeface="Segoe UI Semibold"/>
+              </a:rPr>
+              <a:t>Siempre en la nube</a:t>
+            </a:r>
+          </a:p>
+        </p:txBody>
+      </p:sp>
+      <p:sp>
+        <p:nvSpPr>
+          <p:cNvPr id="16" name="TextBox 15"/>
+          <p:cNvSpPr txBox="1"/>
+          <p:nvPr/>
+        </p:nvSpPr>
+        <p:spPr>
+          <a:xfrm>
+            <a:off x="7772400" y="3584448"/>
+            <a:ext cx="3474720" cy="457200"/>
+          </a:xfrm>
+          <a:prstGeom prst="rect">
+            <a:avLst/>
+          </a:prstGeom>
+          <a:noFill/>
+        </p:spPr>
+        <p:txBody>
+          <a:bodyPr wrap="square" anchor="t" lIns="0" rIns="0" tIns="0" bIns="0">
+            <a:spAutoFit/>
+          </a:bodyPr>
+          <a:lstStyle/>
+          <a:p>
+            <a:pPr algn="l">
+              <a:lnSpc>
+                <a:spcPct val="115000"/>
+              </a:lnSpc>
+              <a:spcBef>
+                <a:spcPts val="0"/>
+              </a:spcBef>
+              <a:spcAft>
+                <a:spcPts val="0"/>
+              </a:spcAft>
+            </a:pPr>
+            <a:r>
+              <a:rPr sz="1150" b="0">
+                <a:solidFill>
+                  <a:srgbClr val="B9CBDA"/>
+                </a:solidFill>
+                <a:latin typeface="Segoe UI"/>
+              </a:rPr>
+              <a:t>Accesible y actualizado, sin instalar nada.</a:t>
+            </a:r>
+          </a:p>
+        </p:txBody>
+      </p:sp>
+      <p:sp>
+        <p:nvSpPr>
+          <p:cNvPr id="17" name="Oval 16"/>
+          <p:cNvSpPr/>
+          <p:nvPr/>
+        </p:nvSpPr>
+        <p:spPr>
+          <a:xfrm>
+            <a:off x="7269480" y="4160520"/>
+            <a:ext cx="365760" cy="365760"/>
+          </a:xfrm>
+          <a:prstGeom prst="ellipse">
+            <a:avLst/>
+          </a:prstGeom>
+          <a:solidFill>
+            <a:srgbClr val="0FA9B0"/>
+          </a:solidFill>
+          <a:ln>
+            <a:noFill/>
+          </a:ln>
+          <a:effectLst/>
+        </p:spPr>
+        <p:style>
+          <a:lnRef idx="1">
+            <a:schemeClr val="accent1"/>
+          </a:lnRef>
+          <a:fillRef idx="3">
+            <a:schemeClr val="accent1"/>
+          </a:fillRef>
+          <a:effectRef idx="2">
+            <a:schemeClr val="accent1"/>
+          </a:effectRef>
+          <a:fontRef idx="minor">
+            <a:schemeClr val="lt1"/>
+          </a:fontRef>
+        </p:style>
+        <p:txBody>
+          <a:bodyPr rtlCol="0" anchor="ctr"/>
+          <a:lstStyle/>
+          <a:p>
+            <a:pPr algn="ctr"/>
+          </a:p>
+        </p:txBody>
+      </p:sp>
+      <p:sp>
+        <p:nvSpPr>
+          <p:cNvPr id="18" name="TextBox 17"/>
+          <p:cNvSpPr txBox="1"/>
+          <p:nvPr/>
+        </p:nvSpPr>
+        <p:spPr>
+          <a:xfrm>
+            <a:off x="7269480" y="4160520"/>
+            <a:ext cx="365760" cy="365760"/>
+          </a:xfrm>
+          <a:prstGeom prst="rect">
+            <a:avLst/>
+          </a:prstGeom>
+          <a:noFill/>
+        </p:spPr>
+        <p:txBody>
+          <a:bodyPr wrap="square" anchor="ctr" lIns="0" rIns="0" tIns="0" bIns="0">
+            <a:spAutoFit/>
+          </a:bodyPr>
+          <a:lstStyle/>
+          <a:p>
+            <a:pPr algn="ctr">
+              <a:lnSpc>
+                <a:spcPct val="100000"/>
+              </a:lnSpc>
+              <a:spcBef>
+                <a:spcPts val="0"/>
+              </a:spcBef>
+              <a:spcAft>
+                <a:spcPts val="600"/>
+              </a:spcAft>
+            </a:pPr>
+            <a:r>
+              <a:rPr sz="1400" b="1">
+                <a:solidFill>
+                  <a:srgbClr val="FFFFFF"/>
+                </a:solidFill>
+                <a:latin typeface="Segoe UI Semibold"/>
+              </a:rPr>
+              <a:t>✔</a:t>
+            </a:r>
+          </a:p>
+        </p:txBody>
+      </p:sp>
+      <p:sp>
+        <p:nvSpPr>
+          <p:cNvPr id="19" name="TextBox 18"/>
+          <p:cNvSpPr txBox="1"/>
+          <p:nvPr/>
+        </p:nvSpPr>
+        <p:spPr>
+          <a:xfrm>
+            <a:off x="7772400" y="4142232"/>
+            <a:ext cx="3474720" cy="320040"/>
+          </a:xfrm>
+          <a:prstGeom prst="rect">
+            <a:avLst/>
+          </a:prstGeom>
+          <a:noFill/>
+        </p:spPr>
+        <p:txBody>
+          <a:bodyPr wrap="square" anchor="t" lIns="0" rIns="0" tIns="0" bIns="0">
+            <a:spAutoFit/>
+          </a:bodyPr>
+          <a:lstStyle/>
+          <a:p>
+            <a:pPr algn="l">
+              <a:lnSpc>
+                <a:spcPct val="100000"/>
+              </a:lnSpc>
+              <a:spcBef>
+                <a:spcPts val="0"/>
+              </a:spcBef>
+              <a:spcAft>
+                <a:spcPts val="0"/>
+              </a:spcAft>
+            </a:pPr>
+            <a:r>
+              <a:rPr sz="1450" b="1">
+                <a:solidFill>
+                  <a:srgbClr val="FFFFFF"/>
+                </a:solidFill>
+                <a:latin typeface="Segoe UI Semibold"/>
+              </a:rPr>
+              <a:t>Para toda la empresa</a:t>
+            </a:r>
+          </a:p>
+        </p:txBody>
+      </p:sp>
+      <p:sp>
+        <p:nvSpPr>
+          <p:cNvPr id="20" name="TextBox 19"/>
+          <p:cNvSpPr txBox="1"/>
+          <p:nvPr/>
+        </p:nvSpPr>
+        <p:spPr>
+          <a:xfrm>
+            <a:off x="7772400" y="4453128"/>
+            <a:ext cx="3474720" cy="457200"/>
+          </a:xfrm>
+          <a:prstGeom prst="rect">
+            <a:avLst/>
+          </a:prstGeom>
+          <a:noFill/>
+        </p:spPr>
+        <p:txBody>
+          <a:bodyPr wrap="square" anchor="t" lIns="0" rIns="0" tIns="0" bIns="0">
+            <a:spAutoFit/>
+          </a:bodyPr>
+          <a:lstStyle/>
+          <a:p>
+            <a:pPr algn="l">
+              <a:lnSpc>
+                <a:spcPct val="115000"/>
+              </a:lnSpc>
+              <a:spcBef>
+                <a:spcPts val="0"/>
+              </a:spcBef>
+              <a:spcAft>
+                <a:spcPts val="0"/>
+              </a:spcAft>
+            </a:pPr>
+            <a:r>
+              <a:rPr sz="1150" b="0">
+                <a:solidFill>
+                  <a:srgbClr val="B9CBDA"/>
+                </a:solidFill>
+                <a:latin typeface="Segoe UI"/>
+              </a:rPr>
+              <a:t>Las áreas comparten los mismos datos.</a:t>
+            </a:r>
+          </a:p>
+        </p:txBody>
+      </p:sp>
+      <p:sp>
+        <p:nvSpPr>
+          <p:cNvPr id="21" name="Oval 20"/>
+          <p:cNvSpPr/>
+          <p:nvPr/>
+        </p:nvSpPr>
+        <p:spPr>
+          <a:xfrm>
+            <a:off x="7269480" y="5029200"/>
+            <a:ext cx="365760" cy="365760"/>
+          </a:xfrm>
+          <a:prstGeom prst="ellipse">
+            <a:avLst/>
+          </a:prstGeom>
+          <a:solidFill>
+            <a:srgbClr val="0FA9B0"/>
+          </a:solidFill>
+          <a:ln>
+            <a:noFill/>
+          </a:ln>
+          <a:effectLst/>
+        </p:spPr>
+        <p:style>
+          <a:lnRef idx="1">
+            <a:schemeClr val="accent1"/>
+          </a:lnRef>
+          <a:fillRef idx="3">
+            <a:schemeClr val="accent1"/>
+          </a:fillRef>
+          <a:effectRef idx="2">
+            <a:schemeClr val="accent1"/>
+          </a:effectRef>
+          <a:fontRef idx="minor">
+            <a:schemeClr val="lt1"/>
+          </a:fontRef>
+        </p:style>
+        <p:txBody>
+          <a:bodyPr rtlCol="0" anchor="ctr"/>
+          <a:lstStyle/>
+          <a:p>
+            <a:pPr algn="ctr"/>
+          </a:p>
+        </p:txBody>
+      </p:sp>
+      <p:sp>
+        <p:nvSpPr>
+          <p:cNvPr id="22" name="TextBox 21"/>
+          <p:cNvSpPr txBox="1"/>
+          <p:nvPr/>
+        </p:nvSpPr>
+        <p:spPr>
+          <a:xfrm>
+            <a:off x="7269480" y="5029200"/>
+            <a:ext cx="365760" cy="365760"/>
+          </a:xfrm>
+          <a:prstGeom prst="rect">
+            <a:avLst/>
+          </a:prstGeom>
+          <a:noFill/>
+        </p:spPr>
+        <p:txBody>
+          <a:bodyPr wrap="square" anchor="ctr" lIns="0" rIns="0" tIns="0" bIns="0">
+            <a:spAutoFit/>
+          </a:bodyPr>
+          <a:lstStyle/>
+          <a:p>
+            <a:pPr algn="ctr">
+              <a:lnSpc>
+                <a:spcPct val="100000"/>
+              </a:lnSpc>
+              <a:spcBef>
+                <a:spcPts val="0"/>
+              </a:spcBef>
+              <a:spcAft>
+                <a:spcPts val="600"/>
+              </a:spcAft>
+            </a:pPr>
+            <a:r>
+              <a:rPr sz="1400" b="1">
+                <a:solidFill>
+                  <a:srgbClr val="FFFFFF"/>
+                </a:solidFill>
+                <a:latin typeface="Segoe UI Semibold"/>
+              </a:rPr>
+              <a:t>✔</a:t>
+            </a:r>
+          </a:p>
+        </p:txBody>
+      </p:sp>
+      <p:sp>
+        <p:nvSpPr>
+          <p:cNvPr id="23" name="TextBox 22"/>
+          <p:cNvSpPr txBox="1"/>
+          <p:nvPr/>
+        </p:nvSpPr>
+        <p:spPr>
+          <a:xfrm>
+            <a:off x="7772400" y="5010912"/>
+            <a:ext cx="3474720" cy="320040"/>
+          </a:xfrm>
+          <a:prstGeom prst="rect">
+            <a:avLst/>
+          </a:prstGeom>
+          <a:noFill/>
+        </p:spPr>
+        <p:txBody>
+          <a:bodyPr wrap="square" anchor="t" lIns="0" rIns="0" tIns="0" bIns="0">
+            <a:spAutoFit/>
+          </a:bodyPr>
+          <a:lstStyle/>
+          <a:p>
+            <a:pPr algn="l">
+              <a:lnSpc>
+                <a:spcPct val="100000"/>
+              </a:lnSpc>
+              <a:spcBef>
+                <a:spcPts val="0"/>
+              </a:spcBef>
+              <a:spcAft>
+                <a:spcPts val="0"/>
+              </a:spcAft>
+            </a:pPr>
+            <a:r>
+              <a:rPr sz="1450" b="1">
+                <a:solidFill>
+                  <a:srgbClr val="FFFFFF"/>
+                </a:solidFill>
+                <a:latin typeface="Segoe UI Semibold"/>
+              </a:rPr>
+              <a:t>Fácil de usar</a:t>
+            </a:r>
+          </a:p>
+        </p:txBody>
+      </p:sp>
+      <p:sp>
+        <p:nvSpPr>
+          <p:cNvPr id="24" name="TextBox 23"/>
+          <p:cNvSpPr txBox="1"/>
+          <p:nvPr/>
+        </p:nvSpPr>
+        <p:spPr>
+          <a:xfrm>
+            <a:off x="7772400" y="5321808"/>
+            <a:ext cx="3474720" cy="457200"/>
+          </a:xfrm>
+          <a:prstGeom prst="rect">
+            <a:avLst/>
+          </a:prstGeom>
+          <a:noFill/>
+        </p:spPr>
+        <p:txBody>
+          <a:bodyPr wrap="square" anchor="t" lIns="0" rIns="0" tIns="0" bIns="0">
+            <a:spAutoFit/>
+          </a:bodyPr>
+          <a:lstStyle/>
+          <a:p>
+            <a:pPr algn="l">
+              <a:lnSpc>
+                <a:spcPct val="115000"/>
+              </a:lnSpc>
+              <a:spcBef>
+                <a:spcPts val="0"/>
+              </a:spcBef>
+              <a:spcAft>
+                <a:spcPts val="0"/>
+              </a:spcAft>
+            </a:pPr>
+            <a:r>
+              <a:rPr sz="1150" b="0">
+                <a:solidFill>
+                  <a:srgbClr val="B9CBDA"/>
+                </a:solidFill>
+                <a:latin typeface="Segoe UI"/>
+              </a:rPr>
+              <a:t>Pensada para el negocio, no solo para técnicos.</a:t>
+            </a:r>
+          </a:p>
+        </p:txBody>
+      </p:sp>
+      <p:sp>
+        <p:nvSpPr>
+          <p:cNvPr id="25" name="Rounded Rectangle 24"/>
+          <p:cNvSpPr/>
+          <p:nvPr/>
+        </p:nvSpPr>
+        <p:spPr>
+          <a:xfrm>
+            <a:off x="777240" y="4892040"/>
+            <a:ext cx="5669280" cy="960120"/>
           </a:xfrm>
           <a:prstGeom prst="roundRect">
             <a:avLst/>
@@ -7521,16 +8529,16 @@
       </p:sp>
       <p:sp>
         <p:nvSpPr>
-          <p:cNvPr id="7" name="Round Same Side Corner Rectangle 6"/>
+          <p:cNvPr id="26" name="Rectangle 25"/>
           <p:cNvSpPr/>
           <p:nvPr/>
         </p:nvSpPr>
         <p:spPr>
           <a:xfrm>
-            <a:off x="777240" y="2148840"/>
-            <a:ext cx="3502152" cy="128016"/>
-          </a:xfrm>
-          <a:prstGeom prst="round2SameRect">
+            <a:off x="777240" y="4892040"/>
+            <a:ext cx="109728" cy="960120"/>
+          </a:xfrm>
+          <a:prstGeom prst="rect">
             <a:avLst/>
           </a:prstGeom>
           <a:solidFill>
@@ -7565,1445 +8573,74 @@
       </p:sp>
       <p:sp>
         <p:nvSpPr>
-          <p:cNvPr id="8" name="Oval 7"/>
-          <p:cNvSpPr/>
-          <p:nvPr/>
-        </p:nvSpPr>
-        <p:spPr>
-          <a:xfrm>
-            <a:off x="1097280" y="2532888"/>
-            <a:ext cx="777240" cy="777240"/>
-          </a:xfrm>
-          <a:prstGeom prst="ellipse">
-            <a:avLst/>
-          </a:prstGeom>
-          <a:solidFill>
-            <a:srgbClr val="006EC7"/>
-          </a:solidFill>
-          <a:ln>
-            <a:noFill/>
-          </a:ln>
-          <a:effectLst/>
-        </p:spPr>
-        <p:style>
-          <a:lnRef idx="1">
-            <a:schemeClr val="accent1"/>
-          </a:lnRef>
-          <a:fillRef idx="3">
-            <a:schemeClr val="accent1"/>
-          </a:fillRef>
-          <a:effectRef idx="2">
-            <a:schemeClr val="accent1"/>
-          </a:effectRef>
-          <a:fontRef idx="minor">
-            <a:schemeClr val="lt1"/>
-          </a:fontRef>
-        </p:style>
-        <p:txBody>
-          <a:bodyPr rtlCol="0" anchor="ctr"/>
-          <a:lstStyle/>
-          <a:p>
-            <a:pPr algn="ctr"/>
-          </a:p>
-        </p:txBody>
-      </p:sp>
-      <p:sp>
-        <p:nvSpPr>
-          <p:cNvPr id="9" name="TextBox 8"/>
-          <p:cNvSpPr txBox="1"/>
-          <p:nvPr/>
-        </p:nvSpPr>
-        <p:spPr>
-          <a:xfrm>
-            <a:off x="1097280" y="2532888"/>
-            <a:ext cx="777240" cy="777240"/>
-          </a:xfrm>
-          <a:prstGeom prst="rect">
-            <a:avLst/>
-          </a:prstGeom>
-          <a:noFill/>
-        </p:spPr>
-        <p:txBody>
-          <a:bodyPr wrap="square" anchor="ctr" lIns="0" rIns="0" tIns="0" bIns="0">
-            <a:spAutoFit/>
-          </a:bodyPr>
-          <a:lstStyle/>
-          <a:p>
-            <a:pPr algn="ctr">
-              <a:lnSpc>
-                <a:spcPct val="100000"/>
-              </a:lnSpc>
-              <a:spcBef>
-                <a:spcPts val="0"/>
-              </a:spcBef>
-              <a:spcAft>
-                <a:spcPts val="600"/>
-              </a:spcAft>
-            </a:pPr>
-            <a:r>
-              <a:rPr sz="2000" b="1">
-                <a:solidFill>
-                  <a:srgbClr val="FFFFFF"/>
+          <p:cNvPr id="27" name="TextBox 26"/>
+          <p:cNvSpPr txBox="1"/>
+          <p:nvPr/>
+        </p:nvSpPr>
+        <p:spPr>
+          <a:xfrm>
+            <a:off x="1051560" y="5029200"/>
+            <a:ext cx="5212080" cy="731520"/>
+          </a:xfrm>
+          <a:prstGeom prst="rect">
+            <a:avLst/>
+          </a:prstGeom>
+          <a:noFill/>
+        </p:spPr>
+        <p:txBody>
+          <a:bodyPr wrap="square" anchor="t" lIns="0" rIns="0" tIns="0" bIns="0">
+            <a:spAutoFit/>
+          </a:bodyPr>
+          <a:lstStyle/>
+          <a:p>
+            <a:pPr algn="l">
+              <a:lnSpc>
+                <a:spcPct val="115000"/>
+              </a:lnSpc>
+              <a:spcBef>
+                <a:spcPts val="0"/>
+              </a:spcBef>
+              <a:spcAft>
+                <a:spcPts val="300"/>
+              </a:spcAft>
+            </a:pPr>
+            <a:r>
+              <a:rPr sz="1450" b="1">
+                <a:solidFill>
+                  <a:srgbClr val="006EC7"/>
                 </a:solidFill>
                 <a:latin typeface="Segoe UI Semibold"/>
               </a:rPr>
-              <a:t>BI</a:t>
-            </a:r>
-          </a:p>
-        </p:txBody>
-      </p:sp>
-      <p:sp>
-        <p:nvSpPr>
-          <p:cNvPr id="10" name="TextBox 9"/>
-          <p:cNvSpPr txBox="1"/>
-          <p:nvPr/>
-        </p:nvSpPr>
-        <p:spPr>
-          <a:xfrm>
-            <a:off x="1097280" y="3520440"/>
-            <a:ext cx="2862072" cy="502920"/>
-          </a:xfrm>
-          <a:prstGeom prst="rect">
-            <a:avLst/>
-          </a:prstGeom>
-          <a:noFill/>
-        </p:spPr>
-        <p:txBody>
-          <a:bodyPr wrap="square" anchor="t" lIns="0" rIns="0" tIns="0" bIns="0">
-            <a:spAutoFit/>
-          </a:bodyPr>
-          <a:lstStyle/>
+              <a:t>Una única versión de la verdad</a:t>
+            </a:r>
+          </a:p>
           <a:p>
             <a:pPr algn="l">
               <a:lnSpc>
-                <a:spcPct val="100000"/>
-              </a:lnSpc>
-              <a:spcBef>
-                <a:spcPts val="0"/>
-              </a:spcBef>
-              <a:spcAft>
-                <a:spcPts val="0"/>
-              </a:spcAft>
-            </a:pPr>
-            <a:r>
-              <a:rPr sz="2000" b="1">
-                <a:solidFill>
-                  <a:srgbClr val="132A3E"/>
-                </a:solidFill>
-                <a:latin typeface="Segoe UI Semibold"/>
-              </a:rPr>
-              <a:t>Business Intelligence</a:t>
-            </a:r>
-          </a:p>
-        </p:txBody>
-      </p:sp>
-      <p:sp>
-        <p:nvSpPr>
-          <p:cNvPr id="11" name="Oval 10"/>
-          <p:cNvSpPr/>
-          <p:nvPr/>
-        </p:nvSpPr>
-        <p:spPr>
-          <a:xfrm>
-            <a:off x="1143000" y="4187952"/>
-            <a:ext cx="118872" cy="118872"/>
-          </a:xfrm>
-          <a:prstGeom prst="ellipse">
-            <a:avLst/>
-          </a:prstGeom>
-          <a:solidFill>
-            <a:srgbClr val="006EC7"/>
-          </a:solidFill>
-          <a:ln>
-            <a:noFill/>
-          </a:ln>
-          <a:effectLst/>
-        </p:spPr>
-        <p:style>
-          <a:lnRef idx="1">
-            <a:schemeClr val="accent1"/>
-          </a:lnRef>
-          <a:fillRef idx="3">
-            <a:schemeClr val="accent1"/>
-          </a:fillRef>
-          <a:effectRef idx="2">
-            <a:schemeClr val="accent1"/>
-          </a:effectRef>
-          <a:fontRef idx="minor">
-            <a:schemeClr val="lt1"/>
-          </a:fontRef>
-        </p:style>
-        <p:txBody>
-          <a:bodyPr rtlCol="0" anchor="ctr"/>
-          <a:lstStyle/>
-          <a:p>
-            <a:pPr algn="ctr"/>
-          </a:p>
-        </p:txBody>
-      </p:sp>
-      <p:sp>
-        <p:nvSpPr>
-          <p:cNvPr id="12" name="TextBox 11"/>
-          <p:cNvSpPr txBox="1"/>
-          <p:nvPr/>
-        </p:nvSpPr>
-        <p:spPr>
-          <a:xfrm>
-            <a:off x="1399032" y="4114800"/>
-            <a:ext cx="2587752" cy="457200"/>
-          </a:xfrm>
-          <a:prstGeom prst="rect">
-            <a:avLst/>
-          </a:prstGeom>
-          <a:noFill/>
-        </p:spPr>
-        <p:txBody>
-          <a:bodyPr wrap="square" anchor="t" lIns="0" rIns="0" tIns="0" bIns="0">
-            <a:spAutoFit/>
-          </a:bodyPr>
-          <a:lstStyle/>
-          <a:p>
-            <a:pPr algn="l">
-              <a:lnSpc>
-                <a:spcPct val="110000"/>
-              </a:lnSpc>
-              <a:spcBef>
-                <a:spcPts val="0"/>
-              </a:spcBef>
-              <a:spcAft>
-                <a:spcPts val="0"/>
-              </a:spcAft>
-            </a:pPr>
-            <a:r>
-              <a:rPr sz="1250" b="0">
-                <a:solidFill>
-                  <a:srgbClr val="132A3E"/>
+                <a:spcPct val="115000"/>
+              </a:lnSpc>
+              <a:spcBef>
+                <a:spcPts val="0"/>
+              </a:spcBef>
+              <a:spcAft>
+                <a:spcPts val="300"/>
+              </a:spcAft>
+            </a:pPr>
+            <a:r>
+              <a:rPr sz="1200" b="0">
+                <a:solidFill>
+                  <a:srgbClr val="5B6B7B"/>
                 </a:solidFill>
                 <a:latin typeface="Segoe UI"/>
               </a:rPr>
-              <a:t>Cuadros de mando y reporting</a:t>
-            </a:r>
-          </a:p>
-        </p:txBody>
-      </p:sp>
-      <p:sp>
-        <p:nvSpPr>
-          <p:cNvPr id="13" name="Oval 12"/>
-          <p:cNvSpPr/>
-          <p:nvPr/>
-        </p:nvSpPr>
-        <p:spPr>
-          <a:xfrm>
-            <a:off x="1143000" y="4663440"/>
-            <a:ext cx="118872" cy="118872"/>
-          </a:xfrm>
-          <a:prstGeom prst="ellipse">
-            <a:avLst/>
-          </a:prstGeom>
-          <a:solidFill>
-            <a:srgbClr val="006EC7"/>
-          </a:solidFill>
-          <a:ln>
-            <a:noFill/>
-          </a:ln>
-          <a:effectLst/>
-        </p:spPr>
-        <p:style>
-          <a:lnRef idx="1">
-            <a:schemeClr val="accent1"/>
-          </a:lnRef>
-          <a:fillRef idx="3">
-            <a:schemeClr val="accent1"/>
-          </a:fillRef>
-          <a:effectRef idx="2">
-            <a:schemeClr val="accent1"/>
-          </a:effectRef>
-          <a:fontRef idx="minor">
-            <a:schemeClr val="lt1"/>
-          </a:fontRef>
-        </p:style>
-        <p:txBody>
-          <a:bodyPr rtlCol="0" anchor="ctr"/>
-          <a:lstStyle/>
-          <a:p>
-            <a:pPr algn="ctr"/>
-          </a:p>
-        </p:txBody>
-      </p:sp>
-      <p:sp>
-        <p:nvSpPr>
-          <p:cNvPr id="14" name="TextBox 13"/>
-          <p:cNvSpPr txBox="1"/>
-          <p:nvPr/>
-        </p:nvSpPr>
-        <p:spPr>
-          <a:xfrm>
-            <a:off x="1399032" y="4590288"/>
-            <a:ext cx="2587752" cy="457200"/>
-          </a:xfrm>
-          <a:prstGeom prst="rect">
-            <a:avLst/>
-          </a:prstGeom>
-          <a:noFill/>
-        </p:spPr>
-        <p:txBody>
-          <a:bodyPr wrap="square" anchor="t" lIns="0" rIns="0" tIns="0" bIns="0">
-            <a:spAutoFit/>
-          </a:bodyPr>
-          <a:lstStyle/>
-          <a:p>
-            <a:pPr algn="l">
-              <a:lnSpc>
-                <a:spcPct val="110000"/>
-              </a:lnSpc>
-              <a:spcBef>
-                <a:spcPts val="0"/>
-              </a:spcBef>
-              <a:spcAft>
-                <a:spcPts val="0"/>
-              </a:spcAft>
-            </a:pPr>
-            <a:r>
-              <a:rPr sz="1250" b="0">
-                <a:solidFill>
-                  <a:srgbClr val="132A3E"/>
-                </a:solidFill>
-                <a:latin typeface="Segoe UI"/>
-              </a:rPr>
-              <a:t>Exploración visual de datos</a:t>
-            </a:r>
-          </a:p>
-        </p:txBody>
-      </p:sp>
-      <p:sp>
-        <p:nvSpPr>
-          <p:cNvPr id="15" name="Oval 14"/>
-          <p:cNvSpPr/>
-          <p:nvPr/>
-        </p:nvSpPr>
-        <p:spPr>
-          <a:xfrm>
-            <a:off x="1143000" y="5138928"/>
-            <a:ext cx="118872" cy="118872"/>
-          </a:xfrm>
-          <a:prstGeom prst="ellipse">
-            <a:avLst/>
-          </a:prstGeom>
-          <a:solidFill>
-            <a:srgbClr val="006EC7"/>
-          </a:solidFill>
-          <a:ln>
-            <a:noFill/>
-          </a:ln>
-          <a:effectLst/>
-        </p:spPr>
-        <p:style>
-          <a:lnRef idx="1">
-            <a:schemeClr val="accent1"/>
-          </a:lnRef>
-          <a:fillRef idx="3">
-            <a:schemeClr val="accent1"/>
-          </a:fillRef>
-          <a:effectRef idx="2">
-            <a:schemeClr val="accent1"/>
-          </a:effectRef>
-          <a:fontRef idx="minor">
-            <a:schemeClr val="lt1"/>
-          </a:fontRef>
-        </p:style>
-        <p:txBody>
-          <a:bodyPr rtlCol="0" anchor="ctr"/>
-          <a:lstStyle/>
-          <a:p>
-            <a:pPr algn="ctr"/>
-          </a:p>
-        </p:txBody>
-      </p:sp>
-      <p:sp>
-        <p:nvSpPr>
-          <p:cNvPr id="16" name="TextBox 15"/>
-          <p:cNvSpPr txBox="1"/>
-          <p:nvPr/>
-        </p:nvSpPr>
-        <p:spPr>
-          <a:xfrm>
-            <a:off x="1399032" y="5065776"/>
-            <a:ext cx="2587752" cy="457200"/>
-          </a:xfrm>
-          <a:prstGeom prst="rect">
-            <a:avLst/>
-          </a:prstGeom>
-          <a:noFill/>
-        </p:spPr>
-        <p:txBody>
-          <a:bodyPr wrap="square" anchor="t" lIns="0" rIns="0" tIns="0" bIns="0">
-            <a:spAutoFit/>
-          </a:bodyPr>
-          <a:lstStyle/>
-          <a:p>
-            <a:pPr algn="l">
-              <a:lnSpc>
-                <a:spcPct val="110000"/>
-              </a:lnSpc>
-              <a:spcBef>
-                <a:spcPts val="0"/>
-              </a:spcBef>
-              <a:spcAft>
-                <a:spcPts val="0"/>
-              </a:spcAft>
-            </a:pPr>
-            <a:r>
-              <a:rPr sz="1250" b="0">
-                <a:solidFill>
-                  <a:srgbClr val="132A3E"/>
-                </a:solidFill>
-                <a:latin typeface="Segoe UI"/>
-              </a:rPr>
-              <a:t>Historias interactivas</a:t>
-            </a:r>
-          </a:p>
-        </p:txBody>
-      </p:sp>
-      <p:sp>
-        <p:nvSpPr>
-          <p:cNvPr id="17" name="Rounded Rectangle 16"/>
-          <p:cNvSpPr/>
-          <p:nvPr/>
-        </p:nvSpPr>
-        <p:spPr>
-          <a:xfrm>
-            <a:off x="4507992" y="1965960"/>
-            <a:ext cx="3502152" cy="3977639"/>
-          </a:xfrm>
-          <a:prstGeom prst="roundRect">
-            <a:avLst/>
-          </a:prstGeom>
-          <a:solidFill>
-            <a:srgbClr val="0A2A43"/>
-          </a:solidFill>
-          <a:ln>
-            <a:noFill/>
-          </a:ln>
-          <a:effectLst/>
-          <a:effectLst>
-            <a:outerShdw blurRad="90000" dist="40000" dir="5400000" rotWithShape="0">
-              <a:srgbClr val="0A2A43">
-                <a:alpha val="22000"/>
-              </a:srgbClr>
-            </a:outerShdw>
-          </a:effectLst>
-        </p:spPr>
-        <p:style>
-          <a:lnRef idx="1">
-            <a:schemeClr val="accent1"/>
-          </a:lnRef>
-          <a:fillRef idx="3">
-            <a:schemeClr val="accent1"/>
-          </a:fillRef>
-          <a:effectRef idx="2">
-            <a:schemeClr val="accent1"/>
-          </a:effectRef>
-          <a:fontRef idx="minor">
-            <a:schemeClr val="lt1"/>
-          </a:fontRef>
-        </p:style>
-        <p:txBody>
-          <a:bodyPr rtlCol="0" anchor="ctr"/>
-          <a:lstStyle/>
-          <a:p>
-            <a:pPr algn="ctr"/>
-          </a:p>
-        </p:txBody>
-      </p:sp>
-      <p:sp>
-        <p:nvSpPr>
-          <p:cNvPr id="18" name="Round Same Side Corner Rectangle 17"/>
-          <p:cNvSpPr/>
-          <p:nvPr/>
-        </p:nvSpPr>
-        <p:spPr>
-          <a:xfrm>
-            <a:off x="4507992" y="1965960"/>
-            <a:ext cx="3502152" cy="128016"/>
-          </a:xfrm>
-          <a:prstGeom prst="round2SameRect">
-            <a:avLst/>
-          </a:prstGeom>
-          <a:solidFill>
-            <a:srgbClr val="0FA9B0"/>
-          </a:solidFill>
-          <a:ln>
-            <a:noFill/>
-          </a:ln>
-          <a:effectLst/>
-        </p:spPr>
-        <p:style>
-          <a:lnRef idx="1">
-            <a:schemeClr val="accent1"/>
-          </a:lnRef>
-          <a:fillRef idx="3">
-            <a:schemeClr val="accent1"/>
-          </a:fillRef>
-          <a:effectRef idx="2">
-            <a:schemeClr val="accent1"/>
-          </a:effectRef>
-          <a:fontRef idx="minor">
-            <a:schemeClr val="lt1"/>
-          </a:fontRef>
-        </p:style>
-        <p:txBody>
-          <a:bodyPr rtlCol="0" anchor="ctr"/>
-          <a:lstStyle/>
-          <a:p>
-            <a:pPr algn="ctr"/>
-          </a:p>
-        </p:txBody>
-      </p:sp>
-      <p:sp>
-        <p:nvSpPr>
-          <p:cNvPr id="19" name="Oval 18"/>
-          <p:cNvSpPr/>
-          <p:nvPr/>
-        </p:nvSpPr>
-        <p:spPr>
-          <a:xfrm>
-            <a:off x="4828032" y="2350008"/>
-            <a:ext cx="777240" cy="777240"/>
-          </a:xfrm>
-          <a:prstGeom prst="ellipse">
-            <a:avLst/>
-          </a:prstGeom>
-          <a:solidFill>
-            <a:srgbClr val="0FA9B0"/>
-          </a:solidFill>
-          <a:ln>
-            <a:noFill/>
-          </a:ln>
-          <a:effectLst/>
-        </p:spPr>
-        <p:style>
-          <a:lnRef idx="1">
-            <a:schemeClr val="accent1"/>
-          </a:lnRef>
-          <a:fillRef idx="3">
-            <a:schemeClr val="accent1"/>
-          </a:fillRef>
-          <a:effectRef idx="2">
-            <a:schemeClr val="accent1"/>
-          </a:effectRef>
-          <a:fontRef idx="minor">
-            <a:schemeClr val="lt1"/>
-          </a:fontRef>
-        </p:style>
-        <p:txBody>
-          <a:bodyPr rtlCol="0" anchor="ctr"/>
-          <a:lstStyle/>
-          <a:p>
-            <a:pPr algn="ctr"/>
-          </a:p>
-        </p:txBody>
-      </p:sp>
-      <p:sp>
-        <p:nvSpPr>
-          <p:cNvPr id="20" name="TextBox 19"/>
-          <p:cNvSpPr txBox="1"/>
-          <p:nvPr/>
-        </p:nvSpPr>
-        <p:spPr>
-          <a:xfrm>
-            <a:off x="4828032" y="2350008"/>
-            <a:ext cx="777240" cy="777240"/>
-          </a:xfrm>
-          <a:prstGeom prst="rect">
-            <a:avLst/>
-          </a:prstGeom>
-          <a:noFill/>
-        </p:spPr>
-        <p:txBody>
-          <a:bodyPr wrap="square" anchor="ctr" lIns="0" rIns="0" tIns="0" bIns="0">
-            <a:spAutoFit/>
-          </a:bodyPr>
-          <a:lstStyle/>
-          <a:p>
-            <a:pPr algn="ctr">
-              <a:lnSpc>
-                <a:spcPct val="100000"/>
-              </a:lnSpc>
-              <a:spcBef>
-                <a:spcPts val="0"/>
-              </a:spcBef>
-              <a:spcAft>
-                <a:spcPts val="600"/>
-              </a:spcAft>
-            </a:pPr>
-            <a:r>
-              <a:rPr sz="2000" b="1">
-                <a:solidFill>
-                  <a:srgbClr val="FFFFFF"/>
-                </a:solidFill>
-                <a:latin typeface="Segoe UI Semibold"/>
-              </a:rPr>
-              <a:t>PL</a:t>
-            </a:r>
-          </a:p>
-        </p:txBody>
-      </p:sp>
-      <p:sp>
-        <p:nvSpPr>
-          <p:cNvPr id="21" name="TextBox 20"/>
-          <p:cNvSpPr txBox="1"/>
-          <p:nvPr/>
-        </p:nvSpPr>
-        <p:spPr>
-          <a:xfrm>
-            <a:off x="4828032" y="3337560"/>
-            <a:ext cx="2862072" cy="502920"/>
-          </a:xfrm>
-          <a:prstGeom prst="rect">
-            <a:avLst/>
-          </a:prstGeom>
-          <a:noFill/>
-        </p:spPr>
-        <p:txBody>
-          <a:bodyPr wrap="square" anchor="t" lIns="0" rIns="0" tIns="0" bIns="0">
-            <a:spAutoFit/>
-          </a:bodyPr>
-          <a:lstStyle/>
-          <a:p>
-            <a:pPr algn="l">
-              <a:lnSpc>
-                <a:spcPct val="100000"/>
-              </a:lnSpc>
-              <a:spcBef>
-                <a:spcPts val="0"/>
-              </a:spcBef>
-              <a:spcAft>
-                <a:spcPts val="0"/>
-              </a:spcAft>
-            </a:pPr>
-            <a:r>
-              <a:rPr sz="2000" b="1">
-                <a:solidFill>
-                  <a:srgbClr val="FFFFFF"/>
-                </a:solidFill>
-                <a:latin typeface="Segoe UI Semibold"/>
-              </a:rPr>
-              <a:t>Planning</a:t>
-            </a:r>
-          </a:p>
-        </p:txBody>
-      </p:sp>
-      <p:sp>
-        <p:nvSpPr>
-          <p:cNvPr id="22" name="TextBox 21"/>
-          <p:cNvSpPr txBox="1"/>
-          <p:nvPr/>
-        </p:nvSpPr>
-        <p:spPr>
-          <a:xfrm>
-            <a:off x="4828032" y="3813048"/>
-            <a:ext cx="2862072" cy="320040"/>
-          </a:xfrm>
-          <a:prstGeom prst="rect">
-            <a:avLst/>
-          </a:prstGeom>
-          <a:noFill/>
-        </p:spPr>
-        <p:txBody>
-          <a:bodyPr wrap="square" anchor="t" lIns="0" rIns="0" tIns="0" bIns="0">
-            <a:spAutoFit/>
-          </a:bodyPr>
-          <a:lstStyle/>
-          <a:p>
-            <a:pPr algn="l">
-              <a:lnSpc>
-                <a:spcPct val="100000"/>
-              </a:lnSpc>
-              <a:spcBef>
-                <a:spcPts val="0"/>
-              </a:spcBef>
-              <a:spcAft>
-                <a:spcPts val="0"/>
-              </a:spcAft>
-            </a:pPr>
-            <a:r>
-              <a:rPr sz="1100" b="1">
-                <a:solidFill>
-                  <a:srgbClr val="F5B241"/>
-                </a:solidFill>
-                <a:latin typeface="Segoe UI Semibold"/>
-              </a:rPr>
-              <a:t>● NUESTRO FOCO</a:t>
-            </a:r>
-          </a:p>
-        </p:txBody>
-      </p:sp>
-      <p:sp>
-        <p:nvSpPr>
-          <p:cNvPr id="23" name="Oval 22"/>
-          <p:cNvSpPr/>
-          <p:nvPr/>
-        </p:nvSpPr>
-        <p:spPr>
-          <a:xfrm>
-            <a:off x="4873752" y="4325112"/>
-            <a:ext cx="118872" cy="118872"/>
-          </a:xfrm>
-          <a:prstGeom prst="ellipse">
-            <a:avLst/>
-          </a:prstGeom>
-          <a:solidFill>
-            <a:srgbClr val="0FA9B0"/>
-          </a:solidFill>
-          <a:ln>
-            <a:noFill/>
-          </a:ln>
-          <a:effectLst/>
-        </p:spPr>
-        <p:style>
-          <a:lnRef idx="1">
-            <a:schemeClr val="accent1"/>
-          </a:lnRef>
-          <a:fillRef idx="3">
-            <a:schemeClr val="accent1"/>
-          </a:fillRef>
-          <a:effectRef idx="2">
-            <a:schemeClr val="accent1"/>
-          </a:effectRef>
-          <a:fontRef idx="minor">
-            <a:schemeClr val="lt1"/>
-          </a:fontRef>
-        </p:style>
-        <p:txBody>
-          <a:bodyPr rtlCol="0" anchor="ctr"/>
-          <a:lstStyle/>
-          <a:p>
-            <a:pPr algn="ctr"/>
-          </a:p>
-        </p:txBody>
-      </p:sp>
-      <p:sp>
-        <p:nvSpPr>
-          <p:cNvPr id="24" name="TextBox 23"/>
-          <p:cNvSpPr txBox="1"/>
-          <p:nvPr/>
-        </p:nvSpPr>
-        <p:spPr>
-          <a:xfrm>
-            <a:off x="5129784" y="4251960"/>
-            <a:ext cx="2587752" cy="457200"/>
-          </a:xfrm>
-          <a:prstGeom prst="rect">
-            <a:avLst/>
-          </a:prstGeom>
-          <a:noFill/>
-        </p:spPr>
-        <p:txBody>
-          <a:bodyPr wrap="square" anchor="t" lIns="0" rIns="0" tIns="0" bIns="0">
-            <a:spAutoFit/>
-          </a:bodyPr>
-          <a:lstStyle/>
-          <a:p>
-            <a:pPr algn="l">
-              <a:lnSpc>
-                <a:spcPct val="110000"/>
-              </a:lnSpc>
-              <a:spcBef>
-                <a:spcPts val="0"/>
-              </a:spcBef>
-              <a:spcAft>
-                <a:spcPts val="0"/>
-              </a:spcAft>
-            </a:pPr>
-            <a:r>
-              <a:rPr sz="1250" b="0">
-                <a:solidFill>
-                  <a:srgbClr val="DDE7F0"/>
-                </a:solidFill>
-                <a:latin typeface="Segoe UI"/>
-              </a:rPr>
-              <a:t>Presupuestos y forecasts</a:t>
-            </a:r>
-          </a:p>
-        </p:txBody>
-      </p:sp>
-      <p:sp>
-        <p:nvSpPr>
-          <p:cNvPr id="25" name="Oval 24"/>
-          <p:cNvSpPr/>
-          <p:nvPr/>
-        </p:nvSpPr>
-        <p:spPr>
-          <a:xfrm>
-            <a:off x="4873752" y="4800600"/>
-            <a:ext cx="118872" cy="118872"/>
-          </a:xfrm>
-          <a:prstGeom prst="ellipse">
-            <a:avLst/>
-          </a:prstGeom>
-          <a:solidFill>
-            <a:srgbClr val="0FA9B0"/>
-          </a:solidFill>
-          <a:ln>
-            <a:noFill/>
-          </a:ln>
-          <a:effectLst/>
-        </p:spPr>
-        <p:style>
-          <a:lnRef idx="1">
-            <a:schemeClr val="accent1"/>
-          </a:lnRef>
-          <a:fillRef idx="3">
-            <a:schemeClr val="accent1"/>
-          </a:fillRef>
-          <a:effectRef idx="2">
-            <a:schemeClr val="accent1"/>
-          </a:effectRef>
-          <a:fontRef idx="minor">
-            <a:schemeClr val="lt1"/>
-          </a:fontRef>
-        </p:style>
-        <p:txBody>
-          <a:bodyPr rtlCol="0" anchor="ctr"/>
-          <a:lstStyle/>
-          <a:p>
-            <a:pPr algn="ctr"/>
-          </a:p>
-        </p:txBody>
-      </p:sp>
-      <p:sp>
-        <p:nvSpPr>
-          <p:cNvPr id="26" name="TextBox 25"/>
-          <p:cNvSpPr txBox="1"/>
-          <p:nvPr/>
-        </p:nvSpPr>
-        <p:spPr>
-          <a:xfrm>
-            <a:off x="5129784" y="4727448"/>
-            <a:ext cx="2587752" cy="457200"/>
-          </a:xfrm>
-          <a:prstGeom prst="rect">
-            <a:avLst/>
-          </a:prstGeom>
-          <a:noFill/>
-        </p:spPr>
-        <p:txBody>
-          <a:bodyPr wrap="square" anchor="t" lIns="0" rIns="0" tIns="0" bIns="0">
-            <a:spAutoFit/>
-          </a:bodyPr>
-          <a:lstStyle/>
-          <a:p>
-            <a:pPr algn="l">
-              <a:lnSpc>
-                <a:spcPct val="110000"/>
-              </a:lnSpc>
-              <a:spcBef>
-                <a:spcPts val="0"/>
-              </a:spcBef>
-              <a:spcAft>
-                <a:spcPts val="0"/>
-              </a:spcAft>
-            </a:pPr>
-            <a:r>
-              <a:rPr sz="1250" b="0">
-                <a:solidFill>
-                  <a:srgbClr val="DDE7F0"/>
-                </a:solidFill>
-                <a:latin typeface="Segoe UI"/>
-              </a:rPr>
-              <a:t>Escenarios y simulaciones</a:t>
-            </a:r>
-          </a:p>
-        </p:txBody>
-      </p:sp>
-      <p:sp>
-        <p:nvSpPr>
-          <p:cNvPr id="27" name="Oval 26"/>
-          <p:cNvSpPr/>
-          <p:nvPr/>
-        </p:nvSpPr>
-        <p:spPr>
-          <a:xfrm>
-            <a:off x="4873752" y="5276088"/>
-            <a:ext cx="118872" cy="118872"/>
-          </a:xfrm>
-          <a:prstGeom prst="ellipse">
-            <a:avLst/>
-          </a:prstGeom>
-          <a:solidFill>
-            <a:srgbClr val="0FA9B0"/>
-          </a:solidFill>
-          <a:ln>
-            <a:noFill/>
-          </a:ln>
-          <a:effectLst/>
-        </p:spPr>
-        <p:style>
-          <a:lnRef idx="1">
-            <a:schemeClr val="accent1"/>
-          </a:lnRef>
-          <a:fillRef idx="3">
-            <a:schemeClr val="accent1"/>
-          </a:fillRef>
-          <a:effectRef idx="2">
-            <a:schemeClr val="accent1"/>
-          </a:effectRef>
-          <a:fontRef idx="minor">
-            <a:schemeClr val="lt1"/>
-          </a:fontRef>
-        </p:style>
-        <p:txBody>
-          <a:bodyPr rtlCol="0" anchor="ctr"/>
-          <a:lstStyle/>
-          <a:p>
-            <a:pPr algn="ctr"/>
+              <a:t>Se acabó el “¿con qué número nos quedamos?”.</a:t>
+            </a:r>
           </a:p>
         </p:txBody>
       </p:sp>
       <p:sp>
         <p:nvSpPr>
           <p:cNvPr id="28" name="TextBox 27"/>
-          <p:cNvSpPr txBox="1"/>
-          <p:nvPr/>
-        </p:nvSpPr>
-        <p:spPr>
-          <a:xfrm>
-            <a:off x="5129784" y="5202936"/>
-            <a:ext cx="2587752" cy="457200"/>
-          </a:xfrm>
-          <a:prstGeom prst="rect">
-            <a:avLst/>
-          </a:prstGeom>
-          <a:noFill/>
-        </p:spPr>
-        <p:txBody>
-          <a:bodyPr wrap="square" anchor="t" lIns="0" rIns="0" tIns="0" bIns="0">
-            <a:spAutoFit/>
-          </a:bodyPr>
-          <a:lstStyle/>
-          <a:p>
-            <a:pPr algn="l">
-              <a:lnSpc>
-                <a:spcPct val="110000"/>
-              </a:lnSpc>
-              <a:spcBef>
-                <a:spcPts val="0"/>
-              </a:spcBef>
-              <a:spcAft>
-                <a:spcPts val="0"/>
-              </a:spcAft>
-            </a:pPr>
-            <a:r>
-              <a:rPr sz="1250" b="0">
-                <a:solidFill>
-                  <a:srgbClr val="DDE7F0"/>
-                </a:solidFill>
-                <a:latin typeface="Segoe UI"/>
-              </a:rPr>
-              <a:t>Planificación colaborativa</a:t>
-            </a:r>
-          </a:p>
-        </p:txBody>
-      </p:sp>
-      <p:sp>
-        <p:nvSpPr>
-          <p:cNvPr id="29" name="Rounded Rectangle 28"/>
-          <p:cNvSpPr/>
-          <p:nvPr/>
-        </p:nvSpPr>
-        <p:spPr>
-          <a:xfrm>
-            <a:off x="8238744" y="2148840"/>
-            <a:ext cx="3502152" cy="3703320"/>
-          </a:xfrm>
-          <a:prstGeom prst="roundRect">
-            <a:avLst/>
-          </a:prstGeom>
-          <a:solidFill>
-            <a:srgbClr val="FFFFFF"/>
-          </a:solidFill>
-          <a:ln>
-            <a:noFill/>
-          </a:ln>
-          <a:effectLst/>
-          <a:effectLst>
-            <a:outerShdw blurRad="90000" dist="40000" dir="5400000" rotWithShape="0">
-              <a:srgbClr val="0A2A43">
-                <a:alpha val="22000"/>
-              </a:srgbClr>
-            </a:outerShdw>
-          </a:effectLst>
-        </p:spPr>
-        <p:style>
-          <a:lnRef idx="1">
-            <a:schemeClr val="accent1"/>
-          </a:lnRef>
-          <a:fillRef idx="3">
-            <a:schemeClr val="accent1"/>
-          </a:fillRef>
-          <a:effectRef idx="2">
-            <a:schemeClr val="accent1"/>
-          </a:effectRef>
-          <a:fontRef idx="minor">
-            <a:schemeClr val="lt1"/>
-          </a:fontRef>
-        </p:style>
-        <p:txBody>
-          <a:bodyPr rtlCol="0" anchor="ctr"/>
-          <a:lstStyle/>
-          <a:p>
-            <a:pPr algn="ctr"/>
-          </a:p>
-        </p:txBody>
-      </p:sp>
-      <p:sp>
-        <p:nvSpPr>
-          <p:cNvPr id="30" name="Round Same Side Corner Rectangle 29"/>
-          <p:cNvSpPr/>
-          <p:nvPr/>
-        </p:nvSpPr>
-        <p:spPr>
-          <a:xfrm>
-            <a:off x="8238744" y="2148840"/>
-            <a:ext cx="3502152" cy="128016"/>
-          </a:xfrm>
-          <a:prstGeom prst="round2SameRect">
-            <a:avLst/>
-          </a:prstGeom>
-          <a:solidFill>
-            <a:srgbClr val="F5B241"/>
-          </a:solidFill>
-          <a:ln>
-            <a:noFill/>
-          </a:ln>
-          <a:effectLst/>
-        </p:spPr>
-        <p:style>
-          <a:lnRef idx="1">
-            <a:schemeClr val="accent1"/>
-          </a:lnRef>
-          <a:fillRef idx="3">
-            <a:schemeClr val="accent1"/>
-          </a:fillRef>
-          <a:effectRef idx="2">
-            <a:schemeClr val="accent1"/>
-          </a:effectRef>
-          <a:fontRef idx="minor">
-            <a:schemeClr val="lt1"/>
-          </a:fontRef>
-        </p:style>
-        <p:txBody>
-          <a:bodyPr rtlCol="0" anchor="ctr"/>
-          <a:lstStyle/>
-          <a:p>
-            <a:pPr algn="ctr"/>
-          </a:p>
-        </p:txBody>
-      </p:sp>
-      <p:sp>
-        <p:nvSpPr>
-          <p:cNvPr id="31" name="Oval 30"/>
-          <p:cNvSpPr/>
-          <p:nvPr/>
-        </p:nvSpPr>
-        <p:spPr>
-          <a:xfrm>
-            <a:off x="8558784" y="2532888"/>
-            <a:ext cx="777240" cy="777240"/>
-          </a:xfrm>
-          <a:prstGeom prst="ellipse">
-            <a:avLst/>
-          </a:prstGeom>
-          <a:solidFill>
-            <a:srgbClr val="F5B241"/>
-          </a:solidFill>
-          <a:ln>
-            <a:noFill/>
-          </a:ln>
-          <a:effectLst/>
-        </p:spPr>
-        <p:style>
-          <a:lnRef idx="1">
-            <a:schemeClr val="accent1"/>
-          </a:lnRef>
-          <a:fillRef idx="3">
-            <a:schemeClr val="accent1"/>
-          </a:fillRef>
-          <a:effectRef idx="2">
-            <a:schemeClr val="accent1"/>
-          </a:effectRef>
-          <a:fontRef idx="minor">
-            <a:schemeClr val="lt1"/>
-          </a:fontRef>
-        </p:style>
-        <p:txBody>
-          <a:bodyPr rtlCol="0" anchor="ctr"/>
-          <a:lstStyle/>
-          <a:p>
-            <a:pPr algn="ctr"/>
-          </a:p>
-        </p:txBody>
-      </p:sp>
-      <p:sp>
-        <p:nvSpPr>
-          <p:cNvPr id="32" name="TextBox 31"/>
-          <p:cNvSpPr txBox="1"/>
-          <p:nvPr/>
-        </p:nvSpPr>
-        <p:spPr>
-          <a:xfrm>
-            <a:off x="8558784" y="2532888"/>
-            <a:ext cx="777240" cy="777240"/>
-          </a:xfrm>
-          <a:prstGeom prst="rect">
-            <a:avLst/>
-          </a:prstGeom>
-          <a:noFill/>
-        </p:spPr>
-        <p:txBody>
-          <a:bodyPr wrap="square" anchor="ctr" lIns="0" rIns="0" tIns="0" bIns="0">
-            <a:spAutoFit/>
-          </a:bodyPr>
-          <a:lstStyle/>
-          <a:p>
-            <a:pPr algn="ctr">
-              <a:lnSpc>
-                <a:spcPct val="100000"/>
-              </a:lnSpc>
-              <a:spcBef>
-                <a:spcPts val="0"/>
-              </a:spcBef>
-              <a:spcAft>
-                <a:spcPts val="600"/>
-              </a:spcAft>
-            </a:pPr>
-            <a:r>
-              <a:rPr sz="2000" b="1">
-                <a:solidFill>
-                  <a:srgbClr val="FFFFFF"/>
-                </a:solidFill>
-                <a:latin typeface="Segoe UI Semibold"/>
-              </a:rPr>
-              <a:t>AI</a:t>
-            </a:r>
-          </a:p>
-        </p:txBody>
-      </p:sp>
-      <p:sp>
-        <p:nvSpPr>
-          <p:cNvPr id="33" name="TextBox 32"/>
-          <p:cNvSpPr txBox="1"/>
-          <p:nvPr/>
-        </p:nvSpPr>
-        <p:spPr>
-          <a:xfrm>
-            <a:off x="8558784" y="3520440"/>
-            <a:ext cx="2862072" cy="502920"/>
-          </a:xfrm>
-          <a:prstGeom prst="rect">
-            <a:avLst/>
-          </a:prstGeom>
-          <a:noFill/>
-        </p:spPr>
-        <p:txBody>
-          <a:bodyPr wrap="square" anchor="t" lIns="0" rIns="0" tIns="0" bIns="0">
-            <a:spAutoFit/>
-          </a:bodyPr>
-          <a:lstStyle/>
-          <a:p>
-            <a:pPr algn="l">
-              <a:lnSpc>
-                <a:spcPct val="100000"/>
-              </a:lnSpc>
-              <a:spcBef>
-                <a:spcPts val="0"/>
-              </a:spcBef>
-              <a:spcAft>
-                <a:spcPts val="0"/>
-              </a:spcAft>
-            </a:pPr>
-            <a:r>
-              <a:rPr sz="2000" b="1">
-                <a:solidFill>
-                  <a:srgbClr val="132A3E"/>
-                </a:solidFill>
-                <a:latin typeface="Segoe UI Semibold"/>
-              </a:rPr>
-              <a:t>Predictive &amp; IA</a:t>
-            </a:r>
-          </a:p>
-        </p:txBody>
-      </p:sp>
-      <p:sp>
-        <p:nvSpPr>
-          <p:cNvPr id="34" name="Oval 33"/>
-          <p:cNvSpPr/>
-          <p:nvPr/>
-        </p:nvSpPr>
-        <p:spPr>
-          <a:xfrm>
-            <a:off x="8604504" y="4187952"/>
-            <a:ext cx="118872" cy="118872"/>
-          </a:xfrm>
-          <a:prstGeom prst="ellipse">
-            <a:avLst/>
-          </a:prstGeom>
-          <a:solidFill>
-            <a:srgbClr val="F5B241"/>
-          </a:solidFill>
-          <a:ln>
-            <a:noFill/>
-          </a:ln>
-          <a:effectLst/>
-        </p:spPr>
-        <p:style>
-          <a:lnRef idx="1">
-            <a:schemeClr val="accent1"/>
-          </a:lnRef>
-          <a:fillRef idx="3">
-            <a:schemeClr val="accent1"/>
-          </a:fillRef>
-          <a:effectRef idx="2">
-            <a:schemeClr val="accent1"/>
-          </a:effectRef>
-          <a:fontRef idx="minor">
-            <a:schemeClr val="lt1"/>
-          </a:fontRef>
-        </p:style>
-        <p:txBody>
-          <a:bodyPr rtlCol="0" anchor="ctr"/>
-          <a:lstStyle/>
-          <a:p>
-            <a:pPr algn="ctr"/>
-          </a:p>
-        </p:txBody>
-      </p:sp>
-      <p:sp>
-        <p:nvSpPr>
-          <p:cNvPr id="35" name="TextBox 34"/>
-          <p:cNvSpPr txBox="1"/>
-          <p:nvPr/>
-        </p:nvSpPr>
-        <p:spPr>
-          <a:xfrm>
-            <a:off x="8860536" y="4114800"/>
-            <a:ext cx="2587752" cy="457200"/>
-          </a:xfrm>
-          <a:prstGeom prst="rect">
-            <a:avLst/>
-          </a:prstGeom>
-          <a:noFill/>
-        </p:spPr>
-        <p:txBody>
-          <a:bodyPr wrap="square" anchor="t" lIns="0" rIns="0" tIns="0" bIns="0">
-            <a:spAutoFit/>
-          </a:bodyPr>
-          <a:lstStyle/>
-          <a:p>
-            <a:pPr algn="l">
-              <a:lnSpc>
-                <a:spcPct val="110000"/>
-              </a:lnSpc>
-              <a:spcBef>
-                <a:spcPts val="0"/>
-              </a:spcBef>
-              <a:spcAft>
-                <a:spcPts val="0"/>
-              </a:spcAft>
-            </a:pPr>
-            <a:r>
-              <a:rPr sz="1250" b="0">
-                <a:solidFill>
-                  <a:srgbClr val="132A3E"/>
-                </a:solidFill>
-                <a:latin typeface="Segoe UI"/>
-              </a:rPr>
-              <a:t>Smart Predict y forecast</a:t>
-            </a:r>
-          </a:p>
-        </p:txBody>
-      </p:sp>
-      <p:sp>
-        <p:nvSpPr>
-          <p:cNvPr id="36" name="Oval 35"/>
-          <p:cNvSpPr/>
-          <p:nvPr/>
-        </p:nvSpPr>
-        <p:spPr>
-          <a:xfrm>
-            <a:off x="8604504" y="4663440"/>
-            <a:ext cx="118872" cy="118872"/>
-          </a:xfrm>
-          <a:prstGeom prst="ellipse">
-            <a:avLst/>
-          </a:prstGeom>
-          <a:solidFill>
-            <a:srgbClr val="F5B241"/>
-          </a:solidFill>
-          <a:ln>
-            <a:noFill/>
-          </a:ln>
-          <a:effectLst/>
-        </p:spPr>
-        <p:style>
-          <a:lnRef idx="1">
-            <a:schemeClr val="accent1"/>
-          </a:lnRef>
-          <a:fillRef idx="3">
-            <a:schemeClr val="accent1"/>
-          </a:fillRef>
-          <a:effectRef idx="2">
-            <a:schemeClr val="accent1"/>
-          </a:effectRef>
-          <a:fontRef idx="minor">
-            <a:schemeClr val="lt1"/>
-          </a:fontRef>
-        </p:style>
-        <p:txBody>
-          <a:bodyPr rtlCol="0" anchor="ctr"/>
-          <a:lstStyle/>
-          <a:p>
-            <a:pPr algn="ctr"/>
-          </a:p>
-        </p:txBody>
-      </p:sp>
-      <p:sp>
-        <p:nvSpPr>
-          <p:cNvPr id="37" name="TextBox 36"/>
-          <p:cNvSpPr txBox="1"/>
-          <p:nvPr/>
-        </p:nvSpPr>
-        <p:spPr>
-          <a:xfrm>
-            <a:off x="8860536" y="4590288"/>
-            <a:ext cx="2587752" cy="457200"/>
-          </a:xfrm>
-          <a:prstGeom prst="rect">
-            <a:avLst/>
-          </a:prstGeom>
-          <a:noFill/>
-        </p:spPr>
-        <p:txBody>
-          <a:bodyPr wrap="square" anchor="t" lIns="0" rIns="0" tIns="0" bIns="0">
-            <a:spAutoFit/>
-          </a:bodyPr>
-          <a:lstStyle/>
-          <a:p>
-            <a:pPr algn="l">
-              <a:lnSpc>
-                <a:spcPct val="110000"/>
-              </a:lnSpc>
-              <a:spcBef>
-                <a:spcPts val="0"/>
-              </a:spcBef>
-              <a:spcAft>
-                <a:spcPts val="0"/>
-              </a:spcAft>
-            </a:pPr>
-            <a:r>
-              <a:rPr sz="1250" b="0">
-                <a:solidFill>
-                  <a:srgbClr val="132A3E"/>
-                </a:solidFill>
-                <a:latin typeface="Segoe UI"/>
-              </a:rPr>
-              <a:t>Insights automáticos</a:t>
-            </a:r>
-          </a:p>
-        </p:txBody>
-      </p:sp>
-      <p:sp>
-        <p:nvSpPr>
-          <p:cNvPr id="38" name="Oval 37"/>
-          <p:cNvSpPr/>
-          <p:nvPr/>
-        </p:nvSpPr>
-        <p:spPr>
-          <a:xfrm>
-            <a:off x="8604504" y="5138928"/>
-            <a:ext cx="118872" cy="118872"/>
-          </a:xfrm>
-          <a:prstGeom prst="ellipse">
-            <a:avLst/>
-          </a:prstGeom>
-          <a:solidFill>
-            <a:srgbClr val="F5B241"/>
-          </a:solidFill>
-          <a:ln>
-            <a:noFill/>
-          </a:ln>
-          <a:effectLst/>
-        </p:spPr>
-        <p:style>
-          <a:lnRef idx="1">
-            <a:schemeClr val="accent1"/>
-          </a:lnRef>
-          <a:fillRef idx="3">
-            <a:schemeClr val="accent1"/>
-          </a:fillRef>
-          <a:effectRef idx="2">
-            <a:schemeClr val="accent1"/>
-          </a:effectRef>
-          <a:fontRef idx="minor">
-            <a:schemeClr val="lt1"/>
-          </a:fontRef>
-        </p:style>
-        <p:txBody>
-          <a:bodyPr rtlCol="0" anchor="ctr"/>
-          <a:lstStyle/>
-          <a:p>
-            <a:pPr algn="ctr"/>
-          </a:p>
-        </p:txBody>
-      </p:sp>
-      <p:sp>
-        <p:nvSpPr>
-          <p:cNvPr id="39" name="TextBox 38"/>
-          <p:cNvSpPr txBox="1"/>
-          <p:nvPr/>
-        </p:nvSpPr>
-        <p:spPr>
-          <a:xfrm>
-            <a:off x="8860536" y="5065776"/>
-            <a:ext cx="2587752" cy="457200"/>
-          </a:xfrm>
-          <a:prstGeom prst="rect">
-            <a:avLst/>
-          </a:prstGeom>
-          <a:noFill/>
-        </p:spPr>
-        <p:txBody>
-          <a:bodyPr wrap="square" anchor="t" lIns="0" rIns="0" tIns="0" bIns="0">
-            <a:spAutoFit/>
-          </a:bodyPr>
-          <a:lstStyle/>
-          <a:p>
-            <a:pPr algn="l">
-              <a:lnSpc>
-                <a:spcPct val="110000"/>
-              </a:lnSpc>
-              <a:spcBef>
-                <a:spcPts val="0"/>
-              </a:spcBef>
-              <a:spcAft>
-                <a:spcPts val="0"/>
-              </a:spcAft>
-            </a:pPr>
-            <a:r>
-              <a:rPr sz="1250" b="0">
-                <a:solidFill>
-                  <a:srgbClr val="132A3E"/>
-                </a:solidFill>
-                <a:latin typeface="Segoe UI"/>
-              </a:rPr>
-              <a:t>Asistente 'Just Ask'</a:t>
-            </a:r>
-          </a:p>
-        </p:txBody>
-      </p:sp>
-      <p:sp>
-        <p:nvSpPr>
-          <p:cNvPr id="40" name="TextBox 39"/>
           <p:cNvSpPr txBox="1"/>
           <p:nvPr/>
         </p:nvSpPr>
@@ -9048,7 +8685,7 @@
       </p:sp>
       <p:sp>
         <p:nvSpPr>
-          <p:cNvPr id="41" name="TextBox 40"/>
+          <p:cNvPr id="29" name="TextBox 28"/>
           <p:cNvSpPr txBox="1"/>
           <p:nvPr/>
         </p:nvSpPr>
@@ -9334,7 +8971,7 @@
                 </a:solidFill>
                 <a:latin typeface="Segoe UI Semibold"/>
               </a:rPr>
-              <a:t>¿Qué es SAP Analytics Cloud Planning?</a:t>
+              <a:t>Planificar mirando al futuro</a:t>
             </a:r>
           </a:p>
         </p:txBody>
@@ -9379,7 +9016,7 @@
                 </a:solidFill>
                 <a:latin typeface="Segoe UI"/>
               </a:rPr>
-              <a:t>Es el módulo de planificación empresarial de SAC. Permite crear, gestionar y colaborar en presupuestos, previsiones y planes operativos, trabajando directamente sobre los datos analíticos, sin exportar a hojas de cálculo.</a:t>
+              <a:t>Dentro de la plataforma, Planning es la parte que ayuda a la dirección a preparar el futuro: presupuestos, previsiones y planes de las distintas áreas, en un mismo lugar y siempre conectados con la realidad del negocio.</a:t>
             </a:r>
           </a:p>
         </p:txBody>
@@ -9424,7 +9061,7 @@
                 </a:solidFill>
                 <a:latin typeface="Segoe UI Semibold"/>
               </a:rPr>
-              <a:t>LO QUE HACE DIFERENTE A SAC PLANNING</a:t>
+              <a:t>QUÉ SIGNIFICA PARA LA DIRECCIÓN</a:t>
             </a:r>
           </a:p>
         </p:txBody>
@@ -9558,7 +9195,7 @@
                 </a:solidFill>
                 <a:latin typeface="Segoe UI Semibold"/>
               </a:rPr>
-              <a:t>Datos y plan, unidos</a:t>
+              <a:t>Anticiparse, no reaccionar</a:t>
             </a:r>
           </a:p>
         </p:txBody>
@@ -9603,7 +9240,7 @@
                 </a:solidFill>
                 <a:latin typeface="Segoe UI"/>
               </a:rPr>
-              <a:t>El plan se construye sobre el modelo analítico real.</a:t>
+              <a:t>Ver a dónde va el negocio antes de que ocurra.</a:t>
             </a:r>
           </a:p>
         </p:txBody>
@@ -9737,7 +9374,7 @@
                 </a:solidFill>
                 <a:latin typeface="Segoe UI Semibold"/>
               </a:rPr>
-              <a:t>Fin de las hojas sueltas</a:t>
+              <a:t>Adiós a los Excel dispersos</a:t>
             </a:r>
           </a:p>
         </p:txBody>
@@ -9782,7 +9419,7 @@
                 </a:solidFill>
                 <a:latin typeface="Segoe UI"/>
               </a:rPr>
-              <a:t>Reemplaza los Excel dispersos por un modelo gobernado.</a:t>
+              <a:t>Un plan compartido, ordenado y fiable.</a:t>
             </a:r>
           </a:p>
         </p:txBody>
@@ -9916,7 +9553,7 @@
                 </a:solidFill>
                 <a:latin typeface="Segoe UI Semibold"/>
               </a:rPr>
-              <a:t>Colaboración en vivo</a:t>
+              <a:t>Todos remando a la vez</a:t>
             </a:r>
           </a:p>
         </p:txBody>
@@ -9961,7 +9598,7 @@
                 </a:solidFill>
                 <a:latin typeface="Segoe UI"/>
               </a:rPr>
-              <a:t>Tareas, comentarios y flujos de aprobación integrados.</a:t>
+              <a:t>Áreas alineadas sobre los mismos objetivos.</a:t>
             </a:r>
           </a:p>
         </p:txBody>
@@ -10095,7 +9732,7 @@
                 </a:solidFill>
                 <a:latin typeface="Segoe UI Semibold"/>
               </a:rPr>
-              <a:t>Del análisis a la acción</a:t>
+              <a:t>Del dato a la decisión</a:t>
             </a:r>
           </a:p>
         </p:txBody>
@@ -10140,7 +9777,7 @@
                 </a:solidFill>
                 <a:latin typeface="Segoe UI"/>
               </a:rPr>
-              <a:t>Se analiza el pasado y se planifica el futuro en el mismo sitio.</a:t>
+              <a:t>La información lleva directamente a la acción.</a:t>
             </a:r>
           </a:p>
         </p:txBody>
@@ -10185,7 +9822,7 @@
                 </a:solidFill>
                 <a:latin typeface="Segoe UI Semibold"/>
               </a:rPr>
-              <a:t>EN LA PRÁCTICA</a:t>
+              <a:t>LA IDEA, EN 4 PASOS</a:t>
             </a:r>
           </a:p>
         </p:txBody>
@@ -10319,7 +9956,7 @@
                 </a:solidFill>
                 <a:latin typeface="Segoe UI Semibold"/>
               </a:rPr>
-              <a:t>Recopila</a:t>
+              <a:t>Reunir</a:t>
             </a:r>
           </a:p>
         </p:txBody>
@@ -10364,7 +10001,7 @@
                 </a:solidFill>
                 <a:latin typeface="Segoe UI"/>
               </a:rPr>
-              <a:t>datos reales y supuestos</a:t>
+              <a:t>los datos del negocio</a:t>
             </a:r>
           </a:p>
         </p:txBody>
@@ -10542,7 +10179,7 @@
                 </a:solidFill>
                 <a:latin typeface="Segoe UI Semibold"/>
               </a:rPr>
-              <a:t>Modela</a:t>
+              <a:t>Planear</a:t>
             </a:r>
           </a:p>
         </p:txBody>
@@ -10587,7 +10224,7 @@
                 </a:solidFill>
                 <a:latin typeface="Segoe UI"/>
               </a:rPr>
-              <a:t>escenarios y drivers</a:t>
+              <a:t>objetivos y previsiones</a:t>
             </a:r>
           </a:p>
         </p:txBody>
@@ -10765,7 +10402,7 @@
                 </a:solidFill>
                 <a:latin typeface="Segoe UI Semibold"/>
               </a:rPr>
-              <a:t>Colabora</a:t>
+              <a:t>Colaborar</a:t>
             </a:r>
           </a:p>
         </p:txBody>
@@ -10810,7 +10447,7 @@
                 </a:solidFill>
                 <a:latin typeface="Segoe UI"/>
               </a:rPr>
-              <a:t>entre áreas y responsables</a:t>
+              <a:t>entre todas las áreas</a:t>
             </a:r>
           </a:p>
         </p:txBody>
@@ -10988,7 +10625,7 @@
                 </a:solidFill>
                 <a:latin typeface="Segoe UI Semibold"/>
               </a:rPr>
-              <a:t>Decide</a:t>
+              <a:t>Decidir</a:t>
             </a:r>
           </a:p>
         </p:txBody>
@@ -11033,7 +10670,7 @@
                 </a:solidFill>
                 <a:latin typeface="Segoe UI"/>
               </a:rPr>
-              <a:t>con previsiones fiables</a:t>
+              <a:t>con confianza</a:t>
             </a:r>
           </a:p>
         </p:txBody>
@@ -11238,7 +10875,7 @@
                 </a:solidFill>
                 <a:latin typeface="Segoe UI Semibold"/>
               </a:rPr>
-              <a:t>FUNCIONALIDAD</a:t>
+              <a:t>EN LA PRÁCTICA</a:t>
             </a:r>
           </a:p>
         </p:txBody>
@@ -11283,7 +10920,7 @@
                 </a:solidFill>
                 <a:latin typeface="Segoe UI Semibold"/>
               </a:rPr>
-              <a:t>Capacidades clave de Planning</a:t>
+              <a:t>Qué podremos hacer</a:t>
             </a:r>
           </a:p>
         </p:txBody>
@@ -11328,7 +10965,7 @@
                 </a:solidFill>
                 <a:latin typeface="Segoe UI"/>
               </a:rPr>
-              <a:t>Un conjunto de herramientas diseñadas para automatizar y enriquecer el proceso de planificación.</a:t>
+              <a:t>Capacidades explicadas en lenguaje de negocio, sin entrar en la tecnología que hay detrás.</a:t>
             </a:r>
           </a:p>
         </p:txBody>
@@ -11512,7 +11149,7 @@
                 </a:solidFill>
                 <a:latin typeface="Segoe UI Semibold"/>
               </a:rPr>
-              <a:t>▦</a:t>
+              <a:t>◈</a:t>
             </a:r>
           </a:p>
         </p:txBody>
@@ -11557,7 +11194,7 @@
                 </a:solidFill>
                 <a:latin typeface="Segoe UI Semibold"/>
               </a:rPr>
-              <a:t>Modelos multidimensionales</a:t>
+              <a:t>Planificar en un solo lugar</a:t>
             </a:r>
           </a:p>
         </p:txBody>
@@ -11602,7 +11239,7 @@
                 </a:solidFill>
                 <a:latin typeface="Segoe UI"/>
               </a:rPr>
-              <a:t>Cuentas, tiempo, versiones y dimensiones de negocio en un único modelo.</a:t>
+              <a:t>Presupuestos y previsiones ordenados, sin hojas sueltas.</a:t>
             </a:r>
           </a:p>
         </p:txBody>
@@ -11786,7 +11423,7 @@
                 </a:solidFill>
                 <a:latin typeface="Segoe UI Semibold"/>
               </a:rPr>
-              <a:t>↻</a:t>
+              <a:t>?</a:t>
             </a:r>
           </a:p>
         </p:txBody>
@@ -11831,7 +11468,7 @@
                 </a:solidFill>
                 <a:latin typeface="Segoe UI Semibold"/>
               </a:rPr>
-              <a:t>Data Actions</a:t>
+              <a:t>Escenarios «¿y si...?»</a:t>
             </a:r>
           </a:p>
         </p:txBody>
@@ -11876,7 +11513,7 @@
                 </a:solidFill>
                 <a:latin typeface="Segoe UI"/>
               </a:rPr>
-              <a:t>Automatizan cálculos, copias de versiones y distribuciones complejas.</a:t>
+              <a:t>Simular decisiones antes de tomarlas, en minutos.</a:t>
             </a:r>
           </a:p>
         </p:txBody>
@@ -12060,7 +11697,7 @@
                 </a:solidFill>
                 <a:latin typeface="Segoe UI Semibold"/>
               </a:rPr>
-              <a:t>⌥</a:t>
+              <a:t>◑</a:t>
             </a:r>
           </a:p>
         </p:txBody>
@@ -12105,7 +11742,7 @@
                 </a:solidFill>
                 <a:latin typeface="Segoe UI Semibold"/>
               </a:rPr>
-              <a:t>Value Driver Trees</a:t>
+              <a:t>Plan frente a realidad</a:t>
             </a:r>
           </a:p>
         </p:txBody>
@@ -12150,7 +11787,7 @@
                 </a:solidFill>
                 <a:latin typeface="Segoe UI"/>
               </a:rPr>
-              <a:t>Simulación visual del impacto de los inductores clave del negocio.</a:t>
+              <a:t>Comparar lo previsto con lo real, al instante.</a:t>
             </a:r>
           </a:p>
         </p:txBody>
@@ -12334,7 +11971,7 @@
                 </a:solidFill>
                 <a:latin typeface="Segoe UI Semibold"/>
               </a:rPr>
-              <a:t>◑</a:t>
+              <a:t>✦</a:t>
             </a:r>
           </a:p>
         </p:txBody>
@@ -12379,7 +12016,7 @@
                 </a:solidFill>
                 <a:latin typeface="Segoe UI Semibold"/>
               </a:rPr>
-              <a:t>Versiones y escenarios</a:t>
+              <a:t>Previsiones con IA</a:t>
             </a:r>
           </a:p>
         </p:txBody>
@@ -12424,7 +12061,7 @@
                 </a:solidFill>
                 <a:latin typeface="Segoe UI"/>
               </a:rPr>
-              <a:t>Compara Actual, Budget y Forecast; simula hipótesis 'what-if'.</a:t>
+              <a:t>Proyecciones automáticas, sin fórmulas complicadas.</a:t>
             </a:r>
           </a:p>
         </p:txBody>
@@ -12608,7 +12245,7 @@
                 </a:solidFill>
                 <a:latin typeface="Segoe UI Semibold"/>
               </a:rPr>
-              <a:t>☷</a:t>
+              <a:t>⧉</a:t>
             </a:r>
           </a:p>
         </p:txBody>
@@ -12653,7 +12290,7 @@
                 </a:solidFill>
                 <a:latin typeface="Segoe UI Semibold"/>
               </a:rPr>
-              <a:t>Allocations</a:t>
+              <a:t>Colaborar entre áreas</a:t>
             </a:r>
           </a:p>
         </p:txBody>
@@ -12698,7 +12335,7 @@
                 </a:solidFill>
                 <a:latin typeface="Segoe UI"/>
               </a:rPr>
-              <a:t>Reparte costes e ingresos según reglas y criterios de asignación.</a:t>
+              <a:t>Finanzas, ventas y RR. HH. sobre los mismos números.</a:t>
             </a:r>
           </a:p>
         </p:txBody>
@@ -12882,7 +12519,7 @@
                 </a:solidFill>
                 <a:latin typeface="Segoe UI Semibold"/>
               </a:rPr>
-              <a:t>⌘</a:t>
+              <a:t>▤</a:t>
             </a:r>
           </a:p>
         </p:txBody>
@@ -12927,7 +12564,7 @@
                 </a:solidFill>
                 <a:latin typeface="Segoe UI Semibold"/>
               </a:rPr>
-              <a:t>Predictive Planning</a:t>
+              <a:t>Información clara</a:t>
             </a:r>
           </a:p>
         </p:txBody>
@@ -12972,7 +12609,7 @@
                 </a:solidFill>
                 <a:latin typeface="Segoe UI"/>
               </a:rPr>
-              <a:t>Genera previsiones automáticas con machine learning integrado.</a:t>
+              <a:t>Cuadros de mando visuales y en tiempo real para decidir.</a:t>
             </a:r>
           </a:p>
         </p:txBody>
@@ -13177,7 +12814,7 @@
                 </a:solidFill>
                 <a:latin typeface="Segoe UI Semibold"/>
               </a:rPr>
-              <a:t>PROCESO</a:t>
+              <a:t>EL CAMBIO</a:t>
             </a:r>
           </a:p>
         </p:txBody>
@@ -13222,7 +12859,7 @@
                 </a:solidFill>
                 <a:latin typeface="Segoe UI Semibold"/>
               </a:rPr>
-              <a:t>El ciclo de planificación en SAC</a:t>
+              <a:t>Antes y después</a:t>
             </a:r>
           </a:p>
         </p:txBody>
@@ -13267,7 +12904,7 @@
                 </a:solidFill>
                 <a:latin typeface="Segoe UI"/>
               </a:rPr>
-              <a:t>Un flujo continuo y cerrado que conecta el análisis del pasado con la decisión sobre el futuro.</a:t>
+              <a:t>Cómo cambia el día a día de la planificación al pasar a una única plataforma.</a:t>
             </a:r>
           </a:p>
         </p:txBody>
@@ -13280,8 +12917,8 @@
         </p:nvSpPr>
         <p:spPr>
           <a:xfrm>
-            <a:off x="777240" y="2468880"/>
-            <a:ext cx="1874519" cy="2651760"/>
+            <a:off x="777240" y="2103120"/>
+            <a:ext cx="5120640" cy="3749039"/>
           </a:xfrm>
           <a:prstGeom prst="roundRect">
             <a:avLst/>
@@ -13331,14 +12968,14 @@
         </p:nvSpPr>
         <p:spPr>
           <a:xfrm>
-            <a:off x="777240" y="2468880"/>
-            <a:ext cx="1874519" cy="640080"/>
+            <a:off x="777240" y="2103120"/>
+            <a:ext cx="5120640" cy="868680"/>
           </a:xfrm>
           <a:prstGeom prst="round2SameRect">
             <a:avLst/>
           </a:prstGeom>
           <a:solidFill>
-            <a:srgbClr val="006EC7"/>
+            <a:srgbClr val="C26B5A"/>
           </a:solidFill>
           <a:ln>
             <a:noFill/>
@@ -13369,14 +13006,428 @@
       </p:sp>
       <p:sp>
         <p:nvSpPr>
-          <p:cNvPr id="8" name="Oval 7"/>
+          <p:cNvPr id="8" name="TextBox 7"/>
+          <p:cNvSpPr txBox="1"/>
+          <p:nvPr/>
+        </p:nvSpPr>
+        <p:spPr>
+          <a:xfrm>
+            <a:off x="1143000" y="2103120"/>
+            <a:ext cx="4389120" cy="868680"/>
+          </a:xfrm>
+          <a:prstGeom prst="rect">
+            <a:avLst/>
+          </a:prstGeom>
+          <a:noFill/>
+        </p:spPr>
+        <p:txBody>
+          <a:bodyPr wrap="square" anchor="ctr" lIns="0" rIns="0" tIns="0" bIns="0">
+            <a:spAutoFit/>
+          </a:bodyPr>
+          <a:lstStyle/>
+          <a:p>
+            <a:pPr algn="l">
+              <a:lnSpc>
+                <a:spcPct val="100000"/>
+              </a:lnSpc>
+              <a:spcBef>
+                <a:spcPts val="0"/>
+              </a:spcBef>
+              <a:spcAft>
+                <a:spcPts val="0"/>
+              </a:spcAft>
+            </a:pPr>
+            <a:r>
+              <a:rPr sz="1800" b="1">
+                <a:solidFill>
+                  <a:srgbClr val="FFFFFF"/>
+                </a:solidFill>
+                <a:latin typeface="Segoe UI Semibold"/>
+              </a:rPr>
+              <a:t>✕  </a:t>
+            </a:r>
+            <a:r>
+              <a:rPr sz="1700" b="1">
+                <a:solidFill>
+                  <a:srgbClr val="FFFFFF"/>
+                </a:solidFill>
+                <a:latin typeface="Segoe UI Semibold"/>
+              </a:rPr>
+              <a:t>Hoy, con hojas de cálculo</a:t>
+            </a:r>
+          </a:p>
+        </p:txBody>
+      </p:sp>
+      <p:sp>
+        <p:nvSpPr>
+          <p:cNvPr id="9" name="TextBox 8"/>
+          <p:cNvSpPr txBox="1"/>
+          <p:nvPr/>
+        </p:nvSpPr>
+        <p:spPr>
+          <a:xfrm>
+            <a:off x="1143000" y="3246120"/>
+            <a:ext cx="365760" cy="365760"/>
+          </a:xfrm>
+          <a:prstGeom prst="rect">
+            <a:avLst/>
+          </a:prstGeom>
+          <a:noFill/>
+        </p:spPr>
+        <p:txBody>
+          <a:bodyPr wrap="square" anchor="t" lIns="0" rIns="0" tIns="0" bIns="0">
+            <a:spAutoFit/>
+          </a:bodyPr>
+          <a:lstStyle/>
+          <a:p>
+            <a:pPr algn="l">
+              <a:lnSpc>
+                <a:spcPct val="100000"/>
+              </a:lnSpc>
+              <a:spcBef>
+                <a:spcPts val="0"/>
+              </a:spcBef>
+              <a:spcAft>
+                <a:spcPts val="0"/>
+              </a:spcAft>
+            </a:pPr>
+            <a:r>
+              <a:rPr sz="1500" b="1">
+                <a:solidFill>
+                  <a:srgbClr val="C26B5A"/>
+                </a:solidFill>
+                <a:latin typeface="Segoe UI Semibold"/>
+              </a:rPr>
+              <a:t>—</a:t>
+            </a:r>
+          </a:p>
+        </p:txBody>
+      </p:sp>
+      <p:sp>
+        <p:nvSpPr>
+          <p:cNvPr id="10" name="TextBox 9"/>
+          <p:cNvSpPr txBox="1"/>
+          <p:nvPr/>
+        </p:nvSpPr>
+        <p:spPr>
+          <a:xfrm>
+            <a:off x="1554480" y="3264408"/>
+            <a:ext cx="4023360" cy="548640"/>
+          </a:xfrm>
+          <a:prstGeom prst="rect">
+            <a:avLst/>
+          </a:prstGeom>
+          <a:noFill/>
+        </p:spPr>
+        <p:txBody>
+          <a:bodyPr wrap="square" anchor="t" lIns="0" rIns="0" tIns="0" bIns="0">
+            <a:spAutoFit/>
+          </a:bodyPr>
+          <a:lstStyle/>
+          <a:p>
+            <a:pPr algn="l">
+              <a:lnSpc>
+                <a:spcPct val="115000"/>
+              </a:lnSpc>
+              <a:spcBef>
+                <a:spcPts val="0"/>
+              </a:spcBef>
+              <a:spcAft>
+                <a:spcPts val="0"/>
+              </a:spcAft>
+            </a:pPr>
+            <a:r>
+              <a:rPr sz="1350" b="0">
+                <a:solidFill>
+                  <a:srgbClr val="132A3E"/>
+                </a:solidFill>
+                <a:latin typeface="Segoe UI"/>
+              </a:rPr>
+              <a:t>Datos dispersos y desactualizados</a:t>
+            </a:r>
+          </a:p>
+        </p:txBody>
+      </p:sp>
+      <p:sp>
+        <p:nvSpPr>
+          <p:cNvPr id="11" name="TextBox 10"/>
+          <p:cNvSpPr txBox="1"/>
+          <p:nvPr/>
+        </p:nvSpPr>
+        <p:spPr>
+          <a:xfrm>
+            <a:off x="1143000" y="3840480"/>
+            <a:ext cx="365760" cy="365760"/>
+          </a:xfrm>
+          <a:prstGeom prst="rect">
+            <a:avLst/>
+          </a:prstGeom>
+          <a:noFill/>
+        </p:spPr>
+        <p:txBody>
+          <a:bodyPr wrap="square" anchor="t" lIns="0" rIns="0" tIns="0" bIns="0">
+            <a:spAutoFit/>
+          </a:bodyPr>
+          <a:lstStyle/>
+          <a:p>
+            <a:pPr algn="l">
+              <a:lnSpc>
+                <a:spcPct val="100000"/>
+              </a:lnSpc>
+              <a:spcBef>
+                <a:spcPts val="0"/>
+              </a:spcBef>
+              <a:spcAft>
+                <a:spcPts val="0"/>
+              </a:spcAft>
+            </a:pPr>
+            <a:r>
+              <a:rPr sz="1500" b="1">
+                <a:solidFill>
+                  <a:srgbClr val="C26B5A"/>
+                </a:solidFill>
+                <a:latin typeface="Segoe UI Semibold"/>
+              </a:rPr>
+              <a:t>—</a:t>
+            </a:r>
+          </a:p>
+        </p:txBody>
+      </p:sp>
+      <p:sp>
+        <p:nvSpPr>
+          <p:cNvPr id="12" name="TextBox 11"/>
+          <p:cNvSpPr txBox="1"/>
+          <p:nvPr/>
+        </p:nvSpPr>
+        <p:spPr>
+          <a:xfrm>
+            <a:off x="1554480" y="3858768"/>
+            <a:ext cx="4023360" cy="548640"/>
+          </a:xfrm>
+          <a:prstGeom prst="rect">
+            <a:avLst/>
+          </a:prstGeom>
+          <a:noFill/>
+        </p:spPr>
+        <p:txBody>
+          <a:bodyPr wrap="square" anchor="t" lIns="0" rIns="0" tIns="0" bIns="0">
+            <a:spAutoFit/>
+          </a:bodyPr>
+          <a:lstStyle/>
+          <a:p>
+            <a:pPr algn="l">
+              <a:lnSpc>
+                <a:spcPct val="115000"/>
+              </a:lnSpc>
+              <a:spcBef>
+                <a:spcPts val="0"/>
+              </a:spcBef>
+              <a:spcAft>
+                <a:spcPts val="0"/>
+              </a:spcAft>
+            </a:pPr>
+            <a:r>
+              <a:rPr sz="1350" b="0">
+                <a:solidFill>
+                  <a:srgbClr val="132A3E"/>
+                </a:solidFill>
+                <a:latin typeface="Segoe UI"/>
+              </a:rPr>
+              <a:t>Semanas para cerrar un presupuesto</a:t>
+            </a:r>
+          </a:p>
+        </p:txBody>
+      </p:sp>
+      <p:sp>
+        <p:nvSpPr>
+          <p:cNvPr id="13" name="TextBox 12"/>
+          <p:cNvSpPr txBox="1"/>
+          <p:nvPr/>
+        </p:nvSpPr>
+        <p:spPr>
+          <a:xfrm>
+            <a:off x="1143000" y="4434840"/>
+            <a:ext cx="365760" cy="365760"/>
+          </a:xfrm>
+          <a:prstGeom prst="rect">
+            <a:avLst/>
+          </a:prstGeom>
+          <a:noFill/>
+        </p:spPr>
+        <p:txBody>
+          <a:bodyPr wrap="square" anchor="t" lIns="0" rIns="0" tIns="0" bIns="0">
+            <a:spAutoFit/>
+          </a:bodyPr>
+          <a:lstStyle/>
+          <a:p>
+            <a:pPr algn="l">
+              <a:lnSpc>
+                <a:spcPct val="100000"/>
+              </a:lnSpc>
+              <a:spcBef>
+                <a:spcPts val="0"/>
+              </a:spcBef>
+              <a:spcAft>
+                <a:spcPts val="0"/>
+              </a:spcAft>
+            </a:pPr>
+            <a:r>
+              <a:rPr sz="1500" b="1">
+                <a:solidFill>
+                  <a:srgbClr val="C26B5A"/>
+                </a:solidFill>
+                <a:latin typeface="Segoe UI Semibold"/>
+              </a:rPr>
+              <a:t>—</a:t>
+            </a:r>
+          </a:p>
+        </p:txBody>
+      </p:sp>
+      <p:sp>
+        <p:nvSpPr>
+          <p:cNvPr id="14" name="TextBox 13"/>
+          <p:cNvSpPr txBox="1"/>
+          <p:nvPr/>
+        </p:nvSpPr>
+        <p:spPr>
+          <a:xfrm>
+            <a:off x="1554480" y="4453128"/>
+            <a:ext cx="4023360" cy="548640"/>
+          </a:xfrm>
+          <a:prstGeom prst="rect">
+            <a:avLst/>
+          </a:prstGeom>
+          <a:noFill/>
+        </p:spPr>
+        <p:txBody>
+          <a:bodyPr wrap="square" anchor="t" lIns="0" rIns="0" tIns="0" bIns="0">
+            <a:spAutoFit/>
+          </a:bodyPr>
+          <a:lstStyle/>
+          <a:p>
+            <a:pPr algn="l">
+              <a:lnSpc>
+                <a:spcPct val="115000"/>
+              </a:lnSpc>
+              <a:spcBef>
+                <a:spcPts val="0"/>
+              </a:spcBef>
+              <a:spcAft>
+                <a:spcPts val="0"/>
+              </a:spcAft>
+            </a:pPr>
+            <a:r>
+              <a:rPr sz="1350" b="0">
+                <a:solidFill>
+                  <a:srgbClr val="132A3E"/>
+                </a:solidFill>
+                <a:latin typeface="Segoe UI"/>
+              </a:rPr>
+              <a:t>Difícil simular escenarios</a:t>
+            </a:r>
+          </a:p>
+        </p:txBody>
+      </p:sp>
+      <p:sp>
+        <p:nvSpPr>
+          <p:cNvPr id="15" name="TextBox 14"/>
+          <p:cNvSpPr txBox="1"/>
+          <p:nvPr/>
+        </p:nvSpPr>
+        <p:spPr>
+          <a:xfrm>
+            <a:off x="1143000" y="5029200"/>
+            <a:ext cx="365760" cy="365760"/>
+          </a:xfrm>
+          <a:prstGeom prst="rect">
+            <a:avLst/>
+          </a:prstGeom>
+          <a:noFill/>
+        </p:spPr>
+        <p:txBody>
+          <a:bodyPr wrap="square" anchor="t" lIns="0" rIns="0" tIns="0" bIns="0">
+            <a:spAutoFit/>
+          </a:bodyPr>
+          <a:lstStyle/>
+          <a:p>
+            <a:pPr algn="l">
+              <a:lnSpc>
+                <a:spcPct val="100000"/>
+              </a:lnSpc>
+              <a:spcBef>
+                <a:spcPts val="0"/>
+              </a:spcBef>
+              <a:spcAft>
+                <a:spcPts val="0"/>
+              </a:spcAft>
+            </a:pPr>
+            <a:r>
+              <a:rPr sz="1500" b="1">
+                <a:solidFill>
+                  <a:srgbClr val="C26B5A"/>
+                </a:solidFill>
+                <a:latin typeface="Segoe UI Semibold"/>
+              </a:rPr>
+              <a:t>—</a:t>
+            </a:r>
+          </a:p>
+        </p:txBody>
+      </p:sp>
+      <p:sp>
+        <p:nvSpPr>
+          <p:cNvPr id="16" name="TextBox 15"/>
+          <p:cNvSpPr txBox="1"/>
+          <p:nvPr/>
+        </p:nvSpPr>
+        <p:spPr>
+          <a:xfrm>
+            <a:off x="1554480" y="5047488"/>
+            <a:ext cx="4023360" cy="548640"/>
+          </a:xfrm>
+          <a:prstGeom prst="rect">
+            <a:avLst/>
+          </a:prstGeom>
+          <a:noFill/>
+        </p:spPr>
+        <p:txBody>
+          <a:bodyPr wrap="square" anchor="t" lIns="0" rIns="0" tIns="0" bIns="0">
+            <a:spAutoFit/>
+          </a:bodyPr>
+          <a:lstStyle/>
+          <a:p>
+            <a:pPr algn="l">
+              <a:lnSpc>
+                <a:spcPct val="115000"/>
+              </a:lnSpc>
+              <a:spcBef>
+                <a:spcPts val="0"/>
+              </a:spcBef>
+              <a:spcAft>
+                <a:spcPts val="0"/>
+              </a:spcAft>
+            </a:pPr>
+            <a:r>
+              <a:rPr sz="1350" b="0">
+                <a:solidFill>
+                  <a:srgbClr val="132A3E"/>
+                </a:solidFill>
+                <a:latin typeface="Segoe UI"/>
+              </a:rPr>
+              <a:t>Cada área con su propia versión</a:t>
+            </a:r>
+          </a:p>
+        </p:txBody>
+      </p:sp>
+      <p:sp>
+        <p:nvSpPr>
+          <p:cNvPr id="17" name="Oval 16"/>
           <p:cNvSpPr/>
           <p:nvPr/>
         </p:nvSpPr>
         <p:spPr>
           <a:xfrm>
-            <a:off x="1257299" y="2724912"/>
-            <a:ext cx="914400" cy="914400"/>
+            <a:off x="5870448" y="3703320"/>
+            <a:ext cx="685800" cy="685800"/>
           </a:xfrm>
           <a:prstGeom prst="ellipse">
             <a:avLst/>
@@ -13413,14 +13464,14 @@
       </p:sp>
       <p:sp>
         <p:nvSpPr>
-          <p:cNvPr id="9" name="TextBox 8"/>
-          <p:cNvSpPr txBox="1"/>
-          <p:nvPr/>
-        </p:nvSpPr>
-        <p:spPr>
-          <a:xfrm>
-            <a:off x="1257299" y="2724912"/>
-            <a:ext cx="914400" cy="914400"/>
+          <p:cNvPr id="18" name="TextBox 17"/>
+          <p:cNvSpPr txBox="1"/>
+          <p:nvPr/>
+        </p:nvSpPr>
+        <p:spPr>
+          <a:xfrm>
+            <a:off x="5870448" y="3703320"/>
+            <a:ext cx="685800" cy="685800"/>
           </a:xfrm>
           <a:prstGeom prst="rect">
             <a:avLst/>
@@ -13447,165 +13498,31 @@
             <a:r>
               <a:rPr sz="2600" b="1">
                 <a:solidFill>
-                  <a:srgbClr val="FFFFFF"/>
+                  <a:srgbClr val="F5B241"/>
                 </a:solidFill>
                 <a:latin typeface="Segoe UI Semibold"/>
               </a:rPr>
-              <a:t>1</a:t>
-            </a:r>
-          </a:p>
-        </p:txBody>
-      </p:sp>
-      <p:sp>
-        <p:nvSpPr>
-          <p:cNvPr id="10" name="TextBox 9"/>
-          <p:cNvSpPr txBox="1"/>
-          <p:nvPr/>
-        </p:nvSpPr>
-        <p:spPr>
-          <a:xfrm>
-            <a:off x="868680" y="3749040"/>
-            <a:ext cx="1691639" cy="411480"/>
-          </a:xfrm>
-          <a:prstGeom prst="rect">
-            <a:avLst/>
-          </a:prstGeom>
-          <a:noFill/>
-        </p:spPr>
-        <p:txBody>
-          <a:bodyPr wrap="square" anchor="t" lIns="0" rIns="0" tIns="0" bIns="0">
-            <a:spAutoFit/>
-          </a:bodyPr>
-          <a:lstStyle/>
-          <a:p>
-            <a:pPr algn="ctr">
-              <a:lnSpc>
-                <a:spcPct val="100000"/>
-              </a:lnSpc>
-              <a:spcBef>
-                <a:spcPts val="0"/>
-              </a:spcBef>
-              <a:spcAft>
-                <a:spcPts val="0"/>
-              </a:spcAft>
-            </a:pPr>
-            <a:r>
-              <a:rPr sz="1600" b="1">
-                <a:solidFill>
-                  <a:srgbClr val="132A3E"/>
-                </a:solidFill>
-                <a:latin typeface="Segoe UI Semibold"/>
-              </a:rPr>
-              <a:t>Integrar</a:t>
-            </a:r>
-          </a:p>
-        </p:txBody>
-      </p:sp>
-      <p:sp>
-        <p:nvSpPr>
-          <p:cNvPr id="11" name="TextBox 10"/>
-          <p:cNvSpPr txBox="1"/>
-          <p:nvPr/>
-        </p:nvSpPr>
-        <p:spPr>
-          <a:xfrm>
-            <a:off x="941832" y="4206240"/>
-            <a:ext cx="1545335" cy="822960"/>
-          </a:xfrm>
-          <a:prstGeom prst="rect">
-            <a:avLst/>
-          </a:prstGeom>
-          <a:noFill/>
-        </p:spPr>
-        <p:txBody>
-          <a:bodyPr wrap="square" anchor="t" lIns="0" rIns="0" tIns="0" bIns="0">
-            <a:spAutoFit/>
-          </a:bodyPr>
-          <a:lstStyle/>
-          <a:p>
-            <a:pPr algn="ctr">
-              <a:lnSpc>
-                <a:spcPct val="118000"/>
-              </a:lnSpc>
-              <a:spcBef>
-                <a:spcPts val="0"/>
-              </a:spcBef>
-              <a:spcAft>
-                <a:spcPts val="0"/>
-              </a:spcAft>
-            </a:pPr>
-            <a:r>
-              <a:rPr sz="1150" b="0">
-                <a:solidFill>
-                  <a:srgbClr val="5B6B7B"/>
-                </a:solidFill>
-                <a:latin typeface="Segoe UI"/>
-              </a:rPr>
-              <a:t>Conectar datos reales de SAP y de terceros.</a:t>
-            </a:r>
-          </a:p>
-        </p:txBody>
-      </p:sp>
-      <p:sp>
-        <p:nvSpPr>
-          <p:cNvPr id="12" name="Chevron 11"/>
+              <a:t>→</a:t>
+            </a:r>
+          </a:p>
+        </p:txBody>
+      </p:sp>
+      <p:sp>
+        <p:nvSpPr>
+          <p:cNvPr id="19" name="Rounded Rectangle 18"/>
           <p:cNvSpPr/>
           <p:nvPr/>
         </p:nvSpPr>
         <p:spPr>
           <a:xfrm>
-            <a:off x="2670047" y="3520440"/>
-            <a:ext cx="278893" cy="365760"/>
-          </a:xfrm>
-          <a:prstGeom prst="chevron">
+            <a:off x="6629400" y="1965960"/>
+            <a:ext cx="5120640" cy="4023360"/>
+          </a:xfrm>
+          <a:prstGeom prst="roundRect">
             <a:avLst/>
           </a:prstGeom>
           <a:solidFill>
-            <a:srgbClr val="006EC7"/>
-          </a:solidFill>
-          <a:ln>
-            <a:noFill/>
-          </a:ln>
-          <a:effectLst/>
-        </p:spPr>
-        <p:style>
-          <a:lnRef idx="1">
-            <a:schemeClr val="accent1"/>
-          </a:lnRef>
-          <a:fillRef idx="3">
-            <a:schemeClr val="accent1"/>
-          </a:fillRef>
-          <a:effectRef idx="2">
-            <a:schemeClr val="accent1"/>
-          </a:effectRef>
-          <a:fontRef idx="minor">
-            <a:schemeClr val="lt1"/>
-          </a:fontRef>
-        </p:style>
-        <p:txBody>
-          <a:bodyPr rtlCol="0" anchor="ctr"/>
-          <a:lstStyle/>
-          <a:p>
-            <a:pPr algn="ctr"/>
-          </a:p>
-        </p:txBody>
-      </p:sp>
-      <p:sp>
-        <p:nvSpPr>
-          <p:cNvPr id="13" name="Rounded Rectangle 12"/>
-          <p:cNvSpPr/>
-          <p:nvPr/>
-        </p:nvSpPr>
-        <p:spPr>
-          <a:xfrm>
-            <a:off x="2967228" y="2468880"/>
-            <a:ext cx="1874519" cy="2651760"/>
-          </a:xfrm>
-          <a:prstGeom prst="roundRect">
-            <a:avLst/>
-          </a:prstGeom>
-          <a:solidFill>
-            <a:srgbClr val="FFFFFF"/>
+            <a:srgbClr val="0A2A43"/>
           </a:solidFill>
           <a:ln>
             <a:noFill/>
@@ -13643,20 +13560,20 @@
       </p:sp>
       <p:sp>
         <p:nvSpPr>
-          <p:cNvPr id="14" name="Round Same Side Corner Rectangle 13"/>
+          <p:cNvPr id="20" name="Round Same Side Corner Rectangle 19"/>
           <p:cNvSpPr/>
           <p:nvPr/>
         </p:nvSpPr>
         <p:spPr>
           <a:xfrm>
-            <a:off x="2967228" y="2468880"/>
-            <a:ext cx="1874519" cy="640080"/>
+            <a:off x="6629400" y="1965960"/>
+            <a:ext cx="5120640" cy="868680"/>
           </a:xfrm>
           <a:prstGeom prst="round2SameRect">
             <a:avLst/>
           </a:prstGeom>
           <a:solidFill>
-            <a:srgbClr val="0FA9B0"/>
+            <a:srgbClr val="2E9E6B"/>
           </a:solidFill>
           <a:ln>
             <a:noFill/>
@@ -13687,20 +13604,74 @@
       </p:sp>
       <p:sp>
         <p:nvSpPr>
-          <p:cNvPr id="15" name="Oval 14"/>
+          <p:cNvPr id="21" name="TextBox 20"/>
+          <p:cNvSpPr txBox="1"/>
+          <p:nvPr/>
+        </p:nvSpPr>
+        <p:spPr>
+          <a:xfrm>
+            <a:off x="6995160" y="1965960"/>
+            <a:ext cx="4389120" cy="868680"/>
+          </a:xfrm>
+          <a:prstGeom prst="rect">
+            <a:avLst/>
+          </a:prstGeom>
+          <a:noFill/>
+        </p:spPr>
+        <p:txBody>
+          <a:bodyPr wrap="square" anchor="ctr" lIns="0" rIns="0" tIns="0" bIns="0">
+            <a:spAutoFit/>
+          </a:bodyPr>
+          <a:lstStyle/>
+          <a:p>
+            <a:pPr algn="l">
+              <a:lnSpc>
+                <a:spcPct val="100000"/>
+              </a:lnSpc>
+              <a:spcBef>
+                <a:spcPts val="0"/>
+              </a:spcBef>
+              <a:spcAft>
+                <a:spcPts val="0"/>
+              </a:spcAft>
+            </a:pPr>
+            <a:r>
+              <a:rPr sz="1800" b="1">
+                <a:solidFill>
+                  <a:srgbClr val="FFFFFF"/>
+                </a:solidFill>
+                <a:latin typeface="Segoe UI Semibold"/>
+              </a:rPr>
+              <a:t>✔  </a:t>
+            </a:r>
+            <a:r>
+              <a:rPr sz="1700" b="1">
+                <a:solidFill>
+                  <a:srgbClr val="FFFFFF"/>
+                </a:solidFill>
+                <a:latin typeface="Segoe UI Semibold"/>
+              </a:rPr>
+              <a:t>Con SAP Analytics Cloud</a:t>
+            </a:r>
+          </a:p>
+        </p:txBody>
+      </p:sp>
+      <p:sp>
+        <p:nvSpPr>
+          <p:cNvPr id="22" name="Oval 21"/>
           <p:cNvSpPr/>
           <p:nvPr/>
         </p:nvSpPr>
         <p:spPr>
           <a:xfrm>
-            <a:off x="3447287" y="2724912"/>
-            <a:ext cx="914400" cy="914400"/>
+            <a:off x="6995160" y="3154680"/>
+            <a:ext cx="310896" cy="310896"/>
           </a:xfrm>
           <a:prstGeom prst="ellipse">
             <a:avLst/>
           </a:prstGeom>
           <a:solidFill>
-            <a:srgbClr val="0A2A43"/>
+            <a:srgbClr val="2E9E6B"/>
           </a:solidFill>
           <a:ln>
             <a:noFill/>
@@ -13731,14 +13702,14 @@
       </p:sp>
       <p:sp>
         <p:nvSpPr>
-          <p:cNvPr id="16" name="TextBox 15"/>
-          <p:cNvSpPr txBox="1"/>
-          <p:nvPr/>
-        </p:nvSpPr>
-        <p:spPr>
-          <a:xfrm>
-            <a:off x="3447287" y="2724912"/>
-            <a:ext cx="914400" cy="914400"/>
+          <p:cNvPr id="23" name="TextBox 22"/>
+          <p:cNvSpPr txBox="1"/>
+          <p:nvPr/>
+        </p:nvSpPr>
+        <p:spPr>
+          <a:xfrm>
+            <a:off x="6995160" y="3154680"/>
+            <a:ext cx="310896" cy="310896"/>
           </a:xfrm>
           <a:prstGeom prst="rect">
             <a:avLst/>
@@ -13763,27 +13734,27 @@
               </a:spcAft>
             </a:pPr>
             <a:r>
-              <a:rPr sz="2600" b="1">
+              <a:rPr sz="1200" b="1">
                 <a:solidFill>
                   <a:srgbClr val="FFFFFF"/>
                 </a:solidFill>
                 <a:latin typeface="Segoe UI Semibold"/>
               </a:rPr>
-              <a:t>2</a:t>
-            </a:r>
-          </a:p>
-        </p:txBody>
-      </p:sp>
-      <p:sp>
-        <p:nvSpPr>
-          <p:cNvPr id="17" name="TextBox 16"/>
-          <p:cNvSpPr txBox="1"/>
-          <p:nvPr/>
-        </p:nvSpPr>
-        <p:spPr>
-          <a:xfrm>
-            <a:off x="3058668" y="3749040"/>
-            <a:ext cx="1691639" cy="411480"/>
+              <a:t>✔</a:t>
+            </a:r>
+          </a:p>
+        </p:txBody>
+      </p:sp>
+      <p:sp>
+        <p:nvSpPr>
+          <p:cNvPr id="24" name="TextBox 23"/>
+          <p:cNvSpPr txBox="1"/>
+          <p:nvPr/>
+        </p:nvSpPr>
+        <p:spPr>
+          <a:xfrm>
+            <a:off x="7452360" y="3136392"/>
+            <a:ext cx="3977640" cy="548640"/>
           </a:xfrm>
           <a:prstGeom prst="rect">
             <a:avLst/>
@@ -13796,90 +13767,45 @@
           </a:bodyPr>
           <a:lstStyle/>
           <a:p>
-            <a:pPr algn="ctr">
-              <a:lnSpc>
-                <a:spcPct val="100000"/>
-              </a:lnSpc>
-              <a:spcBef>
-                <a:spcPts val="0"/>
-              </a:spcBef>
-              <a:spcAft>
-                <a:spcPts val="0"/>
-              </a:spcAft>
-            </a:pPr>
-            <a:r>
-              <a:rPr sz="1600" b="1">
-                <a:solidFill>
-                  <a:srgbClr val="132A3E"/>
+            <a:pPr algn="l">
+              <a:lnSpc>
+                <a:spcPct val="115000"/>
+              </a:lnSpc>
+              <a:spcBef>
+                <a:spcPts val="0"/>
+              </a:spcBef>
+              <a:spcAft>
+                <a:spcPts val="0"/>
+              </a:spcAft>
+            </a:pPr>
+            <a:r>
+              <a:rPr sz="1350" b="1">
+                <a:solidFill>
+                  <a:srgbClr val="FFFFFF"/>
                 </a:solidFill>
                 <a:latin typeface="Segoe UI Semibold"/>
               </a:rPr>
-              <a:t>Modelar</a:t>
-            </a:r>
-          </a:p>
-        </p:txBody>
-      </p:sp>
-      <p:sp>
-        <p:nvSpPr>
-          <p:cNvPr id="18" name="TextBox 17"/>
-          <p:cNvSpPr txBox="1"/>
-          <p:nvPr/>
-        </p:nvSpPr>
-        <p:spPr>
-          <a:xfrm>
-            <a:off x="3131820" y="4206240"/>
-            <a:ext cx="1545335" cy="822960"/>
-          </a:xfrm>
-          <a:prstGeom prst="rect">
-            <a:avLst/>
-          </a:prstGeom>
-          <a:noFill/>
-        </p:spPr>
-        <p:txBody>
-          <a:bodyPr wrap="square" anchor="t" lIns="0" rIns="0" tIns="0" bIns="0">
-            <a:spAutoFit/>
-          </a:bodyPr>
-          <a:lstStyle/>
-          <a:p>
-            <a:pPr algn="ctr">
-              <a:lnSpc>
-                <a:spcPct val="118000"/>
-              </a:lnSpc>
-              <a:spcBef>
-                <a:spcPts val="0"/>
-              </a:spcBef>
-              <a:spcAft>
-                <a:spcPts val="0"/>
-              </a:spcAft>
-            </a:pPr>
-            <a:r>
-              <a:rPr sz="1150" b="0">
-                <a:solidFill>
-                  <a:srgbClr val="5B6B7B"/>
-                </a:solidFill>
-                <a:latin typeface="Segoe UI"/>
-              </a:rPr>
-              <a:t>Definir dimensiones, versiones y reglas de cálculo.</a:t>
-            </a:r>
-          </a:p>
-        </p:txBody>
-      </p:sp>
-      <p:sp>
-        <p:nvSpPr>
-          <p:cNvPr id="19" name="Chevron 18"/>
+              <a:t>Una única fuente de datos fiable</a:t>
+            </a:r>
+          </a:p>
+        </p:txBody>
+      </p:sp>
+      <p:sp>
+        <p:nvSpPr>
+          <p:cNvPr id="25" name="Oval 24"/>
           <p:cNvSpPr/>
           <p:nvPr/>
         </p:nvSpPr>
         <p:spPr>
           <a:xfrm>
-            <a:off x="4860035" y="3520440"/>
-            <a:ext cx="278893" cy="365760"/>
-          </a:xfrm>
-          <a:prstGeom prst="chevron">
+            <a:off x="6995160" y="3813048"/>
+            <a:ext cx="310896" cy="310896"/>
+          </a:xfrm>
+          <a:prstGeom prst="ellipse">
             <a:avLst/>
           </a:prstGeom>
           <a:solidFill>
-            <a:srgbClr val="0FA9B0"/>
+            <a:srgbClr val="2E9E6B"/>
           </a:solidFill>
           <a:ln>
             <a:noFill/>
@@ -13910,32 +13836,115 @@
       </p:sp>
       <p:sp>
         <p:nvSpPr>
-          <p:cNvPr id="20" name="Rounded Rectangle 19"/>
+          <p:cNvPr id="26" name="TextBox 25"/>
+          <p:cNvSpPr txBox="1"/>
+          <p:nvPr/>
+        </p:nvSpPr>
+        <p:spPr>
+          <a:xfrm>
+            <a:off x="6995160" y="3813048"/>
+            <a:ext cx="310896" cy="310896"/>
+          </a:xfrm>
+          <a:prstGeom prst="rect">
+            <a:avLst/>
+          </a:prstGeom>
+          <a:noFill/>
+        </p:spPr>
+        <p:txBody>
+          <a:bodyPr wrap="square" anchor="ctr" lIns="0" rIns="0" tIns="0" bIns="0">
+            <a:spAutoFit/>
+          </a:bodyPr>
+          <a:lstStyle/>
+          <a:p>
+            <a:pPr algn="ctr">
+              <a:lnSpc>
+                <a:spcPct val="100000"/>
+              </a:lnSpc>
+              <a:spcBef>
+                <a:spcPts val="0"/>
+              </a:spcBef>
+              <a:spcAft>
+                <a:spcPts val="600"/>
+              </a:spcAft>
+            </a:pPr>
+            <a:r>
+              <a:rPr sz="1200" b="1">
+                <a:solidFill>
+                  <a:srgbClr val="FFFFFF"/>
+                </a:solidFill>
+                <a:latin typeface="Segoe UI Semibold"/>
+              </a:rPr>
+              <a:t>✔</a:t>
+            </a:r>
+          </a:p>
+        </p:txBody>
+      </p:sp>
+      <p:sp>
+        <p:nvSpPr>
+          <p:cNvPr id="27" name="TextBox 26"/>
+          <p:cNvSpPr txBox="1"/>
+          <p:nvPr/>
+        </p:nvSpPr>
+        <p:spPr>
+          <a:xfrm>
+            <a:off x="7452360" y="3794760"/>
+            <a:ext cx="3977640" cy="548640"/>
+          </a:xfrm>
+          <a:prstGeom prst="rect">
+            <a:avLst/>
+          </a:prstGeom>
+          <a:noFill/>
+        </p:spPr>
+        <p:txBody>
+          <a:bodyPr wrap="square" anchor="t" lIns="0" rIns="0" tIns="0" bIns="0">
+            <a:spAutoFit/>
+          </a:bodyPr>
+          <a:lstStyle/>
+          <a:p>
+            <a:pPr algn="l">
+              <a:lnSpc>
+                <a:spcPct val="115000"/>
+              </a:lnSpc>
+              <a:spcBef>
+                <a:spcPts val="0"/>
+              </a:spcBef>
+              <a:spcAft>
+                <a:spcPts val="0"/>
+              </a:spcAft>
+            </a:pPr>
+            <a:r>
+              <a:rPr sz="1350" b="1">
+                <a:solidFill>
+                  <a:srgbClr val="FFFFFF"/>
+                </a:solidFill>
+                <a:latin typeface="Segoe UI Semibold"/>
+              </a:rPr>
+              <a:t>Ciclos de días, no de semanas</a:t>
+            </a:r>
+          </a:p>
+        </p:txBody>
+      </p:sp>
+      <p:sp>
+        <p:nvSpPr>
+          <p:cNvPr id="28" name="Oval 27"/>
           <p:cNvSpPr/>
           <p:nvPr/>
         </p:nvSpPr>
         <p:spPr>
           <a:xfrm>
-            <a:off x="5157216" y="2468880"/>
-            <a:ext cx="1874519" cy="2651760"/>
-          </a:xfrm>
-          <a:prstGeom prst="roundRect">
+            <a:off x="6995160" y="4471416"/>
+            <a:ext cx="310896" cy="310896"/>
+          </a:xfrm>
+          <a:prstGeom prst="ellipse">
             <a:avLst/>
           </a:prstGeom>
           <a:solidFill>
-            <a:srgbClr val="FFFFFF"/>
+            <a:srgbClr val="2E9E6B"/>
           </a:solidFill>
           <a:ln>
             <a:noFill/>
           </a:ln>
           <a:effectLst/>
-          <a:effectLst>
-            <a:outerShdw blurRad="90000" dist="40000" dir="5400000" rotWithShape="0">
-              <a:srgbClr val="0A2A43">
-                <a:alpha val="22000"/>
-              </a:srgbClr>
-            </a:outerShdw>
-          </a:effectLst>
         </p:spPr>
         <p:style>
           <a:lnRef idx="1">
@@ -13961,20 +13970,110 @@
       </p:sp>
       <p:sp>
         <p:nvSpPr>
-          <p:cNvPr id="21" name="Round Same Side Corner Rectangle 20"/>
+          <p:cNvPr id="29" name="TextBox 28"/>
+          <p:cNvSpPr txBox="1"/>
+          <p:nvPr/>
+        </p:nvSpPr>
+        <p:spPr>
+          <a:xfrm>
+            <a:off x="6995160" y="4471416"/>
+            <a:ext cx="310896" cy="310896"/>
+          </a:xfrm>
+          <a:prstGeom prst="rect">
+            <a:avLst/>
+          </a:prstGeom>
+          <a:noFill/>
+        </p:spPr>
+        <p:txBody>
+          <a:bodyPr wrap="square" anchor="ctr" lIns="0" rIns="0" tIns="0" bIns="0">
+            <a:spAutoFit/>
+          </a:bodyPr>
+          <a:lstStyle/>
+          <a:p>
+            <a:pPr algn="ctr">
+              <a:lnSpc>
+                <a:spcPct val="100000"/>
+              </a:lnSpc>
+              <a:spcBef>
+                <a:spcPts val="0"/>
+              </a:spcBef>
+              <a:spcAft>
+                <a:spcPts val="600"/>
+              </a:spcAft>
+            </a:pPr>
+            <a:r>
+              <a:rPr sz="1200" b="1">
+                <a:solidFill>
+                  <a:srgbClr val="FFFFFF"/>
+                </a:solidFill>
+                <a:latin typeface="Segoe UI Semibold"/>
+              </a:rPr>
+              <a:t>✔</a:t>
+            </a:r>
+          </a:p>
+        </p:txBody>
+      </p:sp>
+      <p:sp>
+        <p:nvSpPr>
+          <p:cNvPr id="30" name="TextBox 29"/>
+          <p:cNvSpPr txBox="1"/>
+          <p:nvPr/>
+        </p:nvSpPr>
+        <p:spPr>
+          <a:xfrm>
+            <a:off x="7452360" y="4453128"/>
+            <a:ext cx="3977640" cy="548640"/>
+          </a:xfrm>
+          <a:prstGeom prst="rect">
+            <a:avLst/>
+          </a:prstGeom>
+          <a:noFill/>
+        </p:spPr>
+        <p:txBody>
+          <a:bodyPr wrap="square" anchor="t" lIns="0" rIns="0" tIns="0" bIns="0">
+            <a:spAutoFit/>
+          </a:bodyPr>
+          <a:lstStyle/>
+          <a:p>
+            <a:pPr algn="l">
+              <a:lnSpc>
+                <a:spcPct val="115000"/>
+              </a:lnSpc>
+              <a:spcBef>
+                <a:spcPts val="0"/>
+              </a:spcBef>
+              <a:spcAft>
+                <a:spcPts val="0"/>
+              </a:spcAft>
+            </a:pPr>
+            <a:r>
+              <a:rPr sz="1350" b="1">
+                <a:solidFill>
+                  <a:srgbClr val="FFFFFF"/>
+                </a:solidFill>
+                <a:latin typeface="Segoe UI Semibold"/>
+              </a:rPr>
+              <a:t>Escenarios en minutos</a:t>
+            </a:r>
+          </a:p>
+        </p:txBody>
+      </p:sp>
+      <p:sp>
+        <p:nvSpPr>
+          <p:cNvPr id="31" name="Oval 30"/>
           <p:cNvSpPr/>
           <p:nvPr/>
         </p:nvSpPr>
         <p:spPr>
           <a:xfrm>
-            <a:off x="5157216" y="2468880"/>
-            <a:ext cx="1874519" cy="640080"/>
-          </a:xfrm>
-          <a:prstGeom prst="round2SameRect">
+            <a:off x="6995160" y="5129784"/>
+            <a:ext cx="310896" cy="310896"/>
+          </a:xfrm>
+          <a:prstGeom prst="ellipse">
             <a:avLst/>
           </a:prstGeom>
           <a:solidFill>
-            <a:srgbClr val="F5B241"/>
+            <a:srgbClr val="2E9E6B"/>
           </a:solidFill>
           <a:ln>
             <a:noFill/>
@@ -14005,58 +14104,14 @@
       </p:sp>
       <p:sp>
         <p:nvSpPr>
-          <p:cNvPr id="22" name="Oval 21"/>
-          <p:cNvSpPr/>
-          <p:nvPr/>
-        </p:nvSpPr>
-        <p:spPr>
-          <a:xfrm>
-            <a:off x="5637276" y="2724912"/>
-            <a:ext cx="914400" cy="914400"/>
-          </a:xfrm>
-          <a:prstGeom prst="ellipse">
-            <a:avLst/>
-          </a:prstGeom>
-          <a:solidFill>
-            <a:srgbClr val="0A2A43"/>
-          </a:solidFill>
-          <a:ln>
-            <a:noFill/>
-          </a:ln>
-          <a:effectLst/>
-        </p:spPr>
-        <p:style>
-          <a:lnRef idx="1">
-            <a:schemeClr val="accent1"/>
-          </a:lnRef>
-          <a:fillRef idx="3">
-            <a:schemeClr val="accent1"/>
-          </a:fillRef>
-          <a:effectRef idx="2">
-            <a:schemeClr val="accent1"/>
-          </a:effectRef>
-          <a:fontRef idx="minor">
-            <a:schemeClr val="lt1"/>
-          </a:fontRef>
-        </p:style>
-        <p:txBody>
-          <a:bodyPr rtlCol="0" anchor="ctr"/>
-          <a:lstStyle/>
-          <a:p>
-            <a:pPr algn="ctr"/>
-          </a:p>
-        </p:txBody>
-      </p:sp>
-      <p:sp>
-        <p:nvSpPr>
-          <p:cNvPr id="23" name="TextBox 22"/>
-          <p:cNvSpPr txBox="1"/>
-          <p:nvPr/>
-        </p:nvSpPr>
-        <p:spPr>
-          <a:xfrm>
-            <a:off x="5637276" y="2724912"/>
-            <a:ext cx="914400" cy="914400"/>
+          <p:cNvPr id="32" name="TextBox 31"/>
+          <p:cNvSpPr txBox="1"/>
+          <p:nvPr/>
+        </p:nvSpPr>
+        <p:spPr>
+          <a:xfrm>
+            <a:off x="6995160" y="5129784"/>
+            <a:ext cx="310896" cy="310896"/>
           </a:xfrm>
           <a:prstGeom prst="rect">
             <a:avLst/>
@@ -14081,27 +14136,27 @@
               </a:spcAft>
             </a:pPr>
             <a:r>
-              <a:rPr sz="2600" b="1">
+              <a:rPr sz="1200" b="1">
                 <a:solidFill>
                   <a:srgbClr val="FFFFFF"/>
                 </a:solidFill>
                 <a:latin typeface="Segoe UI Semibold"/>
               </a:rPr>
-              <a:t>3</a:t>
-            </a:r>
-          </a:p>
-        </p:txBody>
-      </p:sp>
-      <p:sp>
-        <p:nvSpPr>
-          <p:cNvPr id="24" name="TextBox 23"/>
-          <p:cNvSpPr txBox="1"/>
-          <p:nvPr/>
-        </p:nvSpPr>
-        <p:spPr>
-          <a:xfrm>
-            <a:off x="5248656" y="3749040"/>
-            <a:ext cx="1691639" cy="411480"/>
+              <a:t>✔</a:t>
+            </a:r>
+          </a:p>
+        </p:txBody>
+      </p:sp>
+      <p:sp>
+        <p:nvSpPr>
+          <p:cNvPr id="33" name="TextBox 32"/>
+          <p:cNvSpPr txBox="1"/>
+          <p:nvPr/>
+        </p:nvSpPr>
+        <p:spPr>
+          <a:xfrm>
+            <a:off x="7452360" y="5111496"/>
+            <a:ext cx="3977640" cy="548640"/>
           </a:xfrm>
           <a:prstGeom prst="rect">
             <a:avLst/>
@@ -14114,820 +14169,32 @@
           </a:bodyPr>
           <a:lstStyle/>
           <a:p>
-            <a:pPr algn="ctr">
-              <a:lnSpc>
-                <a:spcPct val="100000"/>
-              </a:lnSpc>
-              <a:spcBef>
-                <a:spcPts val="0"/>
-              </a:spcBef>
-              <a:spcAft>
-                <a:spcPts val="0"/>
-              </a:spcAft>
-            </a:pPr>
-            <a:r>
-              <a:rPr sz="1600" b="1">
-                <a:solidFill>
-                  <a:srgbClr val="132A3E"/>
+            <a:pPr algn="l">
+              <a:lnSpc>
+                <a:spcPct val="115000"/>
+              </a:lnSpc>
+              <a:spcBef>
+                <a:spcPts val="0"/>
+              </a:spcBef>
+              <a:spcAft>
+                <a:spcPts val="0"/>
+              </a:spcAft>
+            </a:pPr>
+            <a:r>
+              <a:rPr sz="1350" b="1">
+                <a:solidFill>
+                  <a:srgbClr val="FFFFFF"/>
                 </a:solidFill>
                 <a:latin typeface="Segoe UI Semibold"/>
               </a:rPr>
-              <a:t>Planificar</a:t>
-            </a:r>
-          </a:p>
-        </p:txBody>
-      </p:sp>
-      <p:sp>
-        <p:nvSpPr>
-          <p:cNvPr id="25" name="TextBox 24"/>
-          <p:cNvSpPr txBox="1"/>
-          <p:nvPr/>
-        </p:nvSpPr>
-        <p:spPr>
-          <a:xfrm>
-            <a:off x="5321808" y="4206240"/>
-            <a:ext cx="1545335" cy="822960"/>
-          </a:xfrm>
-          <a:prstGeom prst="rect">
-            <a:avLst/>
-          </a:prstGeom>
-          <a:noFill/>
-        </p:spPr>
-        <p:txBody>
-          <a:bodyPr wrap="square" anchor="t" lIns="0" rIns="0" tIns="0" bIns="0">
-            <a:spAutoFit/>
-          </a:bodyPr>
-          <a:lstStyle/>
-          <a:p>
-            <a:pPr algn="ctr">
-              <a:lnSpc>
-                <a:spcPct val="118000"/>
-              </a:lnSpc>
-              <a:spcBef>
-                <a:spcPts val="0"/>
-              </a:spcBef>
-              <a:spcAft>
-                <a:spcPts val="0"/>
-              </a:spcAft>
-            </a:pPr>
-            <a:r>
-              <a:rPr sz="1150" b="0">
-                <a:solidFill>
-                  <a:srgbClr val="5B6B7B"/>
-                </a:solidFill>
-                <a:latin typeface="Segoe UI"/>
-              </a:rPr>
-              <a:t>Presupuestar y proyectar de forma colaborativa.</a:t>
-            </a:r>
-          </a:p>
-        </p:txBody>
-      </p:sp>
-      <p:sp>
-        <p:nvSpPr>
-          <p:cNvPr id="26" name="Chevron 25"/>
-          <p:cNvSpPr/>
-          <p:nvPr/>
-        </p:nvSpPr>
-        <p:spPr>
-          <a:xfrm>
-            <a:off x="7050023" y="3520440"/>
-            <a:ext cx="278893" cy="365760"/>
-          </a:xfrm>
-          <a:prstGeom prst="chevron">
-            <a:avLst/>
-          </a:prstGeom>
-          <a:solidFill>
-            <a:srgbClr val="F5B241"/>
-          </a:solidFill>
-          <a:ln>
-            <a:noFill/>
-          </a:ln>
-          <a:effectLst/>
-        </p:spPr>
-        <p:style>
-          <a:lnRef idx="1">
-            <a:schemeClr val="accent1"/>
-          </a:lnRef>
-          <a:fillRef idx="3">
-            <a:schemeClr val="accent1"/>
-          </a:fillRef>
-          <a:effectRef idx="2">
-            <a:schemeClr val="accent1"/>
-          </a:effectRef>
-          <a:fontRef idx="minor">
-            <a:schemeClr val="lt1"/>
-          </a:fontRef>
-        </p:style>
-        <p:txBody>
-          <a:bodyPr rtlCol="0" anchor="ctr"/>
-          <a:lstStyle/>
-          <a:p>
-            <a:pPr algn="ctr"/>
-          </a:p>
-        </p:txBody>
-      </p:sp>
-      <p:sp>
-        <p:nvSpPr>
-          <p:cNvPr id="27" name="Rounded Rectangle 26"/>
-          <p:cNvSpPr/>
-          <p:nvPr/>
-        </p:nvSpPr>
-        <p:spPr>
-          <a:xfrm>
-            <a:off x="7347204" y="2468880"/>
-            <a:ext cx="1874519" cy="2651760"/>
-          </a:xfrm>
-          <a:prstGeom prst="roundRect">
-            <a:avLst/>
-          </a:prstGeom>
-          <a:solidFill>
-            <a:srgbClr val="FFFFFF"/>
-          </a:solidFill>
-          <a:ln>
-            <a:noFill/>
-          </a:ln>
-          <a:effectLst/>
-          <a:effectLst>
-            <a:outerShdw blurRad="90000" dist="40000" dir="5400000" rotWithShape="0">
-              <a:srgbClr val="0A2A43">
-                <a:alpha val="22000"/>
-              </a:srgbClr>
-            </a:outerShdw>
-          </a:effectLst>
-        </p:spPr>
-        <p:style>
-          <a:lnRef idx="1">
-            <a:schemeClr val="accent1"/>
-          </a:lnRef>
-          <a:fillRef idx="3">
-            <a:schemeClr val="accent1"/>
-          </a:fillRef>
-          <a:effectRef idx="2">
-            <a:schemeClr val="accent1"/>
-          </a:effectRef>
-          <a:fontRef idx="minor">
-            <a:schemeClr val="lt1"/>
-          </a:fontRef>
-        </p:style>
-        <p:txBody>
-          <a:bodyPr rtlCol="0" anchor="ctr"/>
-          <a:lstStyle/>
-          <a:p>
-            <a:pPr algn="ctr"/>
-          </a:p>
-        </p:txBody>
-      </p:sp>
-      <p:sp>
-        <p:nvSpPr>
-          <p:cNvPr id="28" name="Round Same Side Corner Rectangle 27"/>
-          <p:cNvSpPr/>
-          <p:nvPr/>
-        </p:nvSpPr>
-        <p:spPr>
-          <a:xfrm>
-            <a:off x="7347204" y="2468880"/>
-            <a:ext cx="1874519" cy="640080"/>
-          </a:xfrm>
-          <a:prstGeom prst="round2SameRect">
-            <a:avLst/>
-          </a:prstGeom>
-          <a:solidFill>
-            <a:srgbClr val="006EC7"/>
-          </a:solidFill>
-          <a:ln>
-            <a:noFill/>
-          </a:ln>
-          <a:effectLst/>
-        </p:spPr>
-        <p:style>
-          <a:lnRef idx="1">
-            <a:schemeClr val="accent1"/>
-          </a:lnRef>
-          <a:fillRef idx="3">
-            <a:schemeClr val="accent1"/>
-          </a:fillRef>
-          <a:effectRef idx="2">
-            <a:schemeClr val="accent1"/>
-          </a:effectRef>
-          <a:fontRef idx="minor">
-            <a:schemeClr val="lt1"/>
-          </a:fontRef>
-        </p:style>
-        <p:txBody>
-          <a:bodyPr rtlCol="0" anchor="ctr"/>
-          <a:lstStyle/>
-          <a:p>
-            <a:pPr algn="ctr"/>
-          </a:p>
-        </p:txBody>
-      </p:sp>
-      <p:sp>
-        <p:nvSpPr>
-          <p:cNvPr id="29" name="Oval 28"/>
-          <p:cNvSpPr/>
-          <p:nvPr/>
-        </p:nvSpPr>
-        <p:spPr>
-          <a:xfrm>
-            <a:off x="7827264" y="2724912"/>
-            <a:ext cx="914400" cy="914400"/>
-          </a:xfrm>
-          <a:prstGeom prst="ellipse">
-            <a:avLst/>
-          </a:prstGeom>
-          <a:solidFill>
-            <a:srgbClr val="0A2A43"/>
-          </a:solidFill>
-          <a:ln>
-            <a:noFill/>
-          </a:ln>
-          <a:effectLst/>
-        </p:spPr>
-        <p:style>
-          <a:lnRef idx="1">
-            <a:schemeClr val="accent1"/>
-          </a:lnRef>
-          <a:fillRef idx="3">
-            <a:schemeClr val="accent1"/>
-          </a:fillRef>
-          <a:effectRef idx="2">
-            <a:schemeClr val="accent1"/>
-          </a:effectRef>
-          <a:fontRef idx="minor">
-            <a:schemeClr val="lt1"/>
-          </a:fontRef>
-        </p:style>
-        <p:txBody>
-          <a:bodyPr rtlCol="0" anchor="ctr"/>
-          <a:lstStyle/>
-          <a:p>
-            <a:pPr algn="ctr"/>
-          </a:p>
-        </p:txBody>
-      </p:sp>
-      <p:sp>
-        <p:nvSpPr>
-          <p:cNvPr id="30" name="TextBox 29"/>
-          <p:cNvSpPr txBox="1"/>
-          <p:nvPr/>
-        </p:nvSpPr>
-        <p:spPr>
-          <a:xfrm>
-            <a:off x="7827264" y="2724912"/>
-            <a:ext cx="914400" cy="914400"/>
-          </a:xfrm>
-          <a:prstGeom prst="rect">
-            <a:avLst/>
-          </a:prstGeom>
-          <a:noFill/>
-        </p:spPr>
-        <p:txBody>
-          <a:bodyPr wrap="square" anchor="ctr" lIns="0" rIns="0" tIns="0" bIns="0">
-            <a:spAutoFit/>
-          </a:bodyPr>
-          <a:lstStyle/>
-          <a:p>
-            <a:pPr algn="ctr">
-              <a:lnSpc>
-                <a:spcPct val="100000"/>
-              </a:lnSpc>
-              <a:spcBef>
-                <a:spcPts val="0"/>
-              </a:spcBef>
-              <a:spcAft>
-                <a:spcPts val="600"/>
-              </a:spcAft>
-            </a:pPr>
-            <a:r>
-              <a:rPr sz="2600" b="1">
-                <a:solidFill>
-                  <a:srgbClr val="FFFFFF"/>
-                </a:solidFill>
-                <a:latin typeface="Segoe UI Semibold"/>
-              </a:rPr>
-              <a:t>4</a:t>
-            </a:r>
-          </a:p>
-        </p:txBody>
-      </p:sp>
-      <p:sp>
-        <p:nvSpPr>
-          <p:cNvPr id="31" name="TextBox 30"/>
-          <p:cNvSpPr txBox="1"/>
-          <p:nvPr/>
-        </p:nvSpPr>
-        <p:spPr>
-          <a:xfrm>
-            <a:off x="7438644" y="3749040"/>
-            <a:ext cx="1691639" cy="411480"/>
-          </a:xfrm>
-          <a:prstGeom prst="rect">
-            <a:avLst/>
-          </a:prstGeom>
-          <a:noFill/>
-        </p:spPr>
-        <p:txBody>
-          <a:bodyPr wrap="square" anchor="t" lIns="0" rIns="0" tIns="0" bIns="0">
-            <a:spAutoFit/>
-          </a:bodyPr>
-          <a:lstStyle/>
-          <a:p>
-            <a:pPr algn="ctr">
-              <a:lnSpc>
-                <a:spcPct val="100000"/>
-              </a:lnSpc>
-              <a:spcBef>
-                <a:spcPts val="0"/>
-              </a:spcBef>
-              <a:spcAft>
-                <a:spcPts val="0"/>
-              </a:spcAft>
-            </a:pPr>
-            <a:r>
-              <a:rPr sz="1600" b="1">
-                <a:solidFill>
-                  <a:srgbClr val="132A3E"/>
-                </a:solidFill>
-                <a:latin typeface="Segoe UI Semibold"/>
-              </a:rPr>
-              <a:t>Simular</a:t>
-            </a:r>
-          </a:p>
-        </p:txBody>
-      </p:sp>
-      <p:sp>
-        <p:nvSpPr>
-          <p:cNvPr id="32" name="TextBox 31"/>
-          <p:cNvSpPr txBox="1"/>
-          <p:nvPr/>
-        </p:nvSpPr>
-        <p:spPr>
-          <a:xfrm>
-            <a:off x="7511796" y="4206240"/>
-            <a:ext cx="1545335" cy="822960"/>
-          </a:xfrm>
-          <a:prstGeom prst="rect">
-            <a:avLst/>
-          </a:prstGeom>
-          <a:noFill/>
-        </p:spPr>
-        <p:txBody>
-          <a:bodyPr wrap="square" anchor="t" lIns="0" rIns="0" tIns="0" bIns="0">
-            <a:spAutoFit/>
-          </a:bodyPr>
-          <a:lstStyle/>
-          <a:p>
-            <a:pPr algn="ctr">
-              <a:lnSpc>
-                <a:spcPct val="118000"/>
-              </a:lnSpc>
-              <a:spcBef>
-                <a:spcPts val="0"/>
-              </a:spcBef>
-              <a:spcAft>
-                <a:spcPts val="0"/>
-              </a:spcAft>
-            </a:pPr>
-            <a:r>
-              <a:rPr sz="1150" b="0">
-                <a:solidFill>
-                  <a:srgbClr val="5B6B7B"/>
-                </a:solidFill>
-                <a:latin typeface="Segoe UI"/>
-              </a:rPr>
-              <a:t>Evaluar escenarios y análisis 'what-if'.</a:t>
-            </a:r>
-          </a:p>
-        </p:txBody>
-      </p:sp>
-      <p:sp>
-        <p:nvSpPr>
-          <p:cNvPr id="33" name="Chevron 32"/>
-          <p:cNvSpPr/>
-          <p:nvPr/>
-        </p:nvSpPr>
-        <p:spPr>
-          <a:xfrm>
-            <a:off x="9240011" y="3520440"/>
-            <a:ext cx="278893" cy="365760"/>
-          </a:xfrm>
-          <a:prstGeom prst="chevron">
-            <a:avLst/>
-          </a:prstGeom>
-          <a:solidFill>
-            <a:srgbClr val="006EC7"/>
-          </a:solidFill>
-          <a:ln>
-            <a:noFill/>
-          </a:ln>
-          <a:effectLst/>
-        </p:spPr>
-        <p:style>
-          <a:lnRef idx="1">
-            <a:schemeClr val="accent1"/>
-          </a:lnRef>
-          <a:fillRef idx="3">
-            <a:schemeClr val="accent1"/>
-          </a:fillRef>
-          <a:effectRef idx="2">
-            <a:schemeClr val="accent1"/>
-          </a:effectRef>
-          <a:fontRef idx="minor">
-            <a:schemeClr val="lt1"/>
-          </a:fontRef>
-        </p:style>
-        <p:txBody>
-          <a:bodyPr rtlCol="0" anchor="ctr"/>
-          <a:lstStyle/>
-          <a:p>
-            <a:pPr algn="ctr"/>
-          </a:p>
-        </p:txBody>
-      </p:sp>
-      <p:sp>
-        <p:nvSpPr>
-          <p:cNvPr id="34" name="Rounded Rectangle 33"/>
-          <p:cNvSpPr/>
-          <p:nvPr/>
-        </p:nvSpPr>
-        <p:spPr>
-          <a:xfrm>
-            <a:off x="9537193" y="2468880"/>
-            <a:ext cx="1874519" cy="2651760"/>
-          </a:xfrm>
-          <a:prstGeom prst="roundRect">
-            <a:avLst/>
-          </a:prstGeom>
-          <a:solidFill>
-            <a:srgbClr val="FFFFFF"/>
-          </a:solidFill>
-          <a:ln>
-            <a:noFill/>
-          </a:ln>
-          <a:effectLst/>
-          <a:effectLst>
-            <a:outerShdw blurRad="90000" dist="40000" dir="5400000" rotWithShape="0">
-              <a:srgbClr val="0A2A43">
-                <a:alpha val="22000"/>
-              </a:srgbClr>
-            </a:outerShdw>
-          </a:effectLst>
-        </p:spPr>
-        <p:style>
-          <a:lnRef idx="1">
-            <a:schemeClr val="accent1"/>
-          </a:lnRef>
-          <a:fillRef idx="3">
-            <a:schemeClr val="accent1"/>
-          </a:fillRef>
-          <a:effectRef idx="2">
-            <a:schemeClr val="accent1"/>
-          </a:effectRef>
-          <a:fontRef idx="minor">
-            <a:schemeClr val="lt1"/>
-          </a:fontRef>
-        </p:style>
-        <p:txBody>
-          <a:bodyPr rtlCol="0" anchor="ctr"/>
-          <a:lstStyle/>
-          <a:p>
-            <a:pPr algn="ctr"/>
-          </a:p>
-        </p:txBody>
-      </p:sp>
-      <p:sp>
-        <p:nvSpPr>
-          <p:cNvPr id="35" name="Round Same Side Corner Rectangle 34"/>
-          <p:cNvSpPr/>
-          <p:nvPr/>
-        </p:nvSpPr>
-        <p:spPr>
-          <a:xfrm>
-            <a:off x="9537193" y="2468880"/>
-            <a:ext cx="1874519" cy="640080"/>
-          </a:xfrm>
-          <a:prstGeom prst="round2SameRect">
-            <a:avLst/>
-          </a:prstGeom>
-          <a:solidFill>
-            <a:srgbClr val="0FA9B0"/>
-          </a:solidFill>
-          <a:ln>
-            <a:noFill/>
-          </a:ln>
-          <a:effectLst/>
-        </p:spPr>
-        <p:style>
-          <a:lnRef idx="1">
-            <a:schemeClr val="accent1"/>
-          </a:lnRef>
-          <a:fillRef idx="3">
-            <a:schemeClr val="accent1"/>
-          </a:fillRef>
-          <a:effectRef idx="2">
-            <a:schemeClr val="accent1"/>
-          </a:effectRef>
-          <a:fontRef idx="minor">
-            <a:schemeClr val="lt1"/>
-          </a:fontRef>
-        </p:style>
-        <p:txBody>
-          <a:bodyPr rtlCol="0" anchor="ctr"/>
-          <a:lstStyle/>
-          <a:p>
-            <a:pPr algn="ctr"/>
-          </a:p>
-        </p:txBody>
-      </p:sp>
-      <p:sp>
-        <p:nvSpPr>
-          <p:cNvPr id="36" name="Oval 35"/>
-          <p:cNvSpPr/>
-          <p:nvPr/>
-        </p:nvSpPr>
-        <p:spPr>
-          <a:xfrm>
-            <a:off x="10017252" y="2724912"/>
-            <a:ext cx="914400" cy="914400"/>
-          </a:xfrm>
-          <a:prstGeom prst="ellipse">
-            <a:avLst/>
-          </a:prstGeom>
-          <a:solidFill>
-            <a:srgbClr val="0A2A43"/>
-          </a:solidFill>
-          <a:ln>
-            <a:noFill/>
-          </a:ln>
-          <a:effectLst/>
-        </p:spPr>
-        <p:style>
-          <a:lnRef idx="1">
-            <a:schemeClr val="accent1"/>
-          </a:lnRef>
-          <a:fillRef idx="3">
-            <a:schemeClr val="accent1"/>
-          </a:fillRef>
-          <a:effectRef idx="2">
-            <a:schemeClr val="accent1"/>
-          </a:effectRef>
-          <a:fontRef idx="minor">
-            <a:schemeClr val="lt1"/>
-          </a:fontRef>
-        </p:style>
-        <p:txBody>
-          <a:bodyPr rtlCol="0" anchor="ctr"/>
-          <a:lstStyle/>
-          <a:p>
-            <a:pPr algn="ctr"/>
-          </a:p>
-        </p:txBody>
-      </p:sp>
-      <p:sp>
-        <p:nvSpPr>
-          <p:cNvPr id="37" name="TextBox 36"/>
-          <p:cNvSpPr txBox="1"/>
-          <p:nvPr/>
-        </p:nvSpPr>
-        <p:spPr>
-          <a:xfrm>
-            <a:off x="10017252" y="2724912"/>
-            <a:ext cx="914400" cy="914400"/>
-          </a:xfrm>
-          <a:prstGeom prst="rect">
-            <a:avLst/>
-          </a:prstGeom>
-          <a:noFill/>
-        </p:spPr>
-        <p:txBody>
-          <a:bodyPr wrap="square" anchor="ctr" lIns="0" rIns="0" tIns="0" bIns="0">
-            <a:spAutoFit/>
-          </a:bodyPr>
-          <a:lstStyle/>
-          <a:p>
-            <a:pPr algn="ctr">
-              <a:lnSpc>
-                <a:spcPct val="100000"/>
-              </a:lnSpc>
-              <a:spcBef>
-                <a:spcPts val="0"/>
-              </a:spcBef>
-              <a:spcAft>
-                <a:spcPts val="600"/>
-              </a:spcAft>
-            </a:pPr>
-            <a:r>
-              <a:rPr sz="2600" b="1">
-                <a:solidFill>
-                  <a:srgbClr val="FFFFFF"/>
-                </a:solidFill>
-                <a:latin typeface="Segoe UI Semibold"/>
-              </a:rPr>
-              <a:t>5</a:t>
-            </a:r>
-          </a:p>
-        </p:txBody>
-      </p:sp>
-      <p:sp>
-        <p:nvSpPr>
-          <p:cNvPr id="38" name="TextBox 37"/>
-          <p:cNvSpPr txBox="1"/>
-          <p:nvPr/>
-        </p:nvSpPr>
-        <p:spPr>
-          <a:xfrm>
-            <a:off x="9628633" y="3749040"/>
-            <a:ext cx="1691639" cy="411480"/>
-          </a:xfrm>
-          <a:prstGeom prst="rect">
-            <a:avLst/>
-          </a:prstGeom>
-          <a:noFill/>
-        </p:spPr>
-        <p:txBody>
-          <a:bodyPr wrap="square" anchor="t" lIns="0" rIns="0" tIns="0" bIns="0">
-            <a:spAutoFit/>
-          </a:bodyPr>
-          <a:lstStyle/>
-          <a:p>
-            <a:pPr algn="ctr">
-              <a:lnSpc>
-                <a:spcPct val="100000"/>
-              </a:lnSpc>
-              <a:spcBef>
-                <a:spcPts val="0"/>
-              </a:spcBef>
-              <a:spcAft>
-                <a:spcPts val="0"/>
-              </a:spcAft>
-            </a:pPr>
-            <a:r>
-              <a:rPr sz="1600" b="1">
-                <a:solidFill>
-                  <a:srgbClr val="132A3E"/>
-                </a:solidFill>
-                <a:latin typeface="Segoe UI Semibold"/>
-              </a:rPr>
-              <a:t>Analizar</a:t>
-            </a:r>
-          </a:p>
-        </p:txBody>
-      </p:sp>
-      <p:sp>
-        <p:nvSpPr>
-          <p:cNvPr id="39" name="TextBox 38"/>
-          <p:cNvSpPr txBox="1"/>
-          <p:nvPr/>
-        </p:nvSpPr>
-        <p:spPr>
-          <a:xfrm>
-            <a:off x="9701785" y="4206240"/>
-            <a:ext cx="1545335" cy="822960"/>
-          </a:xfrm>
-          <a:prstGeom prst="rect">
-            <a:avLst/>
-          </a:prstGeom>
-          <a:noFill/>
-        </p:spPr>
-        <p:txBody>
-          <a:bodyPr wrap="square" anchor="t" lIns="0" rIns="0" tIns="0" bIns="0">
-            <a:spAutoFit/>
-          </a:bodyPr>
-          <a:lstStyle/>
-          <a:p>
-            <a:pPr algn="ctr">
-              <a:lnSpc>
-                <a:spcPct val="118000"/>
-              </a:lnSpc>
-              <a:spcBef>
-                <a:spcPts val="0"/>
-              </a:spcBef>
-              <a:spcAft>
-                <a:spcPts val="0"/>
-              </a:spcAft>
-            </a:pPr>
-            <a:r>
-              <a:rPr sz="1150" b="0">
-                <a:solidFill>
-                  <a:srgbClr val="5B6B7B"/>
-                </a:solidFill>
-                <a:latin typeface="Segoe UI"/>
-              </a:rPr>
-              <a:t>Comparar plan vs. real y medir desviaciones.</a:t>
-            </a:r>
-          </a:p>
-        </p:txBody>
-      </p:sp>
-      <p:sp>
-        <p:nvSpPr>
-          <p:cNvPr id="40" name="Rounded Rectangle 39"/>
-          <p:cNvSpPr/>
-          <p:nvPr/>
-        </p:nvSpPr>
-        <p:spPr>
-          <a:xfrm>
-            <a:off x="777240" y="5440680"/>
-            <a:ext cx="10634472" cy="658368"/>
-          </a:xfrm>
-          <a:prstGeom prst="roundRect">
-            <a:avLst/>
-          </a:prstGeom>
-          <a:solidFill>
-            <a:srgbClr val="0A2A43"/>
-          </a:solidFill>
-          <a:ln>
-            <a:noFill/>
-          </a:ln>
-          <a:effectLst/>
-        </p:spPr>
-        <p:style>
-          <a:lnRef idx="1">
-            <a:schemeClr val="accent1"/>
-          </a:lnRef>
-          <a:fillRef idx="3">
-            <a:schemeClr val="accent1"/>
-          </a:fillRef>
-          <a:effectRef idx="2">
-            <a:schemeClr val="accent1"/>
-          </a:effectRef>
-          <a:fontRef idx="minor">
-            <a:schemeClr val="lt1"/>
-          </a:fontRef>
-        </p:style>
-        <p:txBody>
-          <a:bodyPr rtlCol="0" anchor="ctr"/>
-          <a:lstStyle/>
-          <a:p>
-            <a:pPr algn="ctr"/>
-          </a:p>
-        </p:txBody>
-      </p:sp>
-      <p:sp>
-        <p:nvSpPr>
-          <p:cNvPr id="41" name="TextBox 40"/>
-          <p:cNvSpPr txBox="1"/>
-          <p:nvPr/>
-        </p:nvSpPr>
-        <p:spPr>
-          <a:xfrm>
-            <a:off x="1005840" y="5541264"/>
-            <a:ext cx="10241280" cy="457200"/>
-          </a:xfrm>
-          <a:prstGeom prst="rect">
-            <a:avLst/>
-          </a:prstGeom>
-          <a:noFill/>
-        </p:spPr>
-        <p:txBody>
-          <a:bodyPr wrap="square" anchor="ctr" lIns="0" rIns="0" tIns="0" bIns="0">
-            <a:spAutoFit/>
-          </a:bodyPr>
-          <a:lstStyle/>
-          <a:p>
-            <a:pPr algn="l">
-              <a:lnSpc>
-                <a:spcPct val="100000"/>
-              </a:lnSpc>
-              <a:spcBef>
-                <a:spcPts val="0"/>
-              </a:spcBef>
-              <a:spcAft>
-                <a:spcPts val="0"/>
-              </a:spcAft>
-            </a:pPr>
-            <a:r>
-              <a:rPr sz="1500" b="1">
-                <a:solidFill>
-                  <a:srgbClr val="F5B241"/>
-                </a:solidFill>
-                <a:latin typeface="Segoe UI Semibold"/>
-              </a:rPr>
-              <a:t>↻  </a:t>
-            </a:r>
-            <a:r>
-              <a:rPr sz="1350" b="1">
-                <a:solidFill>
-                  <a:srgbClr val="FFFFFF"/>
-                </a:solidFill>
-                <a:latin typeface="Segoe UI Semibold"/>
-              </a:rPr>
-              <a:t>Proceso cíclico y continuo: </a:t>
-            </a:r>
-            <a:r>
-              <a:rPr sz="1350" b="0">
-                <a:solidFill>
-                  <a:srgbClr val="C7D6E3"/>
-                </a:solidFill>
-                <a:latin typeface="Segoe UI"/>
-              </a:rPr>
-              <a:t>los resultados del análisis retroalimentan el siguiente ciclo de planificación.</a:t>
-            </a:r>
-          </a:p>
-        </p:txBody>
-      </p:sp>
-      <p:sp>
-        <p:nvSpPr>
-          <p:cNvPr id="42" name="TextBox 41"/>
+              <a:t>Toda la organización alineada</a:t>
+            </a:r>
+          </a:p>
+        </p:txBody>
+      </p:sp>
+      <p:sp>
+        <p:nvSpPr>
+          <p:cNvPr id="34" name="TextBox 33"/>
           <p:cNvSpPr txBox="1"/>
           <p:nvPr/>
         </p:nvSpPr>
@@ -14972,7 +14239,7 @@
       </p:sp>
       <p:sp>
         <p:nvSpPr>
-          <p:cNvPr id="43" name="TextBox 42"/>
+          <p:cNvPr id="35" name="TextBox 34"/>
           <p:cNvSpPr txBox="1"/>
           <p:nvPr/>
         </p:nvSpPr>
@@ -15170,7 +14437,7 @@
                 </a:solidFill>
                 <a:latin typeface="Segoe UI Semibold"/>
               </a:rPr>
-              <a:t>Casos de uso de Planning</a:t>
+              <a:t>Valor para cada área</a:t>
             </a:r>
           </a:p>
         </p:txBody>
@@ -15215,7 +14482,7 @@
                 </a:solidFill>
                 <a:latin typeface="Segoe UI"/>
               </a:rPr>
-              <a:t>La planificación se extiende a todas las áreas de la organización sobre un mismo modelo integrado.</a:t>
+              <a:t>La misma plataforma da respuesta a las necesidades de las principales áreas de la empresa.</a:t>
             </a:r>
           </a:p>
         </p:txBody>
@@ -15349,13 +14616,13 @@
               </a:spcAft>
             </a:pPr>
             <a:r>
-              <a:rPr sz="1700" b="1">
+              <a:rPr sz="1800" b="1">
                 <a:solidFill>
                   <a:srgbClr val="FFFFFF"/>
                 </a:solidFill>
                 <a:latin typeface="Segoe UI Semibold"/>
               </a:rPr>
-              <a:t>Finanzas (FP&amp;A)</a:t>
+              <a:t>Finanzas</a:t>
             </a:r>
           </a:p>
         </p:txBody>
@@ -15444,7 +14711,7 @@
                 </a:solidFill>
                 <a:latin typeface="Segoe UI"/>
               </a:rPr>
-              <a:t>Presupuesto anual y rolling forecast</a:t>
+              <a:t>Presupuesto anual y revisiones periódicas</a:t>
             </a:r>
           </a:p>
         </p:txBody>
@@ -15533,7 +14800,7 @@
                 </a:solidFill>
                 <a:latin typeface="Segoe UI"/>
               </a:rPr>
-              <a:t>Estados financieros integrados (P&amp;L, balance, cash-flow)</a:t>
+              <a:t>Visión completa de resultados y tesorería</a:t>
             </a:r>
           </a:p>
         </p:txBody>
@@ -15622,7 +14889,7 @@
                 </a:solidFill>
                 <a:latin typeface="Segoe UI"/>
               </a:rPr>
-              <a:t>Consolidación y análisis de desviaciones</a:t>
+              <a:t>Control claro de desviaciones</a:t>
             </a:r>
           </a:p>
         </p:txBody>
@@ -15756,13 +15023,13 @@
               </a:spcAft>
             </a:pPr>
             <a:r>
-              <a:rPr sz="1700" b="1">
+              <a:rPr sz="1800" b="1">
                 <a:solidFill>
                   <a:srgbClr val="FFFFFF"/>
                 </a:solidFill>
                 <a:latin typeface="Segoe UI Semibold"/>
               </a:rPr>
-              <a:t>Ventas e Ingresos</a:t>
+              <a:t>Ventas</a:t>
             </a:r>
           </a:p>
         </p:txBody>
@@ -15851,7 +15118,7 @@
                 </a:solidFill>
                 <a:latin typeface="Segoe UI"/>
               </a:rPr>
-              <a:t>Planificación comercial y de cuotas</a:t>
+              <a:t>Objetivos comerciales por equipo y zona</a:t>
             </a:r>
           </a:p>
         </p:txBody>
@@ -15940,7 +15207,7 @@
                 </a:solidFill>
                 <a:latin typeface="Segoe UI"/>
               </a:rPr>
-              <a:t>Previsión de demanda por producto y región</a:t>
+              <a:t>Previsión de ventas y demanda</a:t>
             </a:r>
           </a:p>
         </p:txBody>
@@ -16029,7 +15296,7 @@
                 </a:solidFill>
                 <a:latin typeface="Segoe UI"/>
               </a:rPr>
-              <a:t>Simulación de precios y márgenes</a:t>
+              <a:t>Impacto de precios en el margen</a:t>
             </a:r>
           </a:p>
         </p:txBody>
@@ -16163,7 +15430,7 @@
               </a:spcAft>
             </a:pPr>
             <a:r>
-              <a:rPr sz="1700" b="1">
+              <a:rPr sz="1800" b="1">
                 <a:solidFill>
                   <a:srgbClr val="FFFFFF"/>
                 </a:solidFill>
@@ -16258,7 +15525,7 @@
                 </a:solidFill>
                 <a:latin typeface="Segoe UI"/>
               </a:rPr>
-              <a:t>Planificación de plantilla y costes laborales</a:t>
+              <a:t>Planificación de plantilla y costes</a:t>
             </a:r>
           </a:p>
         </p:txBody>
@@ -16347,7 +15614,7 @@
                 </a:solidFill>
                 <a:latin typeface="Segoe UI"/>
               </a:rPr>
-              <a:t>Escenarios de contratación y retribución</a:t>
+              <a:t>Escenarios de contratación</a:t>
             </a:r>
           </a:p>
         </p:txBody>
@@ -16436,7 +15703,7 @@
                 </a:solidFill>
                 <a:latin typeface="Segoe UI"/>
               </a:rPr>
-              <a:t>Alineación de capacidad con la demanda</a:t>
+              <a:t>Capacidad alineada con la demanda</a:t>
             </a:r>
           </a:p>
         </p:txBody>
@@ -16686,7 +15953,7 @@
                 </a:solidFill>
                 <a:latin typeface="Segoe UI Semibold"/>
               </a:rPr>
-              <a:t>Beneficios clave</a:t>
+              <a:t>El impacto para la empresa</a:t>
             </a:r>
           </a:p>
         </p:txBody>
@@ -16731,7 +15998,7 @@
                 </a:solidFill>
                 <a:latin typeface="Segoe UI"/>
               </a:rPr>
-              <a:t>Por qué las organizaciones eligen SAP Analytics Cloud para su planificación.</a:t>
+              <a:t>Lo que la dirección gana al adoptar una planificación conectada e inteligente.</a:t>
             </a:r>
           </a:p>
         </p:txBody>
@@ -16827,7 +16094,7 @@
                 </a:solidFill>
                 <a:latin typeface="Segoe UI Semibold"/>
               </a:rPr>
-              <a:t>1 </a:t>
+              <a:t>+  </a:t>
             </a:r>
             <a:r>
               <a:rPr sz="1600" b="0">
@@ -16836,7 +16103,7 @@
                 </a:solidFill>
                 <a:latin typeface="Segoe UI Light"/>
               </a:rPr>
-              <a:t>plataforma</a:t>
+              <a:t>rapidez</a:t>
             </a:r>
           </a:p>
         </p:txBody>
@@ -16881,7 +16148,7 @@
                 </a:solidFill>
                 <a:latin typeface="Segoe UI"/>
               </a:rPr>
-              <a:t>Analítica y planificación unificadas</a:t>
+              <a:t>Ciclos de días, no de semanas</a:t>
             </a:r>
           </a:p>
         </p:txBody>
@@ -16977,7 +16244,7 @@
                 </a:solidFill>
                 <a:latin typeface="Segoe UI Semibold"/>
               </a:rPr>
-              <a:t>+ </a:t>
+              <a:t>✔  </a:t>
             </a:r>
             <a:r>
               <a:rPr sz="1600" b="0">
@@ -16986,7 +16253,7 @@
                 </a:solidFill>
                 <a:latin typeface="Segoe UI Light"/>
               </a:rPr>
-              <a:t>colaboración</a:t>
+              <a:t>confianza</a:t>
             </a:r>
           </a:p>
         </p:txBody>
@@ -17031,7 +16298,7 @@
                 </a:solidFill>
                 <a:latin typeface="Segoe UI"/>
               </a:rPr>
-              <a:t>Áreas y responsables trabajando juntos</a:t>
+              <a:t>Una sola versión de los números</a:t>
             </a:r>
           </a:p>
         </p:txBody>
@@ -17127,7 +16394,7 @@
                 </a:solidFill>
                 <a:latin typeface="Segoe UI Semibold"/>
               </a:rPr>
-              <a:t>&lt;&gt; </a:t>
+              <a:t>↗  </a:t>
             </a:r>
             <a:r>
               <a:rPr sz="1600" b="0">
@@ -17136,7 +16403,7 @@
                 </a:solidFill>
                 <a:latin typeface="Segoe UI Light"/>
               </a:rPr>
-              <a:t>agilidad</a:t>
+              <a:t>anticipación</a:t>
             </a:r>
           </a:p>
         </p:txBody>
@@ -17181,7 +16448,7 @@
                 </a:solidFill>
                 <a:latin typeface="Segoe UI"/>
               </a:rPr>
-              <a:t>Del forecast anual al continuo</a:t>
+              <a:t>Ver el futuro antes de que llegue</a:t>
             </a:r>
           </a:p>
         </p:txBody>
@@ -17277,7 +16544,7 @@
                 </a:solidFill>
                 <a:latin typeface="Segoe UI Semibold"/>
               </a:rPr>
-              <a:t>AI </a:t>
+              <a:t>⧉  </a:t>
             </a:r>
             <a:r>
               <a:rPr sz="1600" b="0">
@@ -17286,7 +16553,7 @@
                 </a:solidFill>
                 <a:latin typeface="Segoe UI Light"/>
               </a:rPr>
-              <a:t>inteligencia</a:t>
+              <a:t>alineación</a:t>
             </a:r>
           </a:p>
         </p:txBody>
@@ -17331,7 +16598,7 @@
                 </a:solidFill>
                 <a:latin typeface="Segoe UI"/>
               </a:rPr>
-              <a:t>Predicciones con machine learning</a:t>
+              <a:t>Toda la empresa, un mismo plan</a:t>
             </a:r>
           </a:p>
         </p:txBody>
@@ -17351,7 +16618,7 @@
             <a:avLst/>
           </a:prstGeom>
           <a:solidFill>
-            <a:srgbClr val="0FA9B0"/>
+            <a:srgbClr val="2E9E6B"/>
           </a:solidFill>
           <a:ln>
             <a:noFill/>
@@ -17465,7 +16732,7 @@
                 </a:solidFill>
                 <a:latin typeface="Segoe UI Semibold"/>
               </a:rPr>
-              <a:t>Una sola fuente de la verdad</a:t>
+              <a:t>Decisiones más rápidas</a:t>
             </a:r>
           </a:p>
         </p:txBody>
@@ -17510,7 +16777,7 @@
                 </a:solidFill>
                 <a:latin typeface="Segoe UI"/>
               </a:rPr>
-              <a:t>Todos planifican sobre los mismos datos gobernados.</a:t>
+              <a:t>Menos tiempo recopilando datos, más tiempo decidiendo.</a:t>
             </a:r>
           </a:p>
         </p:txBody>
@@ -17530,7 +16797,7 @@
             <a:avLst/>
           </a:prstGeom>
           <a:solidFill>
-            <a:srgbClr val="0FA9B0"/>
+            <a:srgbClr val="2E9E6B"/>
           </a:solidFill>
           <a:ln>
             <a:noFill/>
@@ -17644,7 +16911,7 @@
                 </a:solidFill>
                 <a:latin typeface="Segoe UI Semibold"/>
               </a:rPr>
-              <a:t>Ciclos más rápidos</a:t>
+              <a:t>Menos riesgo de error</a:t>
             </a:r>
           </a:p>
         </p:txBody>
@@ -17689,7 +16956,7 @@
                 </a:solidFill>
                 <a:latin typeface="Segoe UI"/>
               </a:rPr>
-              <a:t>Automatización de cálculos y forecasts recurrentes.</a:t>
+              <a:t>Adiós a los fallos manuales de las hojas de cálculo.</a:t>
             </a:r>
           </a:p>
         </p:txBody>
@@ -17709,7 +16976,7 @@
             <a:avLst/>
           </a:prstGeom>
           <a:solidFill>
-            <a:srgbClr val="0FA9B0"/>
+            <a:srgbClr val="2E9E6B"/>
           </a:solidFill>
           <a:ln>
             <a:noFill/>
@@ -17823,7 +17090,7 @@
                 </a:solidFill>
                 <a:latin typeface="Segoe UI Semibold"/>
               </a:rPr>
-              <a:t>Mejores decisiones</a:t>
+              <a:t>Mejor visión del futuro</a:t>
             </a:r>
           </a:p>
         </p:txBody>
@@ -17868,7 +17135,7 @@
                 </a:solidFill>
                 <a:latin typeface="Segoe UI"/>
               </a:rPr>
-              <a:t>Escenarios, simulaciones y predicción integrados.</a:t>
+              <a:t>Escenarios y previsiones siempre a mano.</a:t>
             </a:r>
           </a:p>
         </p:txBody>
@@ -17888,7 +17155,7 @@
             <a:avLst/>
           </a:prstGeom>
           <a:solidFill>
-            <a:srgbClr val="0FA9B0"/>
+            <a:srgbClr val="2E9E6B"/>
           </a:solidFill>
           <a:ln>
             <a:noFill/>
@@ -18002,7 +17269,7 @@
                 </a:solidFill>
                 <a:latin typeface="Segoe UI Semibold"/>
               </a:rPr>
-              <a:t>Escalable en la nube</a:t>
+              <a:t>Crece con la empresa</a:t>
             </a:r>
           </a:p>
         </p:txBody>
@@ -18047,7 +17314,7 @@
                 </a:solidFill>
                 <a:latin typeface="Segoe UI"/>
               </a:rPr>
-              <a:t>Sin infraestructura; se adapta al crecimiento.</a:t>
+              <a:t>En la nube, sin grandes inversiones iniciales.</a:t>
             </a:r>
           </a:p>
         </p:txBody>
